--- a/AgenticAI/1-Intro-To-AgenticAI/2_Agent_vs_Chatbot_Finance.pptx
+++ b/AgenticAI/1-Intro-To-AgenticAI/2_Agent_vs_Chatbot_Finance.pptx
@@ -221,7 +221,7 @@
           <a:p>
             <a:fld id="{7BAEECA8-D063-486F-AE31-5020270C1449}" type="datetimeFigureOut">
               <a:rPr lang="en-US" smtClean="0"/>
-              <a:t>6/5/2026</a:t>
+              <a:t>9/5/2026</a:t>
             </a:fld>
             <a:endParaRPr lang="en-US"/>
           </a:p>
@@ -398,7 +398,7 @@
           <a:p>
             <a:fld id="{CB233BD1-3BA8-448D-9D08-7846095EA517}" type="datetimeFigureOut">
               <a:rPr lang="en-US" smtClean="0"/>
-              <a:t>6/5/2026</a:t>
+              <a:t>9/5/2026</a:t>
             </a:fld>
             <a:endParaRPr lang="en-US"/>
           </a:p>
@@ -812,7 +812,7 @@
           <a:p>
             <a:fld id="{6383FAE1-13DE-4511-8C1B-C8AFB720664C}" type="datetimeFigureOut">
               <a:rPr lang="en-US" smtClean="0"/>
-              <a:t>6/5/2026</a:t>
+              <a:t>9/5/2026</a:t>
             </a:fld>
             <a:endParaRPr lang="en-US"/>
           </a:p>
@@ -1010,7 +1010,7 @@
           <a:p>
             <a:fld id="{6383FAE1-13DE-4511-8C1B-C8AFB720664C}" type="datetimeFigureOut">
               <a:rPr lang="en-US" smtClean="0"/>
-              <a:t>6/5/2026</a:t>
+              <a:t>9/5/2026</a:t>
             </a:fld>
             <a:endParaRPr lang="en-US"/>
           </a:p>
@@ -1218,7 +1218,7 @@
           <a:p>
             <a:fld id="{6383FAE1-13DE-4511-8C1B-C8AFB720664C}" type="datetimeFigureOut">
               <a:rPr lang="en-US" smtClean="0"/>
-              <a:t>6/5/2026</a:t>
+              <a:t>9/5/2026</a:t>
             </a:fld>
             <a:endParaRPr lang="en-US"/>
           </a:p>
@@ -1416,7 +1416,7 @@
           <a:p>
             <a:fld id="{6383FAE1-13DE-4511-8C1B-C8AFB720664C}" type="datetimeFigureOut">
               <a:rPr lang="en-US" smtClean="0"/>
-              <a:t>6/5/2026</a:t>
+              <a:t>9/5/2026</a:t>
             </a:fld>
             <a:endParaRPr lang="en-US"/>
           </a:p>
@@ -1691,7 +1691,7 @@
           <a:p>
             <a:fld id="{6383FAE1-13DE-4511-8C1B-C8AFB720664C}" type="datetimeFigureOut">
               <a:rPr lang="en-US" smtClean="0"/>
-              <a:t>6/5/2026</a:t>
+              <a:t>9/5/2026</a:t>
             </a:fld>
             <a:endParaRPr lang="en-US"/>
           </a:p>
@@ -1956,7 +1956,7 @@
           <a:p>
             <a:fld id="{6383FAE1-13DE-4511-8C1B-C8AFB720664C}" type="datetimeFigureOut">
               <a:rPr lang="en-US" smtClean="0"/>
-              <a:t>6/5/2026</a:t>
+              <a:t>9/5/2026</a:t>
             </a:fld>
             <a:endParaRPr lang="en-US"/>
           </a:p>
@@ -2368,7 +2368,7 @@
           <a:p>
             <a:fld id="{6383FAE1-13DE-4511-8C1B-C8AFB720664C}" type="datetimeFigureOut">
               <a:rPr lang="en-US" smtClean="0"/>
-              <a:t>6/5/2026</a:t>
+              <a:t>9/5/2026</a:t>
             </a:fld>
             <a:endParaRPr lang="en-US"/>
           </a:p>
@@ -2509,7 +2509,7 @@
           <a:p>
             <a:fld id="{6383FAE1-13DE-4511-8C1B-C8AFB720664C}" type="datetimeFigureOut">
               <a:rPr lang="en-US" smtClean="0"/>
-              <a:t>6/5/2026</a:t>
+              <a:t>9/5/2026</a:t>
             </a:fld>
             <a:endParaRPr lang="en-US"/>
           </a:p>
@@ -2622,7 +2622,7 @@
           <a:p>
             <a:fld id="{6383FAE1-13DE-4511-8C1B-C8AFB720664C}" type="datetimeFigureOut">
               <a:rPr lang="en-US" smtClean="0"/>
-              <a:t>6/5/2026</a:t>
+              <a:t>9/5/2026</a:t>
             </a:fld>
             <a:endParaRPr lang="en-US"/>
           </a:p>
@@ -2933,7 +2933,7 @@
           <a:p>
             <a:fld id="{6383FAE1-13DE-4511-8C1B-C8AFB720664C}" type="datetimeFigureOut">
               <a:rPr lang="en-US" smtClean="0"/>
-              <a:t>6/5/2026</a:t>
+              <a:t>9/5/2026</a:t>
             </a:fld>
             <a:endParaRPr lang="en-US"/>
           </a:p>
@@ -3224,7 +3224,7 @@
           <a:p>
             <a:fld id="{6383FAE1-13DE-4511-8C1B-C8AFB720664C}" type="datetimeFigureOut">
               <a:rPr lang="en-US" smtClean="0"/>
-              <a:t>6/5/2026</a:t>
+              <a:t>9/5/2026</a:t>
             </a:fld>
             <a:endParaRPr lang="en-US"/>
           </a:p>
@@ -3468,7 +3468,7 @@
           <a:p>
             <a:fld id="{6383FAE1-13DE-4511-8C1B-C8AFB720664C}" type="datetimeFigureOut">
               <a:rPr lang="en-US" smtClean="0"/>
-              <a:t>6/5/2026</a:t>
+              <a:t>9/5/2026</a:t>
             </a:fld>
             <a:endParaRPr lang="en-US"/>
           </a:p>
@@ -4245,7 +4245,7 @@
         <p:spPr>
           <a:xfrm>
             <a:off x="64008" y="153198"/>
-            <a:ext cx="11018520" cy="6001643"/>
+            <a:ext cx="11018520" cy="5632311"/>
           </a:xfrm>
           <a:prstGeom prst="rect">
             <a:avLst/>
@@ -4357,10 +4357,16 @@
                   </a:schemeClr>
                 </a:solidFill>
               </a:rPr>
-              <a:t>"For account security, press 1 for password reset, press 2 to speak to an agent."</a:t>
-            </a:r>
-            <a:r>
-              <a:rPr lang="en-US" sz="2400" dirty="0">
+              <a:t>"For account security, </a:t>
+            </a:r>
+          </a:p>
+          <a:p>
+            <a:pPr marL="342900" indent="-342900">
+              <a:buFont typeface="Arial" panose="020B0604020202020204" pitchFamily="34" charset="0"/>
+              <a:buChar char="•"/>
+            </a:pPr>
+            <a:r>
+              <a:rPr lang="en-US" sz="2400" i="1" dirty="0">
                 <a:solidFill>
                   <a:schemeClr val="accent6">
                     <a:lumMod val="60000"/>
@@ -4368,28 +4374,16 @@
                   </a:schemeClr>
                 </a:solidFill>
               </a:rPr>
-              <a:t> </a:t>
-            </a:r>
-          </a:p>
-          <a:p>
-            <a:pPr>
-              <a:buNone/>
+              <a:t>press 1 for password reset, </a:t>
+            </a:r>
+          </a:p>
+          <a:p>
+            <a:pPr marL="342900" indent="-342900">
+              <a:buFont typeface="Arial" panose="020B0604020202020204" pitchFamily="34" charset="0"/>
+              <a:buChar char="•"/>
             </a:pPr>
-            <a:endParaRPr lang="en-US" sz="2400" dirty="0">
-              <a:solidFill>
-                <a:schemeClr val="accent6">
-                  <a:lumMod val="60000"/>
-                  <a:lumOff val="40000"/>
-                </a:schemeClr>
-              </a:solidFill>
-            </a:endParaRPr>
-          </a:p>
-          <a:p>
-            <a:pPr>
-              <a:buNone/>
-            </a:pPr>
-            <a:r>
-              <a:rPr lang="en-US" sz="2400" dirty="0">
+            <a:r>
+              <a:rPr lang="en-US" sz="2400" i="1" dirty="0">
                 <a:solidFill>
                   <a:schemeClr val="accent6">
                     <a:lumMod val="60000"/>
@@ -4397,21 +4391,32 @@
                   </a:schemeClr>
                 </a:solidFill>
               </a:rPr>
-              <a:t>That's it. Ask it something slightly differently — "my account seems compromised" — and it might return a generic  "I didn't understand that.“</a:t>
-            </a:r>
-          </a:p>
-          <a:p>
-            <a:pPr>
-              <a:buNone/>
-            </a:pPr>
-            <a:endParaRPr lang="en-US" sz="2400" dirty="0">
-              <a:solidFill>
-                <a:schemeClr val="accent6">
-                  <a:lumMod val="60000"/>
-                  <a:lumOff val="40000"/>
-                </a:schemeClr>
-              </a:solidFill>
-            </a:endParaRPr>
+              <a:t>press 2 to speak to an agent.</a:t>
+            </a:r>
+          </a:p>
+          <a:p>
+            <a:r>
+              <a:rPr lang="en-US" sz="2400" i="1" dirty="0">
+                <a:solidFill>
+                  <a:schemeClr val="accent6">
+                    <a:lumMod val="60000"/>
+                    <a:lumOff val="40000"/>
+                  </a:schemeClr>
+                </a:solidFill>
+              </a:rPr>
+              <a:t>"</a:t>
+            </a:r>
+            <a:r>
+              <a:rPr lang="en-US" sz="2400" dirty="0">
+                <a:solidFill>
+                  <a:schemeClr val="accent6">
+                    <a:lumMod val="60000"/>
+                    <a:lumOff val="40000"/>
+                  </a:schemeClr>
+                </a:solidFill>
+              </a:rPr>
+              <a:t> </a:t>
+            </a:r>
           </a:p>
           <a:p>
             <a:pPr>
@@ -4594,7 +4599,18 @@
                   </a:schemeClr>
                 </a:solidFill>
               </a:rPr>
-              <a:t> anything – no action</a:t>
+              <a:t> anything – </a:t>
+            </a:r>
+            <a:r>
+              <a:rPr lang="en-US" sz="2400" b="1" i="1" u="sng" dirty="0">
+                <a:solidFill>
+                  <a:schemeClr val="accent6">
+                    <a:lumMod val="60000"/>
+                    <a:lumOff val="40000"/>
+                  </a:schemeClr>
+                </a:solidFill>
+              </a:rPr>
+              <a:t>no action</a:t>
             </a:r>
           </a:p>
           <a:p>
@@ -4850,8 +4866,8 @@
         </p:nvSpPr>
         <p:spPr>
           <a:xfrm>
-            <a:off x="3520440" y="5650992"/>
-            <a:ext cx="3694176" cy="868680"/>
+            <a:off x="3842004" y="5416177"/>
+            <a:ext cx="4507992" cy="1197864"/>
           </a:xfrm>
           <a:prstGeom prst="ellipse">
             <a:avLst/>
@@ -4880,7 +4896,14 @@
             <a:pPr algn="ctr"/>
             <a:r>
               <a:rPr lang="en-US" sz="2400" dirty="0"/>
-              <a:t>LLM + Tools = Agents</a:t>
+              <a:t>Agents =</a:t>
+            </a:r>
+          </a:p>
+          <a:p>
+            <a:pPr algn="ctr"/>
+            <a:r>
+              <a:rPr lang="en-US" sz="2400" dirty="0"/>
+              <a:t>LLM + Tools + Memory </a:t>
             </a:r>
           </a:p>
         </p:txBody>
@@ -4945,7 +4968,18 @@
                   </a:schemeClr>
                 </a:solidFill>
               </a:rPr>
-              <a:t>The agent understands language like the LLM chatbot — but it also can perform actions </a:t>
+              <a:t>The agent understands language like the LLM chatbot — but it also can </a:t>
+            </a:r>
+            <a:r>
+              <a:rPr lang="en-US" sz="2400" b="1" i="1" u="sng" dirty="0">
+                <a:solidFill>
+                  <a:schemeClr val="accent6">
+                    <a:lumMod val="60000"/>
+                    <a:lumOff val="40000"/>
+                  </a:schemeClr>
+                </a:solidFill>
+              </a:rPr>
+              <a:t>perform actions </a:t>
             </a:r>
           </a:p>
           <a:p>
@@ -5239,7 +5273,7 @@
                   </a:schemeClr>
                 </a:solidFill>
               </a:rPr>
-              <a:t>Example: </a:t>
+              <a:t>Summarize with an example: </a:t>
             </a:r>
           </a:p>
           <a:p>
@@ -5317,7 +5351,7 @@
         </p:blipFill>
         <p:spPr>
           <a:xfrm>
-            <a:off x="3590545" y="1207747"/>
+            <a:off x="3657974" y="1235179"/>
             <a:ext cx="3185930" cy="4709635"/>
           </a:xfrm>
           <a:prstGeom prst="rect">
@@ -5546,168 +5580,6 @@
           <a:chExt cx="0" cy="0"/>
         </a:xfrm>
       </p:grpSpPr>
-      <p:sp>
-        <p:nvSpPr>
-          <p:cNvPr id="2" name="Title 1">
-            <a:extLst>
-              <a:ext uri="{FF2B5EF4-FFF2-40B4-BE49-F238E27FC236}">
-                <a16:creationId xmlns:a16="http://schemas.microsoft.com/office/drawing/2014/main" id="{795E1B75-886E-0812-B2FD-DD250C225521}"/>
-              </a:ext>
-            </a:extLst>
-          </p:cNvPr>
-          <p:cNvSpPr>
-            <a:spLocks noGrp="1"/>
-          </p:cNvSpPr>
-          <p:nvPr>
-            <p:ph type="title"/>
-          </p:nvPr>
-        </p:nvSpPr>
-        <p:spPr>
-          <a:xfrm>
-            <a:off x="274320" y="136525"/>
-            <a:ext cx="11466576" cy="832739"/>
-          </a:xfrm>
-        </p:spPr>
-        <p:txBody>
-          <a:bodyPr>
-            <a:normAutofit/>
-          </a:bodyPr>
-          <a:lstStyle/>
-          <a:p>
-            <a:r>
-              <a:rPr lang="en-US" sz="3600" dirty="0"/>
-              <a:t>EXTRA</a:t>
-            </a:r>
-          </a:p>
-        </p:txBody>
-      </p:sp>
-      <p:sp>
-        <p:nvSpPr>
-          <p:cNvPr id="4" name="TextBox 3">
-            <a:extLst>
-              <a:ext uri="{FF2B5EF4-FFF2-40B4-BE49-F238E27FC236}">
-                <a16:creationId xmlns:a16="http://schemas.microsoft.com/office/drawing/2014/main" id="{902F8BE4-9CEA-0DAD-0357-E0A8215F169D}"/>
-              </a:ext>
-            </a:extLst>
-          </p:cNvPr>
-          <p:cNvSpPr txBox="1"/>
-          <p:nvPr/>
-        </p:nvSpPr>
-        <p:spPr>
-          <a:xfrm>
-            <a:off x="274320" y="933117"/>
-            <a:ext cx="11658600" cy="1477328"/>
-          </a:xfrm>
-          <a:prstGeom prst="rect">
-            <a:avLst/>
-          </a:prstGeom>
-          <a:noFill/>
-        </p:spPr>
-        <p:txBody>
-          <a:bodyPr wrap="square">
-            <a:spAutoFit/>
-          </a:bodyPr>
-          <a:lstStyle/>
-          <a:p>
-            <a:pPr marL="0" indent="0">
-              <a:buNone/>
-            </a:pPr>
-            <a:r>
-              <a:rPr lang="en-US" dirty="0" err="1">
-                <a:solidFill>
-                  <a:schemeClr val="accent6">
-                    <a:lumMod val="60000"/>
-                    <a:lumOff val="40000"/>
-                  </a:schemeClr>
-                </a:solidFill>
-              </a:rPr>
-              <a:t>Ffnbksdfd</a:t>
-            </a:r>
-            <a:endParaRPr lang="en-US" dirty="0">
-              <a:solidFill>
-                <a:schemeClr val="accent6">
-                  <a:lumMod val="60000"/>
-                  <a:lumOff val="40000"/>
-                </a:schemeClr>
-              </a:solidFill>
-            </a:endParaRPr>
-          </a:p>
-          <a:p>
-            <a:pPr marL="0" indent="0">
-              <a:buNone/>
-            </a:pPr>
-            <a:r>
-              <a:rPr lang="en-US" dirty="0" err="1">
-                <a:solidFill>
-                  <a:schemeClr val="accent6">
-                    <a:lumMod val="60000"/>
-                    <a:lumOff val="40000"/>
-                  </a:schemeClr>
-                </a:solidFill>
-              </a:rPr>
-              <a:t>Fdslj;f</a:t>
-            </a:r>
-            <a:endParaRPr lang="en-US" dirty="0">
-              <a:solidFill>
-                <a:schemeClr val="accent6">
-                  <a:lumMod val="60000"/>
-                  <a:lumOff val="40000"/>
-                </a:schemeClr>
-              </a:solidFill>
-            </a:endParaRPr>
-          </a:p>
-          <a:p>
-            <a:pPr marL="0" indent="0">
-              <a:buNone/>
-            </a:pPr>
-            <a:endParaRPr lang="en-US" dirty="0">
-              <a:solidFill>
-                <a:schemeClr val="accent6">
-                  <a:lumMod val="60000"/>
-                  <a:lumOff val="40000"/>
-                </a:schemeClr>
-              </a:solidFill>
-            </a:endParaRPr>
-          </a:p>
-          <a:p>
-            <a:pPr marL="0" indent="0">
-              <a:buNone/>
-            </a:pPr>
-            <a:r>
-              <a:rPr lang="en-US" dirty="0" err="1">
-                <a:solidFill>
-                  <a:schemeClr val="accent6">
-                    <a:lumMod val="60000"/>
-                    <a:lumOff val="40000"/>
-                  </a:schemeClr>
-                </a:solidFill>
-              </a:rPr>
-              <a:t>Fl;ds</a:t>
-            </a:r>
-            <a:endParaRPr lang="en-US" dirty="0">
-              <a:solidFill>
-                <a:schemeClr val="accent6">
-                  <a:lumMod val="60000"/>
-                  <a:lumOff val="40000"/>
-                </a:schemeClr>
-              </a:solidFill>
-            </a:endParaRPr>
-          </a:p>
-          <a:p>
-            <a:pPr marL="0" indent="0">
-              <a:buNone/>
-            </a:pPr>
-            <a:endParaRPr lang="en-US" dirty="0">
-              <a:solidFill>
-                <a:schemeClr val="accent6">
-                  <a:lumMod val="60000"/>
-                  <a:lumOff val="40000"/>
-                </a:schemeClr>
-              </a:solidFill>
-            </a:endParaRPr>
-          </a:p>
-        </p:txBody>
-      </p:sp>
     </p:spTree>
     <p:extLst>
       <p:ext uri="{BB962C8B-B14F-4D97-AF65-F5344CB8AC3E}">

--- a/AgenticAI/1-Intro-To-AgenticAI/2_Agent_vs_Chatbot_Finance.pptx
+++ b/AgenticAI/1-Intro-To-AgenticAI/2_Agent_vs_Chatbot_Finance.pptx
@@ -221,7 +221,7 @@
           <a:p>
             <a:fld id="{7BAEECA8-D063-486F-AE31-5020270C1449}" type="datetimeFigureOut">
               <a:rPr lang="en-US" smtClean="0"/>
-              <a:t>9/5/2026</a:t>
+              <a:t>9/13/2026</a:t>
             </a:fld>
             <a:endParaRPr lang="en-US"/>
           </a:p>
@@ -398,7 +398,7 @@
           <a:p>
             <a:fld id="{CB233BD1-3BA8-448D-9D08-7846095EA517}" type="datetimeFigureOut">
               <a:rPr lang="en-US" smtClean="0"/>
-              <a:t>9/5/2026</a:t>
+              <a:t>9/13/2026</a:t>
             </a:fld>
             <a:endParaRPr lang="en-US"/>
           </a:p>
@@ -812,7 +812,7 @@
           <a:p>
             <a:fld id="{6383FAE1-13DE-4511-8C1B-C8AFB720664C}" type="datetimeFigureOut">
               <a:rPr lang="en-US" smtClean="0"/>
-              <a:t>9/5/2026</a:t>
+              <a:t>9/13/2026</a:t>
             </a:fld>
             <a:endParaRPr lang="en-US"/>
           </a:p>
@@ -1010,7 +1010,7 @@
           <a:p>
             <a:fld id="{6383FAE1-13DE-4511-8C1B-C8AFB720664C}" type="datetimeFigureOut">
               <a:rPr lang="en-US" smtClean="0"/>
-              <a:t>9/5/2026</a:t>
+              <a:t>9/13/2026</a:t>
             </a:fld>
             <a:endParaRPr lang="en-US"/>
           </a:p>
@@ -1218,7 +1218,7 @@
           <a:p>
             <a:fld id="{6383FAE1-13DE-4511-8C1B-C8AFB720664C}" type="datetimeFigureOut">
               <a:rPr lang="en-US" smtClean="0"/>
-              <a:t>9/5/2026</a:t>
+              <a:t>9/13/2026</a:t>
             </a:fld>
             <a:endParaRPr lang="en-US"/>
           </a:p>
@@ -1416,7 +1416,7 @@
           <a:p>
             <a:fld id="{6383FAE1-13DE-4511-8C1B-C8AFB720664C}" type="datetimeFigureOut">
               <a:rPr lang="en-US" smtClean="0"/>
-              <a:t>9/5/2026</a:t>
+              <a:t>9/13/2026</a:t>
             </a:fld>
             <a:endParaRPr lang="en-US"/>
           </a:p>
@@ -1691,7 +1691,7 @@
           <a:p>
             <a:fld id="{6383FAE1-13DE-4511-8C1B-C8AFB720664C}" type="datetimeFigureOut">
               <a:rPr lang="en-US" smtClean="0"/>
-              <a:t>9/5/2026</a:t>
+              <a:t>9/13/2026</a:t>
             </a:fld>
             <a:endParaRPr lang="en-US"/>
           </a:p>
@@ -1956,7 +1956,7 @@
           <a:p>
             <a:fld id="{6383FAE1-13DE-4511-8C1B-C8AFB720664C}" type="datetimeFigureOut">
               <a:rPr lang="en-US" smtClean="0"/>
-              <a:t>9/5/2026</a:t>
+              <a:t>9/13/2026</a:t>
             </a:fld>
             <a:endParaRPr lang="en-US"/>
           </a:p>
@@ -2368,7 +2368,7 @@
           <a:p>
             <a:fld id="{6383FAE1-13DE-4511-8C1B-C8AFB720664C}" type="datetimeFigureOut">
               <a:rPr lang="en-US" smtClean="0"/>
-              <a:t>9/5/2026</a:t>
+              <a:t>9/13/2026</a:t>
             </a:fld>
             <a:endParaRPr lang="en-US"/>
           </a:p>
@@ -2509,7 +2509,7 @@
           <a:p>
             <a:fld id="{6383FAE1-13DE-4511-8C1B-C8AFB720664C}" type="datetimeFigureOut">
               <a:rPr lang="en-US" smtClean="0"/>
-              <a:t>9/5/2026</a:t>
+              <a:t>9/13/2026</a:t>
             </a:fld>
             <a:endParaRPr lang="en-US"/>
           </a:p>
@@ -2622,7 +2622,7 @@
           <a:p>
             <a:fld id="{6383FAE1-13DE-4511-8C1B-C8AFB720664C}" type="datetimeFigureOut">
               <a:rPr lang="en-US" smtClean="0"/>
-              <a:t>9/5/2026</a:t>
+              <a:t>9/13/2026</a:t>
             </a:fld>
             <a:endParaRPr lang="en-US"/>
           </a:p>
@@ -2933,7 +2933,7 @@
           <a:p>
             <a:fld id="{6383FAE1-13DE-4511-8C1B-C8AFB720664C}" type="datetimeFigureOut">
               <a:rPr lang="en-US" smtClean="0"/>
-              <a:t>9/5/2026</a:t>
+              <a:t>9/13/2026</a:t>
             </a:fld>
             <a:endParaRPr lang="en-US"/>
           </a:p>
@@ -3224,7 +3224,7 @@
           <a:p>
             <a:fld id="{6383FAE1-13DE-4511-8C1B-C8AFB720664C}" type="datetimeFigureOut">
               <a:rPr lang="en-US" smtClean="0"/>
-              <a:t>9/5/2026</a:t>
+              <a:t>9/13/2026</a:t>
             </a:fld>
             <a:endParaRPr lang="en-US"/>
           </a:p>
@@ -3468,7 +3468,7 @@
           <a:p>
             <a:fld id="{6383FAE1-13DE-4511-8C1B-C8AFB720664C}" type="datetimeFigureOut">
               <a:rPr lang="en-US" smtClean="0"/>
-              <a:t>9/5/2026</a:t>
+              <a:t>9/13/2026</a:t>
             </a:fld>
             <a:endParaRPr lang="en-US"/>
           </a:p>
@@ -4896,7 +4896,7 @@
             <a:pPr algn="ctr"/>
             <a:r>
               <a:rPr lang="en-US" sz="2400" dirty="0"/>
-              <a:t>Agents =</a:t>
+              <a:t>Agents</a:t>
             </a:r>
           </a:p>
           <a:p>

--- a/AgenticAI/1-Intro-To-AgenticAI/2_Agent_vs_Chatbot_Finance.pptx
+++ b/AgenticAI/1-Intro-To-AgenticAI/2_Agent_vs_Chatbot_Finance.pptx
@@ -5,19 +5,23 @@
     <p:sldMasterId id="2147483648" r:id="rId1"/>
   </p:sldMasterIdLst>
   <p:notesMasterIdLst>
-    <p:notesMasterId r:id="rId9"/>
+    <p:notesMasterId r:id="rId13"/>
   </p:notesMasterIdLst>
   <p:handoutMasterIdLst>
-    <p:handoutMasterId r:id="rId10"/>
+    <p:handoutMasterId r:id="rId14"/>
   </p:handoutMasterIdLst>
   <p:sldIdLst>
     <p:sldId id="257" r:id="rId2"/>
     <p:sldId id="276" r:id="rId3"/>
     <p:sldId id="277" r:id="rId4"/>
     <p:sldId id="278" r:id="rId5"/>
-    <p:sldId id="279" r:id="rId6"/>
-    <p:sldId id="280" r:id="rId7"/>
-    <p:sldId id="275" r:id="rId8"/>
+    <p:sldId id="284" r:id="rId6"/>
+    <p:sldId id="279" r:id="rId7"/>
+    <p:sldId id="280" r:id="rId8"/>
+    <p:sldId id="283" r:id="rId9"/>
+    <p:sldId id="281" r:id="rId10"/>
+    <p:sldId id="282" r:id="rId11"/>
+    <p:sldId id="275" r:id="rId12"/>
   </p:sldIdLst>
   <p:sldSz cx="12192000" cy="6858000"/>
   <p:notesSz cx="6858000" cy="9144000"/>
@@ -221,7 +225,7 @@
           <a:p>
             <a:fld id="{7BAEECA8-D063-486F-AE31-5020270C1449}" type="datetimeFigureOut">
               <a:rPr lang="en-US" smtClean="0"/>
-              <a:t>9/13/2026</a:t>
+              <a:t>9/16/2026</a:t>
             </a:fld>
             <a:endParaRPr lang="en-US"/>
           </a:p>
@@ -398,7 +402,7 @@
           <a:p>
             <a:fld id="{CB233BD1-3BA8-448D-9D08-7846095EA517}" type="datetimeFigureOut">
               <a:rPr lang="en-US" smtClean="0"/>
-              <a:t>9/13/2026</a:t>
+              <a:t>9/16/2026</a:t>
             </a:fld>
             <a:endParaRPr lang="en-US"/>
           </a:p>
@@ -812,7 +816,7 @@
           <a:p>
             <a:fld id="{6383FAE1-13DE-4511-8C1B-C8AFB720664C}" type="datetimeFigureOut">
               <a:rPr lang="en-US" smtClean="0"/>
-              <a:t>9/13/2026</a:t>
+              <a:t>9/16/2026</a:t>
             </a:fld>
             <a:endParaRPr lang="en-US"/>
           </a:p>
@@ -1010,7 +1014,7 @@
           <a:p>
             <a:fld id="{6383FAE1-13DE-4511-8C1B-C8AFB720664C}" type="datetimeFigureOut">
               <a:rPr lang="en-US" smtClean="0"/>
-              <a:t>9/13/2026</a:t>
+              <a:t>9/16/2026</a:t>
             </a:fld>
             <a:endParaRPr lang="en-US"/>
           </a:p>
@@ -1218,7 +1222,7 @@
           <a:p>
             <a:fld id="{6383FAE1-13DE-4511-8C1B-C8AFB720664C}" type="datetimeFigureOut">
               <a:rPr lang="en-US" smtClean="0"/>
-              <a:t>9/13/2026</a:t>
+              <a:t>9/16/2026</a:t>
             </a:fld>
             <a:endParaRPr lang="en-US"/>
           </a:p>
@@ -1416,7 +1420,7 @@
           <a:p>
             <a:fld id="{6383FAE1-13DE-4511-8C1B-C8AFB720664C}" type="datetimeFigureOut">
               <a:rPr lang="en-US" smtClean="0"/>
-              <a:t>9/13/2026</a:t>
+              <a:t>9/16/2026</a:t>
             </a:fld>
             <a:endParaRPr lang="en-US"/>
           </a:p>
@@ -1691,7 +1695,7 @@
           <a:p>
             <a:fld id="{6383FAE1-13DE-4511-8C1B-C8AFB720664C}" type="datetimeFigureOut">
               <a:rPr lang="en-US" smtClean="0"/>
-              <a:t>9/13/2026</a:t>
+              <a:t>9/16/2026</a:t>
             </a:fld>
             <a:endParaRPr lang="en-US"/>
           </a:p>
@@ -1956,7 +1960,7 @@
           <a:p>
             <a:fld id="{6383FAE1-13DE-4511-8C1B-C8AFB720664C}" type="datetimeFigureOut">
               <a:rPr lang="en-US" smtClean="0"/>
-              <a:t>9/13/2026</a:t>
+              <a:t>9/16/2026</a:t>
             </a:fld>
             <a:endParaRPr lang="en-US"/>
           </a:p>
@@ -2368,7 +2372,7 @@
           <a:p>
             <a:fld id="{6383FAE1-13DE-4511-8C1B-C8AFB720664C}" type="datetimeFigureOut">
               <a:rPr lang="en-US" smtClean="0"/>
-              <a:t>9/13/2026</a:t>
+              <a:t>9/16/2026</a:t>
             </a:fld>
             <a:endParaRPr lang="en-US"/>
           </a:p>
@@ -2509,7 +2513,7 @@
           <a:p>
             <a:fld id="{6383FAE1-13DE-4511-8C1B-C8AFB720664C}" type="datetimeFigureOut">
               <a:rPr lang="en-US" smtClean="0"/>
-              <a:t>9/13/2026</a:t>
+              <a:t>9/16/2026</a:t>
             </a:fld>
             <a:endParaRPr lang="en-US"/>
           </a:p>
@@ -2622,7 +2626,7 @@
           <a:p>
             <a:fld id="{6383FAE1-13DE-4511-8C1B-C8AFB720664C}" type="datetimeFigureOut">
               <a:rPr lang="en-US" smtClean="0"/>
-              <a:t>9/13/2026</a:t>
+              <a:t>9/16/2026</a:t>
             </a:fld>
             <a:endParaRPr lang="en-US"/>
           </a:p>
@@ -2933,7 +2937,7 @@
           <a:p>
             <a:fld id="{6383FAE1-13DE-4511-8C1B-C8AFB720664C}" type="datetimeFigureOut">
               <a:rPr lang="en-US" smtClean="0"/>
-              <a:t>9/13/2026</a:t>
+              <a:t>9/16/2026</a:t>
             </a:fld>
             <a:endParaRPr lang="en-US"/>
           </a:p>
@@ -3224,7 +3228,7 @@
           <a:p>
             <a:fld id="{6383FAE1-13DE-4511-8C1B-C8AFB720664C}" type="datetimeFigureOut">
               <a:rPr lang="en-US" smtClean="0"/>
-              <a:t>9/13/2026</a:t>
+              <a:t>9/16/2026</a:t>
             </a:fld>
             <a:endParaRPr lang="en-US"/>
           </a:p>
@@ -3468,7 +3472,7 @@
           <a:p>
             <a:fld id="{6383FAE1-13DE-4511-8C1B-C8AFB720664C}" type="datetimeFigureOut">
               <a:rPr lang="en-US" smtClean="0"/>
-              <a:t>9/13/2026</a:t>
+              <a:t>9/16/2026</a:t>
             </a:fld>
             <a:endParaRPr lang="en-US"/>
           </a:p>
@@ -4207,6 +4211,261 @@
 </p:sld>
 </file>
 
+<file path=ppt/slides/slide10.xml><?xml version="1.0" encoding="utf-8"?>
+<p:sld xmlns:a="http://schemas.openxmlformats.org/drawingml/2006/main" xmlns:r="http://schemas.openxmlformats.org/officeDocument/2006/relationships" xmlns:p="http://schemas.openxmlformats.org/presentationml/2006/main">
+  <p:cSld>
+    <p:spTree>
+      <p:nvGrpSpPr>
+        <p:cNvPr id="1" name="">
+          <a:extLst>
+            <a:ext uri="{FF2B5EF4-FFF2-40B4-BE49-F238E27FC236}">
+              <a16:creationId xmlns:a16="http://schemas.microsoft.com/office/drawing/2014/main" id="{728CE86D-EF25-800A-6BF1-CA6EE56C8528}"/>
+            </a:ext>
+          </a:extLst>
+        </p:cNvPr>
+        <p:cNvGrpSpPr/>
+        <p:nvPr/>
+      </p:nvGrpSpPr>
+      <p:grpSpPr>
+        <a:xfrm>
+          <a:off x="0" y="0"/>
+          <a:ext cx="0" cy="0"/>
+          <a:chOff x="0" y="0"/>
+          <a:chExt cx="0" cy="0"/>
+        </a:xfrm>
+      </p:grpSpPr>
+      <p:sp>
+        <p:nvSpPr>
+          <p:cNvPr id="3" name="TextBox 2">
+            <a:extLst>
+              <a:ext uri="{FF2B5EF4-FFF2-40B4-BE49-F238E27FC236}">
+                <a16:creationId xmlns:a16="http://schemas.microsoft.com/office/drawing/2014/main" id="{CA38D18B-AE90-95C0-C949-64200AEC9E22}"/>
+              </a:ext>
+            </a:extLst>
+          </p:cNvPr>
+          <p:cNvSpPr txBox="1"/>
+          <p:nvPr/>
+        </p:nvSpPr>
+        <p:spPr>
+          <a:xfrm>
+            <a:off x="228600" y="1012954"/>
+            <a:ext cx="11018520" cy="4832092"/>
+          </a:xfrm>
+          <a:prstGeom prst="rect">
+            <a:avLst/>
+          </a:prstGeom>
+          <a:noFill/>
+        </p:spPr>
+        <p:txBody>
+          <a:bodyPr wrap="square">
+            <a:spAutoFit/>
+          </a:bodyPr>
+          <a:lstStyle/>
+          <a:p>
+            <a:r>
+              <a:rPr lang="en-US" sz="2800" b="1" dirty="0">
+                <a:solidFill>
+                  <a:schemeClr val="accent6">
+                    <a:lumMod val="60000"/>
+                    <a:lumOff val="40000"/>
+                  </a:schemeClr>
+                </a:solidFill>
+              </a:rPr>
+              <a:t>Discussion Prompt for Class</a:t>
+            </a:r>
+          </a:p>
+          <a:p>
+            <a:endParaRPr lang="en-US" sz="2800" b="1" dirty="0">
+              <a:solidFill>
+                <a:schemeClr val="accent6">
+                  <a:lumMod val="60000"/>
+                  <a:lumOff val="40000"/>
+                </a:schemeClr>
+              </a:solidFill>
+            </a:endParaRPr>
+          </a:p>
+          <a:p>
+            <a:r>
+              <a:rPr lang="en-US" sz="2800" i="1" dirty="0">
+                <a:solidFill>
+                  <a:schemeClr val="accent6">
+                    <a:lumMod val="60000"/>
+                    <a:lumOff val="40000"/>
+                  </a:schemeClr>
+                </a:solidFill>
+              </a:rPr>
+              <a:t>"A bank deploys an autonomous agent that can </a:t>
+            </a:r>
+          </a:p>
+          <a:p>
+            <a:pPr marL="457200" indent="-457200">
+              <a:buFont typeface="Arial" panose="020B0604020202020204" pitchFamily="34" charset="0"/>
+              <a:buChar char="•"/>
+            </a:pPr>
+            <a:r>
+              <a:rPr lang="en-US" sz="2800" i="1" dirty="0">
+                <a:solidFill>
+                  <a:schemeClr val="accent6">
+                    <a:lumMod val="60000"/>
+                    <a:lumOff val="40000"/>
+                  </a:schemeClr>
+                </a:solidFill>
+              </a:rPr>
+              <a:t>access accounts, </a:t>
+            </a:r>
+          </a:p>
+          <a:p>
+            <a:pPr marL="457200" indent="-457200">
+              <a:buFont typeface="Arial" panose="020B0604020202020204" pitchFamily="34" charset="0"/>
+              <a:buChar char="•"/>
+            </a:pPr>
+            <a:r>
+              <a:rPr lang="en-US" sz="2800" i="1" dirty="0">
+                <a:solidFill>
+                  <a:schemeClr val="accent6">
+                    <a:lumMod val="60000"/>
+                    <a:lumOff val="40000"/>
+                  </a:schemeClr>
+                </a:solidFill>
+              </a:rPr>
+              <a:t>move money, and </a:t>
+            </a:r>
+          </a:p>
+          <a:p>
+            <a:pPr marL="457200" indent="-457200">
+              <a:buFont typeface="Arial" panose="020B0604020202020204" pitchFamily="34" charset="0"/>
+              <a:buChar char="•"/>
+            </a:pPr>
+            <a:r>
+              <a:rPr lang="en-US" sz="2800" i="1" dirty="0">
+                <a:solidFill>
+                  <a:schemeClr val="accent6">
+                    <a:lumMod val="60000"/>
+                    <a:lumOff val="40000"/>
+                  </a:schemeClr>
+                </a:solidFill>
+              </a:rPr>
+              <a:t>close disputes </a:t>
+            </a:r>
+          </a:p>
+          <a:p>
+            <a:r>
+              <a:rPr lang="en-US" sz="2800" i="1" dirty="0">
+                <a:solidFill>
+                  <a:schemeClr val="accent6">
+                    <a:lumMod val="60000"/>
+                    <a:lumOff val="40000"/>
+                  </a:schemeClr>
+                </a:solidFill>
+              </a:rPr>
+              <a:t>— all without a human approving each action. </a:t>
+            </a:r>
+          </a:p>
+          <a:p>
+            <a:endParaRPr lang="en-US" sz="2800" i="1" dirty="0">
+              <a:solidFill>
+                <a:schemeClr val="accent6">
+                  <a:lumMod val="60000"/>
+                  <a:lumOff val="40000"/>
+                </a:schemeClr>
+              </a:solidFill>
+            </a:endParaRPr>
+          </a:p>
+          <a:p>
+            <a:r>
+              <a:rPr lang="en-US" sz="2800" i="1" dirty="0">
+                <a:solidFill>
+                  <a:schemeClr val="accent6">
+                    <a:lumMod val="60000"/>
+                    <a:lumOff val="40000"/>
+                  </a:schemeClr>
+                </a:solidFill>
+              </a:rPr>
+              <a:t>What conditions would need to be true for you to trust that system ? </a:t>
+            </a:r>
+          </a:p>
+          <a:p>
+            <a:endParaRPr lang="en-US" sz="2800" i="1" dirty="0">
+              <a:solidFill>
+                <a:schemeClr val="accent6">
+                  <a:lumMod val="60000"/>
+                  <a:lumOff val="40000"/>
+                </a:schemeClr>
+              </a:solidFill>
+            </a:endParaRPr>
+          </a:p>
+          <a:p>
+            <a:r>
+              <a:rPr lang="en-US" sz="2800" i="1" dirty="0">
+                <a:solidFill>
+                  <a:schemeClr val="accent6">
+                    <a:lumMod val="60000"/>
+                    <a:lumOff val="40000"/>
+                  </a:schemeClr>
+                </a:solidFill>
+              </a:rPr>
+              <a:t>What would make you distrust it?"</a:t>
+            </a:r>
+            <a:endParaRPr lang="en-US" sz="2800" dirty="0">
+              <a:solidFill>
+                <a:schemeClr val="accent6">
+                  <a:lumMod val="60000"/>
+                  <a:lumOff val="40000"/>
+                </a:schemeClr>
+              </a:solidFill>
+            </a:endParaRPr>
+          </a:p>
+        </p:txBody>
+      </p:sp>
+    </p:spTree>
+    <p:extLst>
+      <p:ext uri="{BB962C8B-B14F-4D97-AF65-F5344CB8AC3E}">
+        <p14:creationId xmlns:p14="http://schemas.microsoft.com/office/powerpoint/2010/main" val="2206521416"/>
+      </p:ext>
+    </p:extLst>
+  </p:cSld>
+  <p:clrMapOvr>
+    <a:masterClrMapping/>
+  </p:clrMapOvr>
+</p:sld>
+</file>
+
+<file path=ppt/slides/slide11.xml><?xml version="1.0" encoding="utf-8"?>
+<p:sld xmlns:a="http://schemas.openxmlformats.org/drawingml/2006/main" xmlns:r="http://schemas.openxmlformats.org/officeDocument/2006/relationships" xmlns:p="http://schemas.openxmlformats.org/presentationml/2006/main">
+  <p:cSld>
+    <p:spTree>
+      <p:nvGrpSpPr>
+        <p:cNvPr id="1" name="">
+          <a:extLst>
+            <a:ext uri="{FF2B5EF4-FFF2-40B4-BE49-F238E27FC236}">
+              <a16:creationId xmlns:a16="http://schemas.microsoft.com/office/drawing/2014/main" id="{DD931D7F-4279-DA2E-FA64-6CF3C441D414}"/>
+            </a:ext>
+          </a:extLst>
+        </p:cNvPr>
+        <p:cNvGrpSpPr/>
+        <p:nvPr/>
+      </p:nvGrpSpPr>
+      <p:grpSpPr>
+        <a:xfrm>
+          <a:off x="0" y="0"/>
+          <a:ext cx="0" cy="0"/>
+          <a:chOff x="0" y="0"/>
+          <a:chExt cx="0" cy="0"/>
+        </a:xfrm>
+      </p:grpSpPr>
+    </p:spTree>
+    <p:extLst>
+      <p:ext uri="{BB962C8B-B14F-4D97-AF65-F5344CB8AC3E}">
+        <p14:creationId xmlns:p14="http://schemas.microsoft.com/office/powerpoint/2010/main" val="366625378"/>
+      </p:ext>
+    </p:extLst>
+  </p:cSld>
+  <p:clrMapOvr>
+    <a:masterClrMapping/>
+  </p:clrMapOvr>
+</p:sld>
+</file>
+
 <file path=ppt/slides/slide2.xml><?xml version="1.0" encoding="utf-8"?>
 <p:sld xmlns:a="http://schemas.openxmlformats.org/drawingml/2006/main" xmlns:r="http://schemas.openxmlformats.org/officeDocument/2006/relationships" xmlns:p="http://schemas.openxmlformats.org/presentationml/2006/main">
   <p:cSld>
@@ -4245,7 +4504,7 @@
         <p:spPr>
           <a:xfrm>
             <a:off x="64008" y="153198"/>
-            <a:ext cx="11018520" cy="5632311"/>
+            <a:ext cx="8458200" cy="6370975"/>
           </a:xfrm>
           <a:prstGeom prst="rect">
             <a:avLst/>
@@ -4299,7 +4558,7 @@
                   </a:schemeClr>
                 </a:solidFill>
               </a:rPr>
-              <a:t>A rule-based bot is essentially a very elaborate decision tree. Someone wrote every possible path in advance. The bot matches your input to a pattern, and returns a pre-written response.</a:t>
+              <a:t>A rule-based bot is essentially a decision tree. Someone wrote every possible path in advance. The bot matches your input to a pattern, and returns a pre-written response.</a:t>
             </a:r>
           </a:p>
           <a:p>
@@ -4328,7 +4587,29 @@
                   </a:schemeClr>
                 </a:solidFill>
               </a:rPr>
-              <a:t>It has no understanding of language — it pattern-matches. If a customer types "I think someone hacked my account," the bot looks for keywords: "hacked," "account." It finds a matching rule and returns: </a:t>
+              <a:t>It has no understanding of language — it pattern-matches. If a customer types "I think someone hacked my account,.." the bot looks for keywords: </a:t>
+            </a:r>
+            <a:r>
+              <a:rPr lang="en-US" sz="2400" i="1" dirty="0">
+                <a:solidFill>
+                  <a:schemeClr val="accent6">
+                    <a:lumMod val="60000"/>
+                    <a:lumOff val="40000"/>
+                  </a:schemeClr>
+                </a:solidFill>
+              </a:rPr>
+              <a:t>"hacked," "account."</a:t>
+            </a:r>
+            <a:r>
+              <a:rPr lang="en-US" sz="2400" dirty="0">
+                <a:solidFill>
+                  <a:schemeClr val="accent6">
+                    <a:lumMod val="60000"/>
+                    <a:lumOff val="40000"/>
+                  </a:schemeClr>
+                </a:solidFill>
+              </a:rPr>
+              <a:t> It finds a matching rule and returns: </a:t>
             </a:r>
           </a:p>
           <a:p>
@@ -4454,6 +4735,423 @@
                 </a:solidFill>
               </a:rPr>
               <a:t>to act on anything.</a:t>
+            </a:r>
+          </a:p>
+        </p:txBody>
+      </p:sp>
+      <p:sp>
+        <p:nvSpPr>
+          <p:cNvPr id="4" name="Rectangle: Rounded Corners 3">
+            <a:extLst>
+              <a:ext uri="{FF2B5EF4-FFF2-40B4-BE49-F238E27FC236}">
+                <a16:creationId xmlns:a16="http://schemas.microsoft.com/office/drawing/2014/main" id="{2CE9E164-D736-164B-3C9B-024DAE587921}"/>
+              </a:ext>
+            </a:extLst>
+          </p:cNvPr>
+          <p:cNvSpPr/>
+          <p:nvPr/>
+        </p:nvSpPr>
+        <p:spPr>
+          <a:xfrm>
+            <a:off x="8887968" y="1036738"/>
+            <a:ext cx="2798064" cy="1042416"/>
+          </a:xfrm>
+          <a:prstGeom prst="roundRect">
+            <a:avLst/>
+          </a:prstGeom>
+        </p:spPr>
+        <p:style>
+          <a:lnRef idx="2">
+            <a:schemeClr val="accent1">
+              <a:shade val="15000"/>
+            </a:schemeClr>
+          </a:lnRef>
+          <a:fillRef idx="1">
+            <a:schemeClr val="accent1"/>
+          </a:fillRef>
+          <a:effectRef idx="0">
+            <a:schemeClr val="accent1"/>
+          </a:effectRef>
+          <a:fontRef idx="minor">
+            <a:schemeClr val="lt1"/>
+          </a:fontRef>
+        </p:style>
+        <p:txBody>
+          <a:bodyPr rtlCol="0" anchor="ctr"/>
+          <a:lstStyle/>
+          <a:p>
+            <a:pPr algn="ctr"/>
+            <a:r>
+              <a:rPr lang="en-US" dirty="0">
+                <a:solidFill>
+                  <a:schemeClr val="accent6">
+                    <a:lumMod val="60000"/>
+                    <a:lumOff val="40000"/>
+                  </a:schemeClr>
+                </a:solidFill>
+              </a:rPr>
+              <a:t>I think someone hacked my account,..</a:t>
+            </a:r>
+            <a:endParaRPr lang="en-IN" dirty="0"/>
+          </a:p>
+        </p:txBody>
+      </p:sp>
+      <p:sp>
+        <p:nvSpPr>
+          <p:cNvPr id="6" name="Rectangle: Rounded Corners 5">
+            <a:extLst>
+              <a:ext uri="{FF2B5EF4-FFF2-40B4-BE49-F238E27FC236}">
+                <a16:creationId xmlns:a16="http://schemas.microsoft.com/office/drawing/2014/main" id="{A9BA6249-8B7B-71B8-C2DA-043DCA1177D6}"/>
+              </a:ext>
+            </a:extLst>
+          </p:cNvPr>
+          <p:cNvSpPr/>
+          <p:nvPr/>
+        </p:nvSpPr>
+        <p:spPr>
+          <a:xfrm>
+            <a:off x="8439912" y="3410641"/>
+            <a:ext cx="1682496" cy="2505456"/>
+          </a:xfrm>
+          <a:prstGeom prst="roundRect">
+            <a:avLst/>
+          </a:prstGeom>
+        </p:spPr>
+        <p:style>
+          <a:lnRef idx="2">
+            <a:schemeClr val="accent1">
+              <a:shade val="15000"/>
+            </a:schemeClr>
+          </a:lnRef>
+          <a:fillRef idx="1">
+            <a:schemeClr val="accent1"/>
+          </a:fillRef>
+          <a:effectRef idx="0">
+            <a:schemeClr val="accent1"/>
+          </a:effectRef>
+          <a:fontRef idx="minor">
+            <a:schemeClr val="lt1"/>
+          </a:fontRef>
+        </p:style>
+        <p:txBody>
+          <a:bodyPr rtlCol="0" anchor="ctr"/>
+          <a:lstStyle/>
+          <a:p>
+            <a:pPr>
+              <a:buNone/>
+            </a:pPr>
+            <a:r>
+              <a:rPr lang="en-US" i="1" dirty="0">
+                <a:solidFill>
+                  <a:schemeClr val="accent6">
+                    <a:lumMod val="60000"/>
+                    <a:lumOff val="40000"/>
+                  </a:schemeClr>
+                </a:solidFill>
+              </a:rPr>
+              <a:t>For account security, </a:t>
+            </a:r>
+          </a:p>
+          <a:p>
+            <a:pPr marL="342900" indent="-342900">
+              <a:buFont typeface="Arial" panose="020B0604020202020204" pitchFamily="34" charset="0"/>
+              <a:buChar char="•"/>
+            </a:pPr>
+            <a:r>
+              <a:rPr lang="en-US" i="1" dirty="0">
+                <a:solidFill>
+                  <a:schemeClr val="accent6">
+                    <a:lumMod val="60000"/>
+                    <a:lumOff val="40000"/>
+                  </a:schemeClr>
+                </a:solidFill>
+              </a:rPr>
+              <a:t>press 1 for password reset, </a:t>
+            </a:r>
+          </a:p>
+          <a:p>
+            <a:pPr marL="342900" indent="-342900">
+              <a:buFont typeface="Arial" panose="020B0604020202020204" pitchFamily="34" charset="0"/>
+              <a:buChar char="•"/>
+            </a:pPr>
+            <a:r>
+              <a:rPr lang="en-US" i="1" dirty="0">
+                <a:solidFill>
+                  <a:schemeClr val="accent6">
+                    <a:lumMod val="60000"/>
+                    <a:lumOff val="40000"/>
+                  </a:schemeClr>
+                </a:solidFill>
+              </a:rPr>
+              <a:t>press 2 to speak to an agent.</a:t>
+            </a:r>
+          </a:p>
+        </p:txBody>
+      </p:sp>
+      <p:sp>
+        <p:nvSpPr>
+          <p:cNvPr id="8" name="Rectangle: Rounded Corners 7">
+            <a:extLst>
+              <a:ext uri="{FF2B5EF4-FFF2-40B4-BE49-F238E27FC236}">
+                <a16:creationId xmlns:a16="http://schemas.microsoft.com/office/drawing/2014/main" id="{97E0BA9F-857A-F358-F751-B3C3DAE0F6DA}"/>
+              </a:ext>
+            </a:extLst>
+          </p:cNvPr>
+          <p:cNvSpPr/>
+          <p:nvPr/>
+        </p:nvSpPr>
+        <p:spPr>
+          <a:xfrm>
+            <a:off x="10445496" y="3429000"/>
+            <a:ext cx="1682496" cy="2505456"/>
+          </a:xfrm>
+          <a:prstGeom prst="roundRect">
+            <a:avLst/>
+          </a:prstGeom>
+        </p:spPr>
+        <p:style>
+          <a:lnRef idx="2">
+            <a:schemeClr val="accent1">
+              <a:shade val="15000"/>
+            </a:schemeClr>
+          </a:lnRef>
+          <a:fillRef idx="1">
+            <a:schemeClr val="accent1"/>
+          </a:fillRef>
+          <a:effectRef idx="0">
+            <a:schemeClr val="accent1"/>
+          </a:effectRef>
+          <a:fontRef idx="minor">
+            <a:schemeClr val="lt1"/>
+          </a:fontRef>
+        </p:style>
+        <p:txBody>
+          <a:bodyPr rtlCol="0" anchor="ctr"/>
+          <a:lstStyle/>
+          <a:p>
+            <a:pPr>
+              <a:buNone/>
+            </a:pPr>
+            <a:r>
+              <a:rPr lang="en-US" i="1" dirty="0">
+                <a:solidFill>
+                  <a:schemeClr val="accent6">
+                    <a:lumMod val="60000"/>
+                    <a:lumOff val="40000"/>
+                  </a:schemeClr>
+                </a:solidFill>
+              </a:rPr>
+              <a:t>For refund, </a:t>
+            </a:r>
+          </a:p>
+          <a:p>
+            <a:pPr marL="342900" indent="-342900">
+              <a:buFont typeface="Arial" panose="020B0604020202020204" pitchFamily="34" charset="0"/>
+              <a:buChar char="•"/>
+            </a:pPr>
+            <a:r>
+              <a:rPr lang="en-US" i="1" dirty="0">
+                <a:solidFill>
+                  <a:schemeClr val="accent6">
+                    <a:lumMod val="60000"/>
+                    <a:lumOff val="40000"/>
+                  </a:schemeClr>
+                </a:solidFill>
+              </a:rPr>
+              <a:t>press 1 for returning an  item, </a:t>
+            </a:r>
+          </a:p>
+          <a:p>
+            <a:pPr marL="342900" indent="-342900">
+              <a:buFont typeface="Arial" panose="020B0604020202020204" pitchFamily="34" charset="0"/>
+              <a:buChar char="•"/>
+            </a:pPr>
+            <a:r>
+              <a:rPr lang="en-US" i="1" dirty="0">
+                <a:solidFill>
+                  <a:schemeClr val="accent6">
+                    <a:lumMod val="60000"/>
+                    <a:lumOff val="40000"/>
+                  </a:schemeClr>
+                </a:solidFill>
+              </a:rPr>
+              <a:t>press 2 to speak to someone.</a:t>
+            </a:r>
+          </a:p>
+        </p:txBody>
+      </p:sp>
+      <p:sp>
+        <p:nvSpPr>
+          <p:cNvPr id="9" name="TextBox 8">
+            <a:extLst>
+              <a:ext uri="{FF2B5EF4-FFF2-40B4-BE49-F238E27FC236}">
+                <a16:creationId xmlns:a16="http://schemas.microsoft.com/office/drawing/2014/main" id="{0BF05848-6FB4-5511-7439-487FE4C6E055}"/>
+              </a:ext>
+            </a:extLst>
+          </p:cNvPr>
+          <p:cNvSpPr txBox="1"/>
+          <p:nvPr/>
+        </p:nvSpPr>
+        <p:spPr>
+          <a:xfrm>
+            <a:off x="8949348" y="3059668"/>
+            <a:ext cx="1496692" cy="369332"/>
+          </a:xfrm>
+          <a:prstGeom prst="rect">
+            <a:avLst/>
+          </a:prstGeom>
+          <a:noFill/>
+        </p:spPr>
+        <p:txBody>
+          <a:bodyPr wrap="none" rtlCol="0">
+            <a:spAutoFit/>
+          </a:bodyPr>
+          <a:lstStyle/>
+          <a:p>
+            <a:r>
+              <a:rPr lang="en-IN" dirty="0">
+                <a:solidFill>
+                  <a:schemeClr val="accent4">
+                    <a:lumMod val="60000"/>
+                    <a:lumOff val="40000"/>
+                  </a:schemeClr>
+                </a:solidFill>
+              </a:rPr>
+              <a:t>Hack, account</a:t>
+            </a:r>
+          </a:p>
+        </p:txBody>
+      </p:sp>
+      <p:sp>
+        <p:nvSpPr>
+          <p:cNvPr id="10" name="Arrow: Down 9">
+            <a:extLst>
+              <a:ext uri="{FF2B5EF4-FFF2-40B4-BE49-F238E27FC236}">
+                <a16:creationId xmlns:a16="http://schemas.microsoft.com/office/drawing/2014/main" id="{AECADF39-932A-B14E-9110-C5670F53D855}"/>
+              </a:ext>
+            </a:extLst>
+          </p:cNvPr>
+          <p:cNvSpPr/>
+          <p:nvPr/>
+        </p:nvSpPr>
+        <p:spPr>
+          <a:xfrm rot="1076481">
+            <a:off x="9020193" y="2139709"/>
+            <a:ext cx="490728" cy="950976"/>
+          </a:xfrm>
+          <a:prstGeom prst="downArrow">
+            <a:avLst/>
+          </a:prstGeom>
+        </p:spPr>
+        <p:style>
+          <a:lnRef idx="2">
+            <a:schemeClr val="accent1">
+              <a:shade val="15000"/>
+            </a:schemeClr>
+          </a:lnRef>
+          <a:fillRef idx="1">
+            <a:schemeClr val="accent1"/>
+          </a:fillRef>
+          <a:effectRef idx="0">
+            <a:schemeClr val="accent1"/>
+          </a:effectRef>
+          <a:fontRef idx="minor">
+            <a:schemeClr val="lt1"/>
+          </a:fontRef>
+        </p:style>
+        <p:txBody>
+          <a:bodyPr rtlCol="0" anchor="ctr"/>
+          <a:lstStyle/>
+          <a:p>
+            <a:pPr algn="ctr"/>
+            <a:endParaRPr lang="en-IN"/>
+          </a:p>
+        </p:txBody>
+      </p:sp>
+      <p:sp>
+        <p:nvSpPr>
+          <p:cNvPr id="12" name="Arrow: Down 11">
+            <a:extLst>
+              <a:ext uri="{FF2B5EF4-FFF2-40B4-BE49-F238E27FC236}">
+                <a16:creationId xmlns:a16="http://schemas.microsoft.com/office/drawing/2014/main" id="{5251C55D-3507-34BC-63D0-394F19E981D2}"/>
+              </a:ext>
+            </a:extLst>
+          </p:cNvPr>
+          <p:cNvSpPr/>
+          <p:nvPr/>
+        </p:nvSpPr>
+        <p:spPr>
+          <a:xfrm rot="20680479">
+            <a:off x="11078357" y="2214593"/>
+            <a:ext cx="490728" cy="950976"/>
+          </a:xfrm>
+          <a:prstGeom prst="downArrow">
+            <a:avLst/>
+          </a:prstGeom>
+        </p:spPr>
+        <p:style>
+          <a:lnRef idx="2">
+            <a:schemeClr val="accent1">
+              <a:shade val="15000"/>
+            </a:schemeClr>
+          </a:lnRef>
+          <a:fillRef idx="1">
+            <a:schemeClr val="accent1"/>
+          </a:fillRef>
+          <a:effectRef idx="0">
+            <a:schemeClr val="accent1"/>
+          </a:effectRef>
+          <a:fontRef idx="minor">
+            <a:schemeClr val="lt1"/>
+          </a:fontRef>
+        </p:style>
+        <p:txBody>
+          <a:bodyPr rtlCol="0" anchor="ctr"/>
+          <a:lstStyle/>
+          <a:p>
+            <a:pPr algn="ctr"/>
+            <a:endParaRPr lang="en-IN"/>
+          </a:p>
+        </p:txBody>
+      </p:sp>
+      <p:sp>
+        <p:nvSpPr>
+          <p:cNvPr id="14" name="TextBox 13">
+            <a:extLst>
+              <a:ext uri="{FF2B5EF4-FFF2-40B4-BE49-F238E27FC236}">
+                <a16:creationId xmlns:a16="http://schemas.microsoft.com/office/drawing/2014/main" id="{D28FCADE-3463-33D7-931B-89BDFDDECD64}"/>
+              </a:ext>
+            </a:extLst>
+          </p:cNvPr>
+          <p:cNvSpPr txBox="1"/>
+          <p:nvPr/>
+        </p:nvSpPr>
+        <p:spPr>
+          <a:xfrm>
+            <a:off x="10769671" y="3041309"/>
+            <a:ext cx="1358321" cy="369332"/>
+          </a:xfrm>
+          <a:prstGeom prst="rect">
+            <a:avLst/>
+          </a:prstGeom>
+          <a:noFill/>
+        </p:spPr>
+        <p:txBody>
+          <a:bodyPr wrap="none" rtlCol="0">
+            <a:spAutoFit/>
+          </a:bodyPr>
+          <a:lstStyle/>
+          <a:p>
+            <a:r>
+              <a:rPr lang="en-IN" dirty="0">
+                <a:solidFill>
+                  <a:schemeClr val="accent4">
+                    <a:lumMod val="60000"/>
+                    <a:lumOff val="40000"/>
+                  </a:schemeClr>
+                </a:solidFill>
+              </a:rPr>
+              <a:t>Return, item</a:t>
             </a:r>
           </a:p>
         </p:txBody>
@@ -4509,7 +5207,7 @@
         <p:spPr>
           <a:xfrm>
             <a:off x="64008" y="153198"/>
-            <a:ext cx="11018520" cy="6370975"/>
+            <a:ext cx="6784189" cy="1938992"/>
           </a:xfrm>
           <a:prstGeom prst="rect">
             <a:avLst/>
@@ -4554,75 +5252,87 @@
                   </a:schemeClr>
                 </a:solidFill>
               </a:rPr>
-              <a:t>An LLM chatbot understands language deeply. It can handle "hacked," "compromised," "someone got into my account," "unauthorized access" — all the same. It can ask follow-up questions, maintain context within the conversation, and explain things clearly.</a:t>
-            </a:r>
-          </a:p>
-          <a:p>
-            <a:endParaRPr lang="en-US" sz="2400" dirty="0">
-              <a:solidFill>
-                <a:schemeClr val="accent6">
-                  <a:lumMod val="60000"/>
-                  <a:lumOff val="40000"/>
-                </a:schemeClr>
-              </a:solidFill>
-            </a:endParaRPr>
-          </a:p>
-          <a:p>
-            <a:r>
-              <a:rPr lang="en-US" sz="2400" dirty="0">
-                <a:solidFill>
-                  <a:schemeClr val="accent6">
-                    <a:lumMod val="60000"/>
-                    <a:lumOff val="40000"/>
-                  </a:schemeClr>
-                </a:solidFill>
-              </a:rPr>
-              <a:t>But here's the ceiling: it cannot </a:t>
-            </a:r>
-            <a:r>
-              <a:rPr lang="en-US" sz="2400" i="1" dirty="0">
-                <a:solidFill>
-                  <a:schemeClr val="accent6">
-                    <a:lumMod val="60000"/>
-                    <a:lumOff val="40000"/>
-                  </a:schemeClr>
-                </a:solidFill>
-              </a:rPr>
-              <a:t>do</a:t>
-            </a:r>
-            <a:r>
-              <a:rPr lang="en-US" sz="2400" dirty="0">
-                <a:solidFill>
-                  <a:schemeClr val="accent6">
-                    <a:lumMod val="60000"/>
-                    <a:lumOff val="40000"/>
-                  </a:schemeClr>
-                </a:solidFill>
-              </a:rPr>
-              <a:t> anything – </a:t>
-            </a:r>
-            <a:r>
-              <a:rPr lang="en-US" sz="2400" b="1" i="1" u="sng" dirty="0">
-                <a:solidFill>
-                  <a:schemeClr val="accent6">
-                    <a:lumMod val="60000"/>
-                    <a:lumOff val="40000"/>
-                  </a:schemeClr>
-                </a:solidFill>
-              </a:rPr>
-              <a:t>no action</a:t>
-            </a:r>
-          </a:p>
-          <a:p>
-            <a:endParaRPr lang="en-US" sz="2400" dirty="0">
-              <a:solidFill>
-                <a:schemeClr val="accent6">
-                  <a:lumMod val="60000"/>
-                  <a:lumOff val="40000"/>
-                </a:schemeClr>
-              </a:solidFill>
-            </a:endParaRPr>
-          </a:p>
+              <a:t>An LLM chatbot understands language deeply. It can handle "hacked," "compromised," "someone got into my account," "unauthorized access" — all the same. </a:t>
+            </a:r>
+          </a:p>
+        </p:txBody>
+      </p:sp>
+      <p:sp>
+        <p:nvSpPr>
+          <p:cNvPr id="2" name="Rectangle: Rounded Corners 1">
+            <a:extLst>
+              <a:ext uri="{FF2B5EF4-FFF2-40B4-BE49-F238E27FC236}">
+                <a16:creationId xmlns:a16="http://schemas.microsoft.com/office/drawing/2014/main" id="{5D6E0079-C1A5-49FA-7626-9052CE703D20}"/>
+              </a:ext>
+            </a:extLst>
+          </p:cNvPr>
+          <p:cNvSpPr/>
+          <p:nvPr/>
+        </p:nvSpPr>
+        <p:spPr>
+          <a:xfrm>
+            <a:off x="5377339" y="2634187"/>
+            <a:ext cx="2066544" cy="1569660"/>
+          </a:xfrm>
+          <a:prstGeom prst="roundRect">
+            <a:avLst/>
+          </a:prstGeom>
+        </p:spPr>
+        <p:style>
+          <a:lnRef idx="2">
+            <a:schemeClr val="accent1">
+              <a:shade val="15000"/>
+            </a:schemeClr>
+          </a:lnRef>
+          <a:fillRef idx="1">
+            <a:schemeClr val="accent1"/>
+          </a:fillRef>
+          <a:effectRef idx="0">
+            <a:schemeClr val="accent1"/>
+          </a:effectRef>
+          <a:fontRef idx="minor">
+            <a:schemeClr val="lt1"/>
+          </a:fontRef>
+        </p:style>
+        <p:txBody>
+          <a:bodyPr rtlCol="0" anchor="ctr"/>
+          <a:lstStyle/>
+          <a:p>
+            <a:pPr algn="ctr"/>
+            <a:r>
+              <a:rPr lang="en-IN" dirty="0"/>
+              <a:t>LLM ChatBot</a:t>
+            </a:r>
+          </a:p>
+        </p:txBody>
+      </p:sp>
+      <p:sp>
+        <p:nvSpPr>
+          <p:cNvPr id="5" name="TextBox 4">
+            <a:extLst>
+              <a:ext uri="{FF2B5EF4-FFF2-40B4-BE49-F238E27FC236}">
+                <a16:creationId xmlns:a16="http://schemas.microsoft.com/office/drawing/2014/main" id="{0DF3BA64-6538-7C90-19FD-C4EC53233A9B}"/>
+              </a:ext>
+            </a:extLst>
+          </p:cNvPr>
+          <p:cNvSpPr txBox="1"/>
+          <p:nvPr/>
+        </p:nvSpPr>
+        <p:spPr>
+          <a:xfrm>
+            <a:off x="7688391" y="2677656"/>
+            <a:ext cx="4439601" cy="1569660"/>
+          </a:xfrm>
+          <a:prstGeom prst="rect">
+            <a:avLst/>
+          </a:prstGeom>
+          <a:noFill/>
+        </p:spPr>
+        <p:txBody>
+          <a:bodyPr wrap="square">
+            <a:spAutoFit/>
+          </a:bodyPr>
+          <a:lstStyle/>
           <a:p>
             <a:pPr marL="342900" indent="-342900">
               <a:buFont typeface="Arial" panose="020B0604020202020204" pitchFamily="34" charset="0"/>
@@ -4631,7 +5341,7 @@
             <a:r>
               <a:rPr lang="en-US" sz="2400" dirty="0">
                 <a:solidFill>
-                  <a:schemeClr val="accent6">
+                  <a:schemeClr val="accent4">
                     <a:lumMod val="60000"/>
                     <a:lumOff val="40000"/>
                   </a:schemeClr>
@@ -4642,7 +5352,7 @@
             <a:r>
               <a:rPr lang="en-US" sz="2400" i="1" dirty="0">
                 <a:solidFill>
-                  <a:schemeClr val="accent6">
+                  <a:schemeClr val="accent4">
                     <a:lumMod val="60000"/>
                     <a:lumOff val="40000"/>
                   </a:schemeClr>
@@ -4653,7 +5363,7 @@
             <a:r>
               <a:rPr lang="en-US" sz="2400" dirty="0">
                 <a:solidFill>
-                  <a:schemeClr val="accent6">
+                  <a:schemeClr val="accent4">
                     <a:lumMod val="60000"/>
                     <a:lumOff val="40000"/>
                   </a:schemeClr>
@@ -4670,13 +5380,77 @@
             <a:r>
               <a:rPr lang="en-US" sz="2400" dirty="0">
                 <a:solidFill>
+                  <a:schemeClr val="accent4">
+                    <a:lumMod val="60000"/>
+                    <a:lumOff val="40000"/>
+                  </a:schemeClr>
+                </a:solidFill>
+              </a:rPr>
+              <a:t>It can explain </a:t>
+            </a:r>
+            <a:r>
+              <a:rPr lang="en-US" sz="2400" i="1" dirty="0">
+                <a:solidFill>
+                  <a:schemeClr val="accent4">
+                    <a:lumMod val="60000"/>
+                    <a:lumOff val="40000"/>
+                  </a:schemeClr>
+                </a:solidFill>
+              </a:rPr>
+              <a:t>what</a:t>
+            </a:r>
+            <a:r>
+              <a:rPr lang="en-US" sz="2400" dirty="0">
+                <a:solidFill>
+                  <a:schemeClr val="accent4">
+                    <a:lumMod val="60000"/>
+                    <a:lumOff val="40000"/>
+                  </a:schemeClr>
+                </a:solidFill>
+              </a:rPr>
+              <a:t> to look for in suspicious activity. </a:t>
+            </a:r>
+          </a:p>
+        </p:txBody>
+      </p:sp>
+      <p:sp>
+        <p:nvSpPr>
+          <p:cNvPr id="7" name="TextBox 6">
+            <a:extLst>
+              <a:ext uri="{FF2B5EF4-FFF2-40B4-BE49-F238E27FC236}">
+                <a16:creationId xmlns:a16="http://schemas.microsoft.com/office/drawing/2014/main" id="{42B8F9D8-BBBA-286C-3CD4-2FBE8F8D3661}"/>
+              </a:ext>
+            </a:extLst>
+          </p:cNvPr>
+          <p:cNvSpPr txBox="1"/>
+          <p:nvPr/>
+        </p:nvSpPr>
+        <p:spPr>
+          <a:xfrm>
+            <a:off x="197596" y="4929910"/>
+            <a:ext cx="10167625" cy="1569660"/>
+          </a:xfrm>
+          <a:prstGeom prst="rect">
+            <a:avLst/>
+          </a:prstGeom>
+          <a:noFill/>
+        </p:spPr>
+        <p:txBody>
+          <a:bodyPr wrap="square">
+            <a:spAutoFit/>
+          </a:bodyPr>
+          <a:lstStyle/>
+          <a:p>
+            <a:r>
+              <a:rPr lang="en-US" sz="2400" dirty="0">
+                <a:solidFill>
                   <a:schemeClr val="accent6">
                     <a:lumMod val="60000"/>
                     <a:lumOff val="40000"/>
                   </a:schemeClr>
                 </a:solidFill>
               </a:rPr>
-              <a:t>It can explain </a:t>
+              <a:t>But here's the ceiling: it cannot </a:t>
             </a:r>
             <a:r>
               <a:rPr lang="en-US" sz="2400" i="1" dirty="0">
@@ -4687,7 +5461,7 @@
                   </a:schemeClr>
                 </a:solidFill>
               </a:rPr>
-              <a:t>what</a:t>
+              <a:t>do</a:t>
             </a:r>
             <a:r>
               <a:rPr lang="en-US" sz="2400" dirty="0">
@@ -4698,7 +5472,18 @@
                   </a:schemeClr>
                 </a:solidFill>
               </a:rPr>
-              <a:t> to look for in suspicious activity. </a:t>
+              <a:t> anything – </a:t>
+            </a:r>
+            <a:r>
+              <a:rPr lang="en-US" sz="2400" b="1" i="1" u="sng" dirty="0">
+                <a:solidFill>
+                  <a:schemeClr val="accent6">
+                    <a:lumMod val="60000"/>
+                    <a:lumOff val="40000"/>
+                  </a:schemeClr>
+                </a:solidFill>
+              </a:rPr>
+              <a:t>no action</a:t>
             </a:r>
           </a:p>
           <a:p>
@@ -4707,6 +5492,17 @@
               <a:buChar char="•"/>
             </a:pPr>
             <a:r>
+              <a:rPr lang="en-US" sz="2400" b="1" dirty="0">
+                <a:solidFill>
+                  <a:schemeClr val="accent6">
+                    <a:lumMod val="60000"/>
+                    <a:lumOff val="40000"/>
+                  </a:schemeClr>
+                </a:solidFill>
+              </a:rPr>
+              <a:t>Cannot look up the account</a:t>
+            </a:r>
+            <a:r>
               <a:rPr lang="en-US" sz="2400" dirty="0">
                 <a:solidFill>
                   <a:schemeClr val="accent6">
@@ -4715,30 +5511,7 @@
                   </a:schemeClr>
                 </a:solidFill>
               </a:rPr>
-              <a:t>It can empathize and guide. </a:t>
-            </a:r>
-          </a:p>
-          <a:p>
-            <a:endParaRPr lang="en-US" sz="2400" dirty="0">
-              <a:solidFill>
-                <a:schemeClr val="accent6">
-                  <a:lumMod val="60000"/>
-                  <a:lumOff val="40000"/>
-                </a:schemeClr>
-              </a:solidFill>
-            </a:endParaRPr>
-          </a:p>
-          <a:p>
-            <a:r>
-              <a:rPr lang="en-US" sz="2400" dirty="0">
-                <a:solidFill>
-                  <a:schemeClr val="accent6">
-                    <a:lumMod val="60000"/>
-                    <a:lumOff val="40000"/>
-                  </a:schemeClr>
-                </a:solidFill>
-              </a:rPr>
-              <a:t>But it </a:t>
+              <a:t>, </a:t>
             </a:r>
           </a:p>
           <a:p>
@@ -4755,18 +5528,7 @@
                   </a:schemeClr>
                 </a:solidFill>
               </a:rPr>
-              <a:t>cannot look up the account</a:t>
-            </a:r>
-            <a:r>
-              <a:rPr lang="en-US" sz="2400" dirty="0">
-                <a:solidFill>
-                  <a:schemeClr val="accent6">
-                    <a:lumMod val="60000"/>
-                    <a:lumOff val="40000"/>
-                  </a:schemeClr>
-                </a:solidFill>
-              </a:rPr>
-              <a:t>, </a:t>
+              <a:t>Cannot freeze the card,</a:t>
             </a:r>
           </a:p>
           <a:p>
@@ -4783,36 +5545,191 @@
                   </a:schemeClr>
                 </a:solidFill>
               </a:rPr>
-              <a:t>cannot freeze the card,</a:t>
-            </a:r>
-          </a:p>
+              <a:t>Cannot file an incident report</a:t>
+            </a:r>
+            <a:r>
+              <a:rPr lang="en-US" sz="2400" dirty="0">
+                <a:solidFill>
+                  <a:schemeClr val="accent6">
+                    <a:lumMod val="60000"/>
+                    <a:lumOff val="40000"/>
+                  </a:schemeClr>
+                </a:solidFill>
+              </a:rPr>
+              <a:t>. </a:t>
+            </a:r>
+          </a:p>
+        </p:txBody>
+      </p:sp>
+      <p:sp>
+        <p:nvSpPr>
+          <p:cNvPr id="9" name="TextBox 8">
+            <a:extLst>
+              <a:ext uri="{FF2B5EF4-FFF2-40B4-BE49-F238E27FC236}">
+                <a16:creationId xmlns:a16="http://schemas.microsoft.com/office/drawing/2014/main" id="{4F85615D-C569-18C7-2128-D7E3A2130CC4}"/>
+              </a:ext>
+            </a:extLst>
+          </p:cNvPr>
+          <p:cNvSpPr txBox="1"/>
+          <p:nvPr/>
+        </p:nvSpPr>
+        <p:spPr>
+          <a:xfrm>
+            <a:off x="148161" y="2448922"/>
+            <a:ext cx="4853607" cy="1938992"/>
+          </a:xfrm>
+          <a:prstGeom prst="rect">
+            <a:avLst/>
+          </a:prstGeom>
+          <a:noFill/>
+        </p:spPr>
+        <p:txBody>
+          <a:bodyPr wrap="square">
+            <a:spAutoFit/>
+          </a:bodyPr>
+          <a:lstStyle/>
           <a:p>
             <a:pPr marL="342900" indent="-342900">
               <a:buFont typeface="Arial" panose="020B0604020202020204" pitchFamily="34" charset="0"/>
               <a:buChar char="•"/>
             </a:pPr>
             <a:r>
-              <a:rPr lang="en-US" sz="2400" b="1" dirty="0">
-                <a:solidFill>
-                  <a:schemeClr val="accent6">
-                    <a:lumMod val="60000"/>
-                    <a:lumOff val="40000"/>
-                  </a:schemeClr>
-                </a:solidFill>
-              </a:rPr>
-              <a:t>cannot file an incident report</a:t>
-            </a:r>
-            <a:r>
               <a:rPr lang="en-US" sz="2400" dirty="0">
                 <a:solidFill>
-                  <a:schemeClr val="accent6">
-                    <a:lumMod val="60000"/>
-                    <a:lumOff val="40000"/>
-                  </a:schemeClr>
-                </a:solidFill>
-              </a:rPr>
-              <a:t>. </a:t>
-            </a:r>
+                  <a:schemeClr val="accent4">
+                    <a:lumMod val="60000"/>
+                    <a:lumOff val="40000"/>
+                  </a:schemeClr>
+                </a:solidFill>
+              </a:rPr>
+              <a:t>I think someone hacked into my account.</a:t>
+            </a:r>
+          </a:p>
+          <a:p>
+            <a:pPr marL="342900" indent="-342900">
+              <a:buFont typeface="Arial" panose="020B0604020202020204" pitchFamily="34" charset="0"/>
+              <a:buChar char="•"/>
+            </a:pPr>
+            <a:r>
+              <a:rPr lang="en-US" sz="2400" dirty="0">
+                <a:solidFill>
+                  <a:schemeClr val="accent4">
+                    <a:lumMod val="60000"/>
+                    <a:lumOff val="40000"/>
+                  </a:schemeClr>
+                </a:solidFill>
+              </a:rPr>
+              <a:t>My account is compromised</a:t>
+            </a:r>
+          </a:p>
+          <a:p>
+            <a:pPr marL="342900" indent="-342900">
+              <a:buFont typeface="Arial" panose="020B0604020202020204" pitchFamily="34" charset="0"/>
+              <a:buChar char="•"/>
+            </a:pPr>
+            <a:r>
+              <a:rPr lang="en-US" sz="2400" dirty="0">
+                <a:solidFill>
+                  <a:schemeClr val="accent4">
+                    <a:lumMod val="60000"/>
+                    <a:lumOff val="40000"/>
+                  </a:schemeClr>
+                </a:solidFill>
+              </a:rPr>
+              <a:t>There is unauthorized access to my account</a:t>
+            </a:r>
+          </a:p>
+        </p:txBody>
+      </p:sp>
+      <p:sp>
+        <p:nvSpPr>
+          <p:cNvPr id="10" name="Arrow: Right 9">
+            <a:extLst>
+              <a:ext uri="{FF2B5EF4-FFF2-40B4-BE49-F238E27FC236}">
+                <a16:creationId xmlns:a16="http://schemas.microsoft.com/office/drawing/2014/main" id="{4110E115-63C3-AB4F-9FF7-DBCEA96E8340}"/>
+              </a:ext>
+            </a:extLst>
+          </p:cNvPr>
+          <p:cNvSpPr/>
+          <p:nvPr/>
+        </p:nvSpPr>
+        <p:spPr>
+          <a:xfrm>
+            <a:off x="4764024" y="3191256"/>
+            <a:ext cx="521207" cy="402336"/>
+          </a:xfrm>
+          <a:prstGeom prst="rightArrow">
+            <a:avLst/>
+          </a:prstGeom>
+        </p:spPr>
+        <p:style>
+          <a:lnRef idx="2">
+            <a:schemeClr val="accent1">
+              <a:shade val="15000"/>
+            </a:schemeClr>
+          </a:lnRef>
+          <a:fillRef idx="1">
+            <a:schemeClr val="accent1"/>
+          </a:fillRef>
+          <a:effectRef idx="0">
+            <a:schemeClr val="accent1"/>
+          </a:effectRef>
+          <a:fontRef idx="minor">
+            <a:schemeClr val="lt1"/>
+          </a:fontRef>
+        </p:style>
+        <p:txBody>
+          <a:bodyPr rtlCol="0" anchor="ctr"/>
+          <a:lstStyle/>
+          <a:p>
+            <a:pPr algn="ctr"/>
+            <a:endParaRPr lang="en-IN"/>
+          </a:p>
+        </p:txBody>
+      </p:sp>
+      <p:sp>
+        <p:nvSpPr>
+          <p:cNvPr id="12" name="Arrow: Right 11">
+            <a:extLst>
+              <a:ext uri="{FF2B5EF4-FFF2-40B4-BE49-F238E27FC236}">
+                <a16:creationId xmlns:a16="http://schemas.microsoft.com/office/drawing/2014/main" id="{AE2695D9-2C21-B702-E029-A429FB44CCE0}"/>
+              </a:ext>
+            </a:extLst>
+          </p:cNvPr>
+          <p:cNvSpPr/>
+          <p:nvPr/>
+        </p:nvSpPr>
+        <p:spPr>
+          <a:xfrm>
+            <a:off x="7535991" y="3142488"/>
+            <a:ext cx="521207" cy="402336"/>
+          </a:xfrm>
+          <a:prstGeom prst="rightArrow">
+            <a:avLst/>
+          </a:prstGeom>
+        </p:spPr>
+        <p:style>
+          <a:lnRef idx="2">
+            <a:schemeClr val="accent1">
+              <a:shade val="15000"/>
+            </a:schemeClr>
+          </a:lnRef>
+          <a:fillRef idx="1">
+            <a:schemeClr val="accent1"/>
+          </a:fillRef>
+          <a:effectRef idx="0">
+            <a:schemeClr val="accent1"/>
+          </a:effectRef>
+          <a:fontRef idx="minor">
+            <a:schemeClr val="lt1"/>
+          </a:fontRef>
+        </p:style>
+        <p:txBody>
+          <a:bodyPr rtlCol="0" anchor="ctr"/>
+          <a:lstStyle/>
+          <a:p>
+            <a:pPr algn="ctr"/>
+            <a:endParaRPr lang="en-IN"/>
           </a:p>
         </p:txBody>
       </p:sp>
@@ -4854,10 +5771,86 @@
       </p:grpSpPr>
       <p:sp>
         <p:nvSpPr>
-          <p:cNvPr id="5" name="Oval 4">
-            <a:extLst>
-              <a:ext uri="{FF2B5EF4-FFF2-40B4-BE49-F238E27FC236}">
-                <a16:creationId xmlns:a16="http://schemas.microsoft.com/office/drawing/2014/main" id="{8DBE4B75-D9BE-02F7-204A-B15C2730AD7D}"/>
+          <p:cNvPr id="3" name="TextBox 2">
+            <a:extLst>
+              <a:ext uri="{FF2B5EF4-FFF2-40B4-BE49-F238E27FC236}">
+                <a16:creationId xmlns:a16="http://schemas.microsoft.com/office/drawing/2014/main" id="{AD337815-C730-1611-7D14-27064D53A27E}"/>
+              </a:ext>
+            </a:extLst>
+          </p:cNvPr>
+          <p:cNvSpPr txBox="1"/>
+          <p:nvPr/>
+        </p:nvSpPr>
+        <p:spPr>
+          <a:xfrm>
+            <a:off x="64008" y="153198"/>
+            <a:ext cx="11018520" cy="1200329"/>
+          </a:xfrm>
+          <a:prstGeom prst="rect">
+            <a:avLst/>
+          </a:prstGeom>
+          <a:noFill/>
+        </p:spPr>
+        <p:txBody>
+          <a:bodyPr wrap="square">
+            <a:spAutoFit/>
+          </a:bodyPr>
+          <a:lstStyle/>
+          <a:p>
+            <a:r>
+              <a:rPr lang="en-US" sz="2400" b="1" dirty="0">
+                <a:solidFill>
+                  <a:schemeClr val="accent6">
+                    <a:lumMod val="60000"/>
+                    <a:lumOff val="40000"/>
+                  </a:schemeClr>
+                </a:solidFill>
+              </a:rPr>
+              <a:t>Generation 3: The Autonomous AI Agent</a:t>
+            </a:r>
+          </a:p>
+          <a:p>
+            <a:endParaRPr lang="en-US" sz="2400" b="1" dirty="0">
+              <a:solidFill>
+                <a:schemeClr val="accent6">
+                  <a:lumMod val="60000"/>
+                  <a:lumOff val="40000"/>
+                </a:schemeClr>
+              </a:solidFill>
+            </a:endParaRPr>
+          </a:p>
+          <a:p>
+            <a:r>
+              <a:rPr lang="en-US" sz="2400" dirty="0">
+                <a:solidFill>
+                  <a:schemeClr val="accent6">
+                    <a:lumMod val="60000"/>
+                    <a:lumOff val="40000"/>
+                  </a:schemeClr>
+                </a:solidFill>
+              </a:rPr>
+              <a:t>The agent understands language like the LLM chatbot — but it also can </a:t>
+            </a:r>
+            <a:r>
+              <a:rPr lang="en-US" sz="2400" b="1" i="1" u="sng" dirty="0">
+                <a:solidFill>
+                  <a:schemeClr val="accent6">
+                    <a:lumMod val="60000"/>
+                    <a:lumOff val="40000"/>
+                  </a:schemeClr>
+                </a:solidFill>
+              </a:rPr>
+              <a:t>perform actions </a:t>
+            </a:r>
+          </a:p>
+        </p:txBody>
+      </p:sp>
+      <p:sp>
+        <p:nvSpPr>
+          <p:cNvPr id="2" name="Rectangle: Rounded Corners 1">
+            <a:extLst>
+              <a:ext uri="{FF2B5EF4-FFF2-40B4-BE49-F238E27FC236}">
+                <a16:creationId xmlns:a16="http://schemas.microsoft.com/office/drawing/2014/main" id="{5349DBA5-E065-0BBF-F9DC-987FABBEF47B}"/>
               </a:ext>
             </a:extLst>
           </p:cNvPr>
@@ -4866,10 +5859,10 @@
         </p:nvSpPr>
         <p:spPr>
           <a:xfrm>
-            <a:off x="3842004" y="5416177"/>
-            <a:ext cx="4507992" cy="1197864"/>
-          </a:xfrm>
-          <a:prstGeom prst="ellipse">
+            <a:off x="3328416" y="1775722"/>
+            <a:ext cx="2679192" cy="1353312"/>
+          </a:xfrm>
+          <a:prstGeom prst="roundRect">
             <a:avLst/>
           </a:prstGeom>
         </p:spPr>
@@ -4895,14 +5888,14 @@
           <a:p>
             <a:pPr algn="ctr"/>
             <a:r>
-              <a:rPr lang="en-US" sz="2400" dirty="0"/>
+              <a:rPr lang="en-US" dirty="0"/>
               <a:t>Agents</a:t>
             </a:r>
           </a:p>
           <a:p>
             <a:pPr algn="ctr"/>
             <a:r>
-              <a:rPr lang="en-US" sz="2400" dirty="0"/>
+              <a:rPr lang="en-US" dirty="0"/>
               <a:t>LLM + Tools + Memory </a:t>
             </a:r>
           </a:p>
@@ -4910,10 +5903,10 @@
       </p:sp>
       <p:sp>
         <p:nvSpPr>
-          <p:cNvPr id="3" name="TextBox 2">
-            <a:extLst>
-              <a:ext uri="{FF2B5EF4-FFF2-40B4-BE49-F238E27FC236}">
-                <a16:creationId xmlns:a16="http://schemas.microsoft.com/office/drawing/2014/main" id="{AD337815-C730-1611-7D14-27064D53A27E}"/>
+          <p:cNvPr id="6" name="TextBox 5">
+            <a:extLst>
+              <a:ext uri="{FF2B5EF4-FFF2-40B4-BE49-F238E27FC236}">
+                <a16:creationId xmlns:a16="http://schemas.microsoft.com/office/drawing/2014/main" id="{F32E4181-569F-13DA-F861-E45F67C4BCD8}"/>
               </a:ext>
             </a:extLst>
           </p:cNvPr>
@@ -4922,8 +5915,8 @@
         </p:nvSpPr>
         <p:spPr>
           <a:xfrm>
-            <a:off x="64008" y="153198"/>
-            <a:ext cx="11018520" cy="5262979"/>
+            <a:off x="-13716" y="1899720"/>
+            <a:ext cx="3502152" cy="1200329"/>
           </a:xfrm>
           <a:prstGeom prst="rect">
             <a:avLst/>
@@ -4945,88 +5938,70 @@
                   </a:schemeClr>
                 </a:solidFill>
               </a:rPr>
-              <a:t>Generation 3: The Autonomous Agent</a:t>
-            </a:r>
-          </a:p>
-          <a:p>
-            <a:endParaRPr lang="en-US" sz="2400" b="1" dirty="0">
+              <a:t>Customer says:</a:t>
+            </a:r>
+          </a:p>
+          <a:p>
+            <a:r>
+              <a:rPr lang="en-US" sz="2400" i="1" dirty="0">
+                <a:solidFill>
+                  <a:schemeClr val="accent4">
+                    <a:lumMod val="60000"/>
+                    <a:lumOff val="40000"/>
+                  </a:schemeClr>
+                </a:solidFill>
+              </a:rPr>
+              <a:t>I think someone hacked my account,….</a:t>
+            </a:r>
+            <a:endParaRPr lang="en-IN" dirty="0">
               <a:solidFill>
-                <a:schemeClr val="accent6">
+                <a:schemeClr val="accent4">
                   <a:lumMod val="60000"/>
                   <a:lumOff val="40000"/>
                 </a:schemeClr>
               </a:solidFill>
             </a:endParaRPr>
           </a:p>
+        </p:txBody>
+      </p:sp>
+      <p:sp>
+        <p:nvSpPr>
+          <p:cNvPr id="8" name="TextBox 7">
+            <a:extLst>
+              <a:ext uri="{FF2B5EF4-FFF2-40B4-BE49-F238E27FC236}">
+                <a16:creationId xmlns:a16="http://schemas.microsoft.com/office/drawing/2014/main" id="{7179ECE2-A1DB-A5F2-A60A-CEE53D0F6F24}"/>
+              </a:ext>
+            </a:extLst>
+          </p:cNvPr>
+          <p:cNvSpPr txBox="1"/>
+          <p:nvPr/>
+        </p:nvSpPr>
+        <p:spPr>
+          <a:xfrm>
+            <a:off x="6567678" y="1559820"/>
+            <a:ext cx="5564124" cy="3416320"/>
+          </a:xfrm>
+          <a:prstGeom prst="rect">
+            <a:avLst/>
+          </a:prstGeom>
+          <a:noFill/>
+        </p:spPr>
+        <p:txBody>
+          <a:bodyPr wrap="square">
+            <a:spAutoFit/>
+          </a:bodyPr>
+          <a:lstStyle/>
           <a:p>
             <a:r>
               <a:rPr lang="en-US" sz="2400" dirty="0">
                 <a:solidFill>
-                  <a:schemeClr val="accent6">
-                    <a:lumMod val="60000"/>
-                    <a:lumOff val="40000"/>
-                  </a:schemeClr>
-                </a:solidFill>
-              </a:rPr>
-              <a:t>The agent understands language like the LLM chatbot — but it also can </a:t>
-            </a:r>
-            <a:r>
-              <a:rPr lang="en-US" sz="2400" b="1" i="1" u="sng" dirty="0">
-                <a:solidFill>
-                  <a:schemeClr val="accent6">
-                    <a:lumMod val="60000"/>
-                    <a:lumOff val="40000"/>
-                  </a:schemeClr>
-                </a:solidFill>
-              </a:rPr>
-              <a:t>perform actions </a:t>
-            </a:r>
-          </a:p>
-          <a:p>
-            <a:endParaRPr lang="en-US" sz="2400" dirty="0">
-              <a:solidFill>
-                <a:schemeClr val="accent6">
-                  <a:lumMod val="60000"/>
-                  <a:lumOff val="40000"/>
-                </a:schemeClr>
-              </a:solidFill>
-            </a:endParaRPr>
-          </a:p>
-          <a:p>
-            <a:r>
-              <a:rPr lang="en-US" sz="2400" dirty="0">
-                <a:solidFill>
-                  <a:schemeClr val="accent6">
-                    <a:lumMod val="60000"/>
-                    <a:lumOff val="40000"/>
-                  </a:schemeClr>
-                </a:solidFill>
-              </a:rPr>
-              <a:t>When the customer says "</a:t>
-            </a:r>
-            <a:r>
-              <a:rPr lang="en-US" sz="2400" b="1" i="1" dirty="0">
-                <a:solidFill>
-                  <a:schemeClr val="accent6">
-                    <a:lumMod val="60000"/>
-                    <a:lumOff val="40000"/>
-                  </a:schemeClr>
-                </a:solidFill>
-              </a:rPr>
-              <a:t>I think someone hacked my account," </a:t>
-            </a:r>
-          </a:p>
-          <a:p>
-            <a:r>
-              <a:rPr lang="en-US" sz="2400" dirty="0">
-                <a:solidFill>
-                  <a:schemeClr val="accent6">
-                    <a:lumMod val="60000"/>
-                    <a:lumOff val="40000"/>
-                  </a:schemeClr>
-                </a:solidFill>
-              </a:rPr>
-              <a:t>the agent can </a:t>
+                  <a:schemeClr val="accent4">
+                    <a:lumMod val="60000"/>
+                    <a:lumOff val="40000"/>
+                  </a:schemeClr>
+                </a:solidFill>
+              </a:rPr>
+              <a:t>Agent can </a:t>
             </a:r>
           </a:p>
           <a:p>
@@ -5037,7 +6012,7 @@
             <a:r>
               <a:rPr lang="en-US" sz="2400" dirty="0">
                 <a:solidFill>
-                  <a:schemeClr val="accent6">
+                  <a:schemeClr val="accent4">
                     <a:lumMod val="60000"/>
                     <a:lumOff val="40000"/>
                   </a:schemeClr>
@@ -5054,7 +6029,7 @@
             <a:r>
               <a:rPr lang="en-US" sz="2400" dirty="0">
                 <a:solidFill>
-                  <a:schemeClr val="accent6">
+                  <a:schemeClr val="accent4">
                     <a:lumMod val="60000"/>
                     <a:lumOff val="40000"/>
                   </a:schemeClr>
@@ -5071,7 +6046,7 @@
             <a:r>
               <a:rPr lang="en-US" sz="2400" dirty="0">
                 <a:solidFill>
-                  <a:schemeClr val="accent6">
+                  <a:schemeClr val="accent4">
                     <a:lumMod val="60000"/>
                     <a:lumOff val="40000"/>
                   </a:schemeClr>
@@ -5088,7 +6063,7 @@
             <a:r>
               <a:rPr lang="en-US" sz="2400" dirty="0">
                 <a:solidFill>
-                  <a:schemeClr val="accent6">
+                  <a:schemeClr val="accent4">
                     <a:lumMod val="60000"/>
                     <a:lumOff val="40000"/>
                   </a:schemeClr>
@@ -5105,7 +6080,7 @@
             <a:r>
               <a:rPr lang="en-US" sz="2400" dirty="0">
                 <a:solidFill>
-                  <a:schemeClr val="accent6">
+                  <a:schemeClr val="accent4">
                     <a:lumMod val="60000"/>
                     <a:lumOff val="40000"/>
                   </a:schemeClr>
@@ -5122,7 +6097,7 @@
             <a:r>
               <a:rPr lang="en-US" sz="2400" dirty="0">
                 <a:solidFill>
-                  <a:schemeClr val="accent6">
+                  <a:schemeClr val="accent4">
                     <a:lumMod val="60000"/>
                     <a:lumOff val="40000"/>
                   </a:schemeClr>
@@ -5131,16 +6106,127 @@
               <a:t>draft a case summary for the fraud team </a:t>
             </a:r>
           </a:p>
-          <a:p>
-            <a:endParaRPr lang="en-US" sz="2400" dirty="0">
-              <a:solidFill>
-                <a:schemeClr val="accent6">
-                  <a:lumMod val="60000"/>
-                  <a:lumOff val="40000"/>
-                </a:schemeClr>
-              </a:solidFill>
-            </a:endParaRPr>
-          </a:p>
+        </p:txBody>
+      </p:sp>
+      <p:sp>
+        <p:nvSpPr>
+          <p:cNvPr id="9" name="Arrow: Right 8">
+            <a:extLst>
+              <a:ext uri="{FF2B5EF4-FFF2-40B4-BE49-F238E27FC236}">
+                <a16:creationId xmlns:a16="http://schemas.microsoft.com/office/drawing/2014/main" id="{B37DE898-B8E2-3A16-0D78-208FDFB0CEE6}"/>
+              </a:ext>
+            </a:extLst>
+          </p:cNvPr>
+          <p:cNvSpPr/>
+          <p:nvPr/>
+        </p:nvSpPr>
+        <p:spPr>
+          <a:xfrm>
+            <a:off x="6096000" y="2049595"/>
+            <a:ext cx="396240" cy="415499"/>
+          </a:xfrm>
+          <a:prstGeom prst="rightArrow">
+            <a:avLst/>
+          </a:prstGeom>
+        </p:spPr>
+        <p:style>
+          <a:lnRef idx="2">
+            <a:schemeClr val="accent1">
+              <a:shade val="15000"/>
+            </a:schemeClr>
+          </a:lnRef>
+          <a:fillRef idx="1">
+            <a:schemeClr val="accent1"/>
+          </a:fillRef>
+          <a:effectRef idx="0">
+            <a:schemeClr val="accent1"/>
+          </a:effectRef>
+          <a:fontRef idx="minor">
+            <a:schemeClr val="lt1"/>
+          </a:fontRef>
+        </p:style>
+        <p:txBody>
+          <a:bodyPr rtlCol="0" anchor="ctr"/>
+          <a:lstStyle/>
+          <a:p>
+            <a:pPr algn="ctr"/>
+            <a:endParaRPr lang="en-IN"/>
+          </a:p>
+        </p:txBody>
+      </p:sp>
+      <p:sp>
+        <p:nvSpPr>
+          <p:cNvPr id="11" name="Arrow: Right 10">
+            <a:extLst>
+              <a:ext uri="{FF2B5EF4-FFF2-40B4-BE49-F238E27FC236}">
+                <a16:creationId xmlns:a16="http://schemas.microsoft.com/office/drawing/2014/main" id="{17E39D2F-F9F6-0A2F-E5BA-DE6A149A2085}"/>
+              </a:ext>
+            </a:extLst>
+          </p:cNvPr>
+          <p:cNvSpPr/>
+          <p:nvPr/>
+        </p:nvSpPr>
+        <p:spPr>
+          <a:xfrm>
+            <a:off x="2894457" y="2003741"/>
+            <a:ext cx="396240" cy="415499"/>
+          </a:xfrm>
+          <a:prstGeom prst="rightArrow">
+            <a:avLst/>
+          </a:prstGeom>
+        </p:spPr>
+        <p:style>
+          <a:lnRef idx="2">
+            <a:schemeClr val="accent1">
+              <a:shade val="15000"/>
+            </a:schemeClr>
+          </a:lnRef>
+          <a:fillRef idx="1">
+            <a:schemeClr val="accent1"/>
+          </a:fillRef>
+          <a:effectRef idx="0">
+            <a:schemeClr val="accent1"/>
+          </a:effectRef>
+          <a:fontRef idx="minor">
+            <a:schemeClr val="lt1"/>
+          </a:fontRef>
+        </p:style>
+        <p:txBody>
+          <a:bodyPr rtlCol="0" anchor="ctr"/>
+          <a:lstStyle/>
+          <a:p>
+            <a:pPr algn="ctr"/>
+            <a:endParaRPr lang="en-IN"/>
+          </a:p>
+        </p:txBody>
+      </p:sp>
+      <p:sp>
+        <p:nvSpPr>
+          <p:cNvPr id="13" name="TextBox 12">
+            <a:extLst>
+              <a:ext uri="{FF2B5EF4-FFF2-40B4-BE49-F238E27FC236}">
+                <a16:creationId xmlns:a16="http://schemas.microsoft.com/office/drawing/2014/main" id="{08E6A703-FD30-541C-E2CE-F961C0D1BE2F}"/>
+              </a:ext>
+            </a:extLst>
+          </p:cNvPr>
+          <p:cNvSpPr txBox="1"/>
+          <p:nvPr/>
+        </p:nvSpPr>
+        <p:spPr>
+          <a:xfrm>
+            <a:off x="514350" y="5646974"/>
+            <a:ext cx="9992106" cy="461665"/>
+          </a:xfrm>
+          <a:prstGeom prst="rect">
+            <a:avLst/>
+          </a:prstGeom>
+          <a:noFill/>
+        </p:spPr>
+        <p:txBody>
+          <a:bodyPr wrap="square">
+            <a:spAutoFit/>
+          </a:bodyPr>
+          <a:lstStyle/>
           <a:p>
             <a:r>
               <a:rPr lang="en-US" sz="2400" dirty="0">
@@ -5214,6 +6300,466 @@
 </file>
 
 <file path=ppt/slides/slide5.xml><?xml version="1.0" encoding="utf-8"?>
+<p:sld xmlns:a="http://schemas.openxmlformats.org/drawingml/2006/main" xmlns:r="http://schemas.openxmlformats.org/officeDocument/2006/relationships" xmlns:p="http://schemas.openxmlformats.org/presentationml/2006/main">
+  <p:cSld>
+    <p:spTree>
+      <p:nvGrpSpPr>
+        <p:cNvPr id="1" name="">
+          <a:extLst>
+            <a:ext uri="{FF2B5EF4-FFF2-40B4-BE49-F238E27FC236}">
+              <a16:creationId xmlns:a16="http://schemas.microsoft.com/office/drawing/2014/main" id="{529EBDA7-B44E-B824-B04A-1C6D1FB40ED7}"/>
+            </a:ext>
+          </a:extLst>
+        </p:cNvPr>
+        <p:cNvGrpSpPr/>
+        <p:nvPr/>
+      </p:nvGrpSpPr>
+      <p:grpSpPr>
+        <a:xfrm>
+          <a:off x="0" y="0"/>
+          <a:ext cx="0" cy="0"/>
+          <a:chOff x="0" y="0"/>
+          <a:chExt cx="0" cy="0"/>
+        </a:xfrm>
+      </p:grpSpPr>
+      <p:sp>
+        <p:nvSpPr>
+          <p:cNvPr id="9" name="TextBox 8">
+            <a:extLst>
+              <a:ext uri="{FF2B5EF4-FFF2-40B4-BE49-F238E27FC236}">
+                <a16:creationId xmlns:a16="http://schemas.microsoft.com/office/drawing/2014/main" id="{E018E7A2-ACBA-1394-8855-0E8750AA2C1F}"/>
+              </a:ext>
+            </a:extLst>
+          </p:cNvPr>
+          <p:cNvSpPr txBox="1"/>
+          <p:nvPr/>
+        </p:nvSpPr>
+        <p:spPr>
+          <a:xfrm>
+            <a:off x="292608" y="528288"/>
+            <a:ext cx="11899392" cy="1938992"/>
+          </a:xfrm>
+          <a:prstGeom prst="rect">
+            <a:avLst/>
+          </a:prstGeom>
+          <a:noFill/>
+        </p:spPr>
+        <p:txBody>
+          <a:bodyPr wrap="square">
+            <a:spAutoFit/>
+          </a:bodyPr>
+          <a:lstStyle/>
+          <a:p>
+            <a:pPr>
+              <a:buNone/>
+            </a:pPr>
+            <a:r>
+              <a:rPr lang="en-US" sz="2400" dirty="0">
+                <a:solidFill>
+                  <a:schemeClr val="accent6">
+                    <a:lumMod val="60000"/>
+                    <a:lumOff val="40000"/>
+                  </a:schemeClr>
+                </a:solidFill>
+              </a:rPr>
+              <a:t>An </a:t>
+            </a:r>
+            <a:r>
+              <a:rPr lang="en-US" sz="2400" b="1" dirty="0">
+                <a:solidFill>
+                  <a:schemeClr val="accent6">
+                    <a:lumMod val="60000"/>
+                    <a:lumOff val="40000"/>
+                  </a:schemeClr>
+                </a:solidFill>
+              </a:rPr>
+              <a:t>AI Agent</a:t>
+            </a:r>
+            <a:r>
+              <a:rPr lang="en-US" sz="2400" dirty="0">
+                <a:solidFill>
+                  <a:schemeClr val="accent6">
+                    <a:lumMod val="60000"/>
+                    <a:lumOff val="40000"/>
+                  </a:schemeClr>
+                </a:solidFill>
+              </a:rPr>
+              <a:t> is an autonomous software system designed to </a:t>
+            </a:r>
+          </a:p>
+          <a:p>
+            <a:pPr marL="457200" indent="-457200">
+              <a:buAutoNum type="arabicParenR"/>
+            </a:pPr>
+            <a:r>
+              <a:rPr lang="en-US" sz="2400" dirty="0">
+                <a:solidFill>
+                  <a:schemeClr val="accent6">
+                    <a:lumMod val="60000"/>
+                    <a:lumOff val="40000"/>
+                  </a:schemeClr>
+                </a:solidFill>
+              </a:rPr>
+              <a:t>perceive its environment, </a:t>
+            </a:r>
+          </a:p>
+          <a:p>
+            <a:pPr marL="457200" indent="-457200">
+              <a:buAutoNum type="arabicParenR"/>
+            </a:pPr>
+            <a:r>
+              <a:rPr lang="en-US" sz="2400" dirty="0">
+                <a:solidFill>
+                  <a:schemeClr val="accent6">
+                    <a:lumMod val="60000"/>
+                    <a:lumOff val="40000"/>
+                  </a:schemeClr>
+                </a:solidFill>
+              </a:rPr>
+              <a:t>make independent decisions, and </a:t>
+            </a:r>
+          </a:p>
+          <a:p>
+            <a:pPr marL="457200" indent="-457200">
+              <a:buFont typeface="+mj-lt"/>
+              <a:buAutoNum type="arabicPeriod"/>
+            </a:pPr>
+            <a:r>
+              <a:rPr lang="en-US" sz="2400" dirty="0">
+                <a:solidFill>
+                  <a:schemeClr val="accent6">
+                    <a:lumMod val="60000"/>
+                    <a:lumOff val="40000"/>
+                  </a:schemeClr>
+                </a:solidFill>
+              </a:rPr>
+              <a:t>use tools to achieve a specific goal.</a:t>
+            </a:r>
+          </a:p>
+          <a:p>
+            <a:pPr>
+              <a:buNone/>
+            </a:pPr>
+            <a:r>
+              <a:rPr lang="en-US" sz="2400" dirty="0">
+                <a:solidFill>
+                  <a:schemeClr val="accent6">
+                    <a:lumMod val="60000"/>
+                    <a:lumOff val="40000"/>
+                  </a:schemeClr>
+                </a:solidFill>
+              </a:rPr>
+              <a:t>AI agent operates on a </a:t>
+            </a:r>
+            <a:r>
+              <a:rPr lang="en-US" sz="2400" b="1" dirty="0">
+                <a:solidFill>
+                  <a:schemeClr val="accent6">
+                    <a:lumMod val="60000"/>
+                    <a:lumOff val="40000"/>
+                  </a:schemeClr>
+                </a:solidFill>
+              </a:rPr>
+              <a:t>"Think-Plan-Act" loop</a:t>
+            </a:r>
+            <a:r>
+              <a:rPr lang="en-US" sz="2400" dirty="0">
+                <a:solidFill>
+                  <a:schemeClr val="accent6">
+                    <a:lumMod val="60000"/>
+                    <a:lumOff val="40000"/>
+                  </a:schemeClr>
+                </a:solidFill>
+              </a:rPr>
+              <a:t>.</a:t>
+            </a:r>
+          </a:p>
+        </p:txBody>
+      </p:sp>
+      <p:sp>
+        <p:nvSpPr>
+          <p:cNvPr id="2" name="Rectangle 1">
+            <a:extLst>
+              <a:ext uri="{FF2B5EF4-FFF2-40B4-BE49-F238E27FC236}">
+                <a16:creationId xmlns:a16="http://schemas.microsoft.com/office/drawing/2014/main" id="{5181AFBC-CFD4-FAE6-78FB-5444EC7382A7}"/>
+              </a:ext>
+            </a:extLst>
+          </p:cNvPr>
+          <p:cNvSpPr/>
+          <p:nvPr/>
+        </p:nvSpPr>
+        <p:spPr>
+          <a:xfrm>
+            <a:off x="2935224" y="3429000"/>
+            <a:ext cx="5266944" cy="2705424"/>
+          </a:xfrm>
+          <a:prstGeom prst="rect">
+            <a:avLst/>
+          </a:prstGeom>
+        </p:spPr>
+        <p:style>
+          <a:lnRef idx="2">
+            <a:schemeClr val="accent1">
+              <a:shade val="15000"/>
+            </a:schemeClr>
+          </a:lnRef>
+          <a:fillRef idx="1">
+            <a:schemeClr val="accent1"/>
+          </a:fillRef>
+          <a:effectRef idx="0">
+            <a:schemeClr val="accent1"/>
+          </a:effectRef>
+          <a:fontRef idx="minor">
+            <a:schemeClr val="lt1"/>
+          </a:fontRef>
+        </p:style>
+        <p:txBody>
+          <a:bodyPr rtlCol="0" anchor="t"/>
+          <a:lstStyle/>
+          <a:p>
+            <a:pPr algn="ctr"/>
+            <a:r>
+              <a:rPr lang="en-US" dirty="0"/>
+              <a:t>AI Agent</a:t>
+            </a:r>
+          </a:p>
+        </p:txBody>
+      </p:sp>
+      <p:sp>
+        <p:nvSpPr>
+          <p:cNvPr id="3" name="Oval 2">
+            <a:extLst>
+              <a:ext uri="{FF2B5EF4-FFF2-40B4-BE49-F238E27FC236}">
+                <a16:creationId xmlns:a16="http://schemas.microsoft.com/office/drawing/2014/main" id="{18C7C3BF-7B99-7282-7262-4AC206BD3DAC}"/>
+              </a:ext>
+            </a:extLst>
+          </p:cNvPr>
+          <p:cNvSpPr/>
+          <p:nvPr/>
+        </p:nvSpPr>
+        <p:spPr>
+          <a:xfrm>
+            <a:off x="3065781" y="4872552"/>
+            <a:ext cx="966724" cy="732120"/>
+          </a:xfrm>
+          <a:prstGeom prst="ellipse">
+            <a:avLst/>
+          </a:prstGeom>
+          <a:solidFill>
+            <a:schemeClr val="accent2">
+              <a:lumMod val="75000"/>
+            </a:schemeClr>
+          </a:solidFill>
+        </p:spPr>
+        <p:style>
+          <a:lnRef idx="2">
+            <a:schemeClr val="accent1">
+              <a:shade val="15000"/>
+            </a:schemeClr>
+          </a:lnRef>
+          <a:fillRef idx="1">
+            <a:schemeClr val="accent1"/>
+          </a:fillRef>
+          <a:effectRef idx="0">
+            <a:schemeClr val="accent1"/>
+          </a:effectRef>
+          <a:fontRef idx="minor">
+            <a:schemeClr val="lt1"/>
+          </a:fontRef>
+        </p:style>
+        <p:txBody>
+          <a:bodyPr rtlCol="0" anchor="ctr"/>
+          <a:lstStyle/>
+          <a:p>
+            <a:pPr algn="ctr"/>
+            <a:r>
+              <a:rPr lang="en-US" dirty="0"/>
+              <a:t>LLM</a:t>
+            </a:r>
+          </a:p>
+        </p:txBody>
+      </p:sp>
+      <p:sp>
+        <p:nvSpPr>
+          <p:cNvPr id="15" name="Oval 14">
+            <a:extLst>
+              <a:ext uri="{FF2B5EF4-FFF2-40B4-BE49-F238E27FC236}">
+                <a16:creationId xmlns:a16="http://schemas.microsoft.com/office/drawing/2014/main" id="{7EFE5BEB-850F-7F50-6FE1-0696184AF3CE}"/>
+              </a:ext>
+            </a:extLst>
+          </p:cNvPr>
+          <p:cNvSpPr/>
+          <p:nvPr/>
+        </p:nvSpPr>
+        <p:spPr>
+          <a:xfrm>
+            <a:off x="5954522" y="4695326"/>
+            <a:ext cx="2051812" cy="1216452"/>
+          </a:xfrm>
+          <a:prstGeom prst="ellipse">
+            <a:avLst/>
+          </a:prstGeom>
+          <a:solidFill>
+            <a:schemeClr val="accent2">
+              <a:lumMod val="75000"/>
+            </a:schemeClr>
+          </a:solidFill>
+        </p:spPr>
+        <p:style>
+          <a:lnRef idx="2">
+            <a:schemeClr val="accent1">
+              <a:shade val="15000"/>
+            </a:schemeClr>
+          </a:lnRef>
+          <a:fillRef idx="1">
+            <a:schemeClr val="accent1"/>
+          </a:fillRef>
+          <a:effectRef idx="0">
+            <a:schemeClr val="accent1"/>
+          </a:effectRef>
+          <a:fontRef idx="minor">
+            <a:schemeClr val="lt1"/>
+          </a:fontRef>
+        </p:style>
+        <p:txBody>
+          <a:bodyPr rtlCol="0" anchor="ctr"/>
+          <a:lstStyle/>
+          <a:p>
+            <a:pPr algn="ctr"/>
+            <a:r>
+              <a:rPr lang="en-US" dirty="0"/>
+              <a:t>Tools:</a:t>
+            </a:r>
+          </a:p>
+          <a:p>
+            <a:pPr algn="ctr"/>
+            <a:r>
+              <a:rPr lang="en-US" dirty="0"/>
+              <a:t>Web-search,</a:t>
+            </a:r>
+          </a:p>
+          <a:p>
+            <a:pPr algn="ctr"/>
+            <a:r>
+              <a:rPr lang="en-US" dirty="0"/>
+              <a:t>Calculator, etc.</a:t>
+            </a:r>
+          </a:p>
+        </p:txBody>
+      </p:sp>
+      <p:sp>
+        <p:nvSpPr>
+          <p:cNvPr id="17" name="Oval 16">
+            <a:extLst>
+              <a:ext uri="{FF2B5EF4-FFF2-40B4-BE49-F238E27FC236}">
+                <a16:creationId xmlns:a16="http://schemas.microsoft.com/office/drawing/2014/main" id="{CFF36849-3913-0948-3394-AC539C130CB3}"/>
+              </a:ext>
+            </a:extLst>
+          </p:cNvPr>
+          <p:cNvSpPr/>
+          <p:nvPr/>
+        </p:nvSpPr>
+        <p:spPr>
+          <a:xfrm>
+            <a:off x="4230878" y="4908227"/>
+            <a:ext cx="1527810" cy="732120"/>
+          </a:xfrm>
+          <a:prstGeom prst="ellipse">
+            <a:avLst/>
+          </a:prstGeom>
+          <a:solidFill>
+            <a:schemeClr val="accent2">
+              <a:lumMod val="75000"/>
+            </a:schemeClr>
+          </a:solidFill>
+        </p:spPr>
+        <p:style>
+          <a:lnRef idx="2">
+            <a:schemeClr val="accent1">
+              <a:shade val="15000"/>
+            </a:schemeClr>
+          </a:lnRef>
+          <a:fillRef idx="1">
+            <a:schemeClr val="accent1"/>
+          </a:fillRef>
+          <a:effectRef idx="0">
+            <a:schemeClr val="accent1"/>
+          </a:effectRef>
+          <a:fontRef idx="minor">
+            <a:schemeClr val="lt1"/>
+          </a:fontRef>
+        </p:style>
+        <p:txBody>
+          <a:bodyPr rtlCol="0" anchor="ctr"/>
+          <a:lstStyle/>
+          <a:p>
+            <a:pPr algn="ctr"/>
+            <a:r>
+              <a:rPr lang="en-US" dirty="0"/>
+              <a:t>Memory</a:t>
+            </a:r>
+          </a:p>
+        </p:txBody>
+      </p:sp>
+      <p:sp>
+        <p:nvSpPr>
+          <p:cNvPr id="5" name="TextBox 4">
+            <a:extLst>
+              <a:ext uri="{FF2B5EF4-FFF2-40B4-BE49-F238E27FC236}">
+                <a16:creationId xmlns:a16="http://schemas.microsoft.com/office/drawing/2014/main" id="{7F95ED62-B95B-D484-EFD2-FEA9704B8D3C}"/>
+              </a:ext>
+            </a:extLst>
+          </p:cNvPr>
+          <p:cNvSpPr txBox="1"/>
+          <p:nvPr/>
+        </p:nvSpPr>
+        <p:spPr>
+          <a:xfrm>
+            <a:off x="77724" y="2899248"/>
+            <a:ext cx="8563356" cy="461665"/>
+          </a:xfrm>
+          <a:prstGeom prst="rect">
+            <a:avLst/>
+          </a:prstGeom>
+          <a:noFill/>
+        </p:spPr>
+        <p:txBody>
+          <a:bodyPr wrap="square">
+            <a:spAutoFit/>
+          </a:bodyPr>
+          <a:lstStyle/>
+          <a:p>
+            <a:pPr>
+              <a:buNone/>
+            </a:pPr>
+            <a:r>
+              <a:rPr lang="en-US" sz="2400" dirty="0">
+                <a:solidFill>
+                  <a:schemeClr val="accent6">
+                    <a:lumMod val="60000"/>
+                    <a:lumOff val="40000"/>
+                  </a:schemeClr>
+                </a:solidFill>
+              </a:rPr>
+              <a:t>Architecture of a single AI agent (3 main components)</a:t>
+            </a:r>
+          </a:p>
+        </p:txBody>
+      </p:sp>
+    </p:spTree>
+    <p:extLst>
+      <p:ext uri="{BB962C8B-B14F-4D97-AF65-F5344CB8AC3E}">
+        <p14:creationId xmlns:p14="http://schemas.microsoft.com/office/powerpoint/2010/main" val="3632060079"/>
+      </p:ext>
+    </p:extLst>
+  </p:cSld>
+  <p:clrMapOvr>
+    <a:masterClrMapping/>
+  </p:clrMapOvr>
+</p:sld>
+</file>
+
+<file path=ppt/slides/slide6.xml><?xml version="1.0" encoding="utf-8"?>
 <p:sld xmlns:a="http://schemas.openxmlformats.org/drawingml/2006/main" xmlns:r="http://schemas.openxmlformats.org/officeDocument/2006/relationships" xmlns:p="http://schemas.openxmlformats.org/presentationml/2006/main">
   <p:cSld>
     <p:spTree>
@@ -5402,7 +6948,7 @@
 </p:sld>
 </file>
 
-<file path=ppt/slides/slide6.xml><?xml version="1.0" encoding="utf-8"?>
+<file path=ppt/slides/slide7.xml><?xml version="1.0" encoding="utf-8"?>
 <p:sld xmlns:a="http://schemas.openxmlformats.org/drawingml/2006/main" xmlns:r="http://schemas.openxmlformats.org/officeDocument/2006/relationships" xmlns:p="http://schemas.openxmlformats.org/presentationml/2006/main">
   <p:cSld>
     <p:spTree>
@@ -5439,8 +6985,8 @@
         </p:nvSpPr>
         <p:spPr>
           <a:xfrm>
-            <a:off x="210312" y="1625382"/>
-            <a:ext cx="11018520" cy="3539430"/>
+            <a:off x="60960" y="70902"/>
+            <a:ext cx="11018520" cy="523220"/>
           </a:xfrm>
           <a:prstGeom prst="rect">
             <a:avLst/>
@@ -5462,22 +7008,371 @@
                   </a:schemeClr>
                 </a:solidFill>
               </a:rPr>
-              <a:t>Discussion Prompt for Class</a:t>
-            </a:r>
-          </a:p>
-          <a:p>
-            <a:endParaRPr lang="en-US" sz="2800" b="1" dirty="0">
-              <a:solidFill>
-                <a:schemeClr val="accent6">
-                  <a:lumMod val="60000"/>
-                  <a:lumOff val="40000"/>
-                </a:schemeClr>
-              </a:solidFill>
-            </a:endParaRPr>
-          </a:p>
-          <a:p>
-            <a:r>
-              <a:rPr lang="en-US" sz="2800" i="1" dirty="0">
+              <a:t>Another example of AI Agent</a:t>
+            </a:r>
+          </a:p>
+        </p:txBody>
+      </p:sp>
+      <p:sp>
+        <p:nvSpPr>
+          <p:cNvPr id="4" name="TextBox 3">
+            <a:extLst>
+              <a:ext uri="{FF2B5EF4-FFF2-40B4-BE49-F238E27FC236}">
+                <a16:creationId xmlns:a16="http://schemas.microsoft.com/office/drawing/2014/main" id="{1D0BEF3D-A032-1FC8-37F4-CAC3624939E8}"/>
+              </a:ext>
+            </a:extLst>
+          </p:cNvPr>
+          <p:cNvSpPr txBox="1"/>
+          <p:nvPr/>
+        </p:nvSpPr>
+        <p:spPr>
+          <a:xfrm>
+            <a:off x="158496" y="1969806"/>
+            <a:ext cx="3215640" cy="1200329"/>
+          </a:xfrm>
+          <a:prstGeom prst="rect">
+            <a:avLst/>
+          </a:prstGeom>
+          <a:noFill/>
+        </p:spPr>
+        <p:txBody>
+          <a:bodyPr wrap="square">
+            <a:spAutoFit/>
+          </a:bodyPr>
+          <a:lstStyle/>
+          <a:p>
+            <a:r>
+              <a:rPr lang="en-US" sz="2400" dirty="0">
+                <a:solidFill>
+                  <a:schemeClr val="accent4">
+                    <a:lumMod val="60000"/>
+                    <a:lumOff val="40000"/>
+                  </a:schemeClr>
+                </a:solidFill>
+              </a:rPr>
+              <a:t>Book me cheapest Delta Airlines flight from New York To Moscow</a:t>
+            </a:r>
+          </a:p>
+        </p:txBody>
+      </p:sp>
+      <p:sp>
+        <p:nvSpPr>
+          <p:cNvPr id="6" name="Rectangle: Rounded Corners 5">
+            <a:extLst>
+              <a:ext uri="{FF2B5EF4-FFF2-40B4-BE49-F238E27FC236}">
+                <a16:creationId xmlns:a16="http://schemas.microsoft.com/office/drawing/2014/main" id="{7A841CA2-65D8-F887-C909-61A07DD21C58}"/>
+              </a:ext>
+            </a:extLst>
+          </p:cNvPr>
+          <p:cNvSpPr/>
+          <p:nvPr/>
+        </p:nvSpPr>
+        <p:spPr>
+          <a:xfrm>
+            <a:off x="3943350" y="1978561"/>
+            <a:ext cx="3150108" cy="1353312"/>
+          </a:xfrm>
+          <a:prstGeom prst="roundRect">
+            <a:avLst/>
+          </a:prstGeom>
+        </p:spPr>
+        <p:style>
+          <a:lnRef idx="2">
+            <a:schemeClr val="accent1">
+              <a:shade val="15000"/>
+            </a:schemeClr>
+          </a:lnRef>
+          <a:fillRef idx="1">
+            <a:schemeClr val="accent1"/>
+          </a:fillRef>
+          <a:effectRef idx="0">
+            <a:schemeClr val="accent1"/>
+          </a:effectRef>
+          <a:fontRef idx="minor">
+            <a:schemeClr val="lt1"/>
+          </a:fontRef>
+        </p:style>
+        <p:txBody>
+          <a:bodyPr rtlCol="0" anchor="ctr"/>
+          <a:lstStyle/>
+          <a:p>
+            <a:pPr algn="ctr"/>
+            <a:r>
+              <a:rPr lang="en-US" sz="2400" dirty="0"/>
+              <a:t>Agents</a:t>
+            </a:r>
+          </a:p>
+          <a:p>
+            <a:pPr algn="ctr"/>
+            <a:r>
+              <a:rPr lang="en-US" sz="2400" dirty="0"/>
+              <a:t>LLM + Tools + Memory </a:t>
+            </a:r>
+          </a:p>
+        </p:txBody>
+      </p:sp>
+      <p:sp>
+        <p:nvSpPr>
+          <p:cNvPr id="8" name="TextBox 7">
+            <a:extLst>
+              <a:ext uri="{FF2B5EF4-FFF2-40B4-BE49-F238E27FC236}">
+                <a16:creationId xmlns:a16="http://schemas.microsoft.com/office/drawing/2014/main" id="{C0B6DCB7-6105-1CC4-C052-399CCD35688A}"/>
+              </a:ext>
+            </a:extLst>
+          </p:cNvPr>
+          <p:cNvSpPr txBox="1"/>
+          <p:nvPr/>
+        </p:nvSpPr>
+        <p:spPr>
+          <a:xfrm>
+            <a:off x="4093464" y="3456874"/>
+            <a:ext cx="4005072" cy="1569660"/>
+          </a:xfrm>
+          <a:prstGeom prst="rect">
+            <a:avLst/>
+          </a:prstGeom>
+          <a:noFill/>
+        </p:spPr>
+        <p:txBody>
+          <a:bodyPr wrap="square">
+            <a:spAutoFit/>
+          </a:bodyPr>
+          <a:lstStyle/>
+          <a:p>
+            <a:pPr marL="514350" indent="-514350">
+              <a:buAutoNum type="arabicPeriod"/>
+            </a:pPr>
+            <a:r>
+              <a:rPr lang="en-US" sz="2400" dirty="0">
+                <a:solidFill>
+                  <a:schemeClr val="accent4">
+                    <a:lumMod val="60000"/>
+                    <a:lumOff val="40000"/>
+                  </a:schemeClr>
+                </a:solidFill>
+              </a:rPr>
+              <a:t>Search Flights</a:t>
+            </a:r>
+          </a:p>
+          <a:p>
+            <a:pPr marL="514350" indent="-514350">
+              <a:buAutoNum type="arabicPeriod"/>
+            </a:pPr>
+            <a:r>
+              <a:rPr lang="en-US" sz="2400" dirty="0">
+                <a:solidFill>
+                  <a:schemeClr val="accent4">
+                    <a:lumMod val="60000"/>
+                    <a:lumOff val="40000"/>
+                  </a:schemeClr>
+                </a:solidFill>
+              </a:rPr>
+              <a:t>Find the cheapest flight</a:t>
+            </a:r>
+          </a:p>
+          <a:p>
+            <a:pPr marL="514350" indent="-514350">
+              <a:buAutoNum type="arabicPeriod"/>
+            </a:pPr>
+            <a:r>
+              <a:rPr lang="en-US" sz="2400" dirty="0">
+                <a:solidFill>
+                  <a:schemeClr val="accent4">
+                    <a:lumMod val="60000"/>
+                    <a:lumOff val="40000"/>
+                  </a:schemeClr>
+                </a:solidFill>
+              </a:rPr>
+              <a:t>Book the ticket</a:t>
+            </a:r>
+          </a:p>
+          <a:p>
+            <a:pPr marL="514350" indent="-514350">
+              <a:buAutoNum type="arabicPeriod"/>
+            </a:pPr>
+            <a:r>
+              <a:rPr lang="en-US" sz="2400" dirty="0">
+                <a:solidFill>
+                  <a:schemeClr val="accent4">
+                    <a:lumMod val="60000"/>
+                    <a:lumOff val="40000"/>
+                  </a:schemeClr>
+                </a:solidFill>
+              </a:rPr>
+              <a:t>Sends you an E-mail</a:t>
+            </a:r>
+          </a:p>
+        </p:txBody>
+      </p:sp>
+      <p:sp>
+        <p:nvSpPr>
+          <p:cNvPr id="9" name="Arrow: Right 8">
+            <a:extLst>
+              <a:ext uri="{FF2B5EF4-FFF2-40B4-BE49-F238E27FC236}">
+                <a16:creationId xmlns:a16="http://schemas.microsoft.com/office/drawing/2014/main" id="{28E75FF5-DC82-EE72-76D4-47B9AD25539F}"/>
+              </a:ext>
+            </a:extLst>
+          </p:cNvPr>
+          <p:cNvSpPr/>
+          <p:nvPr/>
+        </p:nvSpPr>
+        <p:spPr>
+          <a:xfrm>
+            <a:off x="3424428" y="2436148"/>
+            <a:ext cx="411480" cy="420624"/>
+          </a:xfrm>
+          <a:prstGeom prst="rightArrow">
+            <a:avLst/>
+          </a:prstGeom>
+        </p:spPr>
+        <p:style>
+          <a:lnRef idx="2">
+            <a:schemeClr val="accent1">
+              <a:shade val="15000"/>
+            </a:schemeClr>
+          </a:lnRef>
+          <a:fillRef idx="1">
+            <a:schemeClr val="accent1"/>
+          </a:fillRef>
+          <a:effectRef idx="0">
+            <a:schemeClr val="accent1"/>
+          </a:effectRef>
+          <a:fontRef idx="minor">
+            <a:schemeClr val="lt1"/>
+          </a:fontRef>
+        </p:style>
+        <p:txBody>
+          <a:bodyPr rtlCol="0" anchor="ctr"/>
+          <a:lstStyle/>
+          <a:p>
+            <a:pPr algn="ctr"/>
+            <a:endParaRPr lang="en-IN"/>
+          </a:p>
+        </p:txBody>
+      </p:sp>
+      <p:sp>
+        <p:nvSpPr>
+          <p:cNvPr id="11" name="Rectangle: Rounded Corners 10">
+            <a:extLst>
+              <a:ext uri="{FF2B5EF4-FFF2-40B4-BE49-F238E27FC236}">
+                <a16:creationId xmlns:a16="http://schemas.microsoft.com/office/drawing/2014/main" id="{A029E2EF-E72F-9436-68E9-AF6A86EF9ADD}"/>
+              </a:ext>
+            </a:extLst>
+          </p:cNvPr>
+          <p:cNvSpPr/>
+          <p:nvPr/>
+        </p:nvSpPr>
+        <p:spPr>
+          <a:xfrm>
+            <a:off x="3983736" y="700951"/>
+            <a:ext cx="2679192" cy="523220"/>
+          </a:xfrm>
+          <a:prstGeom prst="roundRect">
+            <a:avLst/>
+          </a:prstGeom>
+        </p:spPr>
+        <p:style>
+          <a:lnRef idx="1">
+            <a:schemeClr val="accent2"/>
+          </a:lnRef>
+          <a:fillRef idx="2">
+            <a:schemeClr val="accent2"/>
+          </a:fillRef>
+          <a:effectRef idx="1">
+            <a:schemeClr val="accent2"/>
+          </a:effectRef>
+          <a:fontRef idx="minor">
+            <a:schemeClr val="dk1"/>
+          </a:fontRef>
+        </p:style>
+        <p:txBody>
+          <a:bodyPr rtlCol="0" anchor="ctr"/>
+          <a:lstStyle/>
+          <a:p>
+            <a:pPr algn="ctr"/>
+            <a:r>
+              <a:rPr lang="en-US" dirty="0"/>
+              <a:t>Expedia</a:t>
+            </a:r>
+          </a:p>
+        </p:txBody>
+      </p:sp>
+      <p:sp>
+        <p:nvSpPr>
+          <p:cNvPr id="12" name="Arrow: Up-Down 11">
+            <a:extLst>
+              <a:ext uri="{FF2B5EF4-FFF2-40B4-BE49-F238E27FC236}">
+                <a16:creationId xmlns:a16="http://schemas.microsoft.com/office/drawing/2014/main" id="{0AA73220-4825-48F3-257A-83AE1CDCB7FA}"/>
+              </a:ext>
+            </a:extLst>
+          </p:cNvPr>
+          <p:cNvSpPr/>
+          <p:nvPr/>
+        </p:nvSpPr>
+        <p:spPr>
+          <a:xfrm>
+            <a:off x="5143500" y="1339756"/>
+            <a:ext cx="374904" cy="523220"/>
+          </a:xfrm>
+          <a:prstGeom prst="upDownArrow">
+            <a:avLst/>
+          </a:prstGeom>
+        </p:spPr>
+        <p:style>
+          <a:lnRef idx="2">
+            <a:schemeClr val="accent1">
+              <a:shade val="15000"/>
+            </a:schemeClr>
+          </a:lnRef>
+          <a:fillRef idx="1">
+            <a:schemeClr val="accent1"/>
+          </a:fillRef>
+          <a:effectRef idx="0">
+            <a:schemeClr val="accent1"/>
+          </a:effectRef>
+          <a:fontRef idx="minor">
+            <a:schemeClr val="lt1"/>
+          </a:fontRef>
+        </p:style>
+        <p:txBody>
+          <a:bodyPr rtlCol="0" anchor="ctr"/>
+          <a:lstStyle/>
+          <a:p>
+            <a:pPr algn="ctr"/>
+            <a:endParaRPr lang="en-IN"/>
+          </a:p>
+        </p:txBody>
+      </p:sp>
+      <p:sp>
+        <p:nvSpPr>
+          <p:cNvPr id="14" name="TextBox 13">
+            <a:extLst>
+              <a:ext uri="{FF2B5EF4-FFF2-40B4-BE49-F238E27FC236}">
+                <a16:creationId xmlns:a16="http://schemas.microsoft.com/office/drawing/2014/main" id="{89C6C44C-DBA6-2BC2-4227-20CFD19250DC}"/>
+              </a:ext>
+            </a:extLst>
+          </p:cNvPr>
+          <p:cNvSpPr txBox="1"/>
+          <p:nvPr/>
+        </p:nvSpPr>
+        <p:spPr>
+          <a:xfrm>
+            <a:off x="5570220" y="1401311"/>
+            <a:ext cx="1367028" cy="400110"/>
+          </a:xfrm>
+          <a:prstGeom prst="rect">
+            <a:avLst/>
+          </a:prstGeom>
+          <a:noFill/>
+        </p:spPr>
+        <p:txBody>
+          <a:bodyPr wrap="square">
+            <a:spAutoFit/>
+          </a:bodyPr>
+          <a:lstStyle/>
+          <a:p>
+            <a:r>
+              <a:rPr lang="en-US" sz="2000" dirty="0">
                 <a:solidFill>
                   <a:schemeClr val="accent6">
                     <a:lumMod val="60000"/>
@@ -5485,62 +7380,96 @@
                   </a:schemeClr>
                 </a:solidFill>
               </a:rPr>
-              <a:t>"A bank deploys an autonomous agent that can access accounts, move money, and close disputes — all without a human approving each action. </a:t>
-            </a:r>
-          </a:p>
-          <a:p>
-            <a:endParaRPr lang="en-US" sz="2800" i="1" dirty="0">
-              <a:solidFill>
-                <a:schemeClr val="accent6">
-                  <a:lumMod val="60000"/>
-                  <a:lumOff val="40000"/>
-                </a:schemeClr>
-              </a:solidFill>
-            </a:endParaRPr>
-          </a:p>
-          <a:p>
-            <a:r>
-              <a:rPr lang="en-US" sz="2800" i="1" dirty="0">
-                <a:solidFill>
-                  <a:schemeClr val="accent6">
-                    <a:lumMod val="60000"/>
-                    <a:lumOff val="40000"/>
-                  </a:schemeClr>
-                </a:solidFill>
-              </a:rPr>
-              <a:t>What conditions would need to be true for you to trust that system? </a:t>
-            </a:r>
-          </a:p>
-          <a:p>
-            <a:endParaRPr lang="en-US" sz="2800" i="1" dirty="0">
-              <a:solidFill>
-                <a:schemeClr val="accent6">
-                  <a:lumMod val="60000"/>
-                  <a:lumOff val="40000"/>
-                </a:schemeClr>
-              </a:solidFill>
-            </a:endParaRPr>
-          </a:p>
-          <a:p>
-            <a:r>
-              <a:rPr lang="en-US" sz="2800" i="1" dirty="0">
-                <a:solidFill>
-                  <a:schemeClr val="accent6">
-                    <a:lumMod val="60000"/>
-                    <a:lumOff val="40000"/>
-                  </a:schemeClr>
-                </a:solidFill>
-              </a:rPr>
-              <a:t>What would make you distrust it?"</a:t>
-            </a:r>
-            <a:endParaRPr lang="en-US" sz="2800" dirty="0">
-              <a:solidFill>
-                <a:schemeClr val="accent6">
-                  <a:lumMod val="60000"/>
-                  <a:lumOff val="40000"/>
-                </a:schemeClr>
-              </a:solidFill>
-            </a:endParaRPr>
+              <a:t>API calls</a:t>
+            </a:r>
+          </a:p>
+        </p:txBody>
+      </p:sp>
+      <p:sp>
+        <p:nvSpPr>
+          <p:cNvPr id="16" name="TextBox 15">
+            <a:extLst>
+              <a:ext uri="{FF2B5EF4-FFF2-40B4-BE49-F238E27FC236}">
+                <a16:creationId xmlns:a16="http://schemas.microsoft.com/office/drawing/2014/main" id="{BCADAE39-15B5-7D97-B616-159540850F20}"/>
+              </a:ext>
+            </a:extLst>
+          </p:cNvPr>
+          <p:cNvSpPr txBox="1"/>
+          <p:nvPr/>
+        </p:nvSpPr>
+        <p:spPr>
+          <a:xfrm>
+            <a:off x="7936992" y="2046296"/>
+            <a:ext cx="3215640" cy="1200329"/>
+          </a:xfrm>
+          <a:prstGeom prst="rect">
+            <a:avLst/>
+          </a:prstGeom>
+          <a:noFill/>
+        </p:spPr>
+        <p:txBody>
+          <a:bodyPr wrap="square">
+            <a:spAutoFit/>
+          </a:bodyPr>
+          <a:lstStyle/>
+          <a:p>
+            <a:r>
+              <a:rPr lang="en-US" sz="2400" dirty="0">
+                <a:solidFill>
+                  <a:schemeClr val="accent4">
+                    <a:lumMod val="60000"/>
+                    <a:lumOff val="40000"/>
+                  </a:schemeClr>
+                </a:solidFill>
+              </a:rPr>
+              <a:t>Books cheapest Delta Airlines flight from New York To Moscow</a:t>
+            </a:r>
+          </a:p>
+        </p:txBody>
+      </p:sp>
+      <p:sp>
+        <p:nvSpPr>
+          <p:cNvPr id="18" name="Arrow: Right 17">
+            <a:extLst>
+              <a:ext uri="{FF2B5EF4-FFF2-40B4-BE49-F238E27FC236}">
+                <a16:creationId xmlns:a16="http://schemas.microsoft.com/office/drawing/2014/main" id="{C76CD573-3A13-26A5-0C53-612C854DC45B}"/>
+              </a:ext>
+            </a:extLst>
+          </p:cNvPr>
+          <p:cNvSpPr/>
+          <p:nvPr/>
+        </p:nvSpPr>
+        <p:spPr>
+          <a:xfrm>
+            <a:off x="7200900" y="2377440"/>
+            <a:ext cx="411480" cy="420624"/>
+          </a:xfrm>
+          <a:prstGeom prst="rightArrow">
+            <a:avLst/>
+          </a:prstGeom>
+        </p:spPr>
+        <p:style>
+          <a:lnRef idx="2">
+            <a:schemeClr val="accent1">
+              <a:shade val="15000"/>
+            </a:schemeClr>
+          </a:lnRef>
+          <a:fillRef idx="1">
+            <a:schemeClr val="accent1"/>
+          </a:fillRef>
+          <a:effectRef idx="0">
+            <a:schemeClr val="accent1"/>
+          </a:effectRef>
+          <a:fontRef idx="minor">
+            <a:schemeClr val="lt1"/>
+          </a:fontRef>
+        </p:style>
+        <p:txBody>
+          <a:bodyPr rtlCol="0" anchor="ctr"/>
+          <a:lstStyle/>
+          <a:p>
+            <a:pPr algn="ctr"/>
+            <a:endParaRPr lang="en-IN"/>
           </a:p>
         </p:txBody>
       </p:sp>
@@ -5557,7 +7486,7 @@
 </p:sld>
 </file>
 
-<file path=ppt/slides/slide7.xml><?xml version="1.0" encoding="utf-8"?>
+<file path=ppt/slides/slide8.xml><?xml version="1.0" encoding="utf-8"?>
 <p:sld xmlns:a="http://schemas.openxmlformats.org/drawingml/2006/main" xmlns:r="http://schemas.openxmlformats.org/officeDocument/2006/relationships" xmlns:p="http://schemas.openxmlformats.org/presentationml/2006/main">
   <p:cSld>
     <p:spTree>
@@ -5565,7 +7494,7 @@
         <p:cNvPr id="1" name="">
           <a:extLst>
             <a:ext uri="{FF2B5EF4-FFF2-40B4-BE49-F238E27FC236}">
-              <a16:creationId xmlns:a16="http://schemas.microsoft.com/office/drawing/2014/main" id="{DD931D7F-4279-DA2E-FA64-6CF3C441D414}"/>
+              <a16:creationId xmlns:a16="http://schemas.microsoft.com/office/drawing/2014/main" id="{721621D8-ABCC-578A-44BA-3942A46FE832}"/>
             </a:ext>
           </a:extLst>
         </p:cNvPr>
@@ -5580,10 +7509,750 @@
           <a:chExt cx="0" cy="0"/>
         </a:xfrm>
       </p:grpSpPr>
+      <p:sp>
+        <p:nvSpPr>
+          <p:cNvPr id="3" name="TextBox 2">
+            <a:extLst>
+              <a:ext uri="{FF2B5EF4-FFF2-40B4-BE49-F238E27FC236}">
+                <a16:creationId xmlns:a16="http://schemas.microsoft.com/office/drawing/2014/main" id="{B755BF49-7848-E936-7898-C65F418F2156}"/>
+              </a:ext>
+            </a:extLst>
+          </p:cNvPr>
+          <p:cNvSpPr txBox="1"/>
+          <p:nvPr/>
+        </p:nvSpPr>
+        <p:spPr>
+          <a:xfrm>
+            <a:off x="60960" y="70902"/>
+            <a:ext cx="11018520" cy="523220"/>
+          </a:xfrm>
+          <a:prstGeom prst="rect">
+            <a:avLst/>
+          </a:prstGeom>
+          <a:noFill/>
+        </p:spPr>
+        <p:txBody>
+          <a:bodyPr wrap="square">
+            <a:spAutoFit/>
+          </a:bodyPr>
+          <a:lstStyle/>
+          <a:p>
+            <a:r>
+              <a:rPr lang="en-US" sz="2800" b="1" dirty="0">
+                <a:solidFill>
+                  <a:schemeClr val="accent6">
+                    <a:lumMod val="60000"/>
+                    <a:lumOff val="40000"/>
+                  </a:schemeClr>
+                </a:solidFill>
+              </a:rPr>
+              <a:t>AI Agent</a:t>
+            </a:r>
+          </a:p>
+        </p:txBody>
+      </p:sp>
+      <p:sp>
+        <p:nvSpPr>
+          <p:cNvPr id="6" name="Rectangle: Rounded Corners 5">
+            <a:extLst>
+              <a:ext uri="{FF2B5EF4-FFF2-40B4-BE49-F238E27FC236}">
+                <a16:creationId xmlns:a16="http://schemas.microsoft.com/office/drawing/2014/main" id="{690977C8-4F10-B478-CBCB-A5E71A027ADF}"/>
+              </a:ext>
+            </a:extLst>
+          </p:cNvPr>
+          <p:cNvSpPr/>
+          <p:nvPr/>
+        </p:nvSpPr>
+        <p:spPr>
+          <a:xfrm>
+            <a:off x="3943350" y="1978561"/>
+            <a:ext cx="3150108" cy="1353312"/>
+          </a:xfrm>
+          <a:prstGeom prst="roundRect">
+            <a:avLst/>
+          </a:prstGeom>
+        </p:spPr>
+        <p:style>
+          <a:lnRef idx="2">
+            <a:schemeClr val="accent1">
+              <a:shade val="15000"/>
+            </a:schemeClr>
+          </a:lnRef>
+          <a:fillRef idx="1">
+            <a:schemeClr val="accent1"/>
+          </a:fillRef>
+          <a:effectRef idx="0">
+            <a:schemeClr val="accent1"/>
+          </a:effectRef>
+          <a:fontRef idx="minor">
+            <a:schemeClr val="lt1"/>
+          </a:fontRef>
+        </p:style>
+        <p:txBody>
+          <a:bodyPr rtlCol="0" anchor="ctr"/>
+          <a:lstStyle/>
+          <a:p>
+            <a:pPr algn="ctr"/>
+            <a:r>
+              <a:rPr lang="en-US" sz="2400" dirty="0"/>
+              <a:t>Agents</a:t>
+            </a:r>
+          </a:p>
+          <a:p>
+            <a:pPr algn="ctr"/>
+            <a:r>
+              <a:rPr lang="en-US" sz="2400" dirty="0"/>
+              <a:t>LLM + Tools + Memory </a:t>
+            </a:r>
+          </a:p>
+        </p:txBody>
+      </p:sp>
+      <p:sp>
+        <p:nvSpPr>
+          <p:cNvPr id="9" name="Arrow: Right 8">
+            <a:extLst>
+              <a:ext uri="{FF2B5EF4-FFF2-40B4-BE49-F238E27FC236}">
+                <a16:creationId xmlns:a16="http://schemas.microsoft.com/office/drawing/2014/main" id="{DD55B4F0-C9E9-E5A6-4B07-5AEBA8D5401A}"/>
+              </a:ext>
+            </a:extLst>
+          </p:cNvPr>
+          <p:cNvSpPr/>
+          <p:nvPr/>
+        </p:nvSpPr>
+        <p:spPr>
+          <a:xfrm>
+            <a:off x="3424428" y="2436148"/>
+            <a:ext cx="411480" cy="420624"/>
+          </a:xfrm>
+          <a:prstGeom prst="rightArrow">
+            <a:avLst/>
+          </a:prstGeom>
+        </p:spPr>
+        <p:style>
+          <a:lnRef idx="2">
+            <a:schemeClr val="accent1">
+              <a:shade val="15000"/>
+            </a:schemeClr>
+          </a:lnRef>
+          <a:fillRef idx="1">
+            <a:schemeClr val="accent1"/>
+          </a:fillRef>
+          <a:effectRef idx="0">
+            <a:schemeClr val="accent1"/>
+          </a:effectRef>
+          <a:fontRef idx="minor">
+            <a:schemeClr val="lt1"/>
+          </a:fontRef>
+        </p:style>
+        <p:txBody>
+          <a:bodyPr rtlCol="0" anchor="ctr"/>
+          <a:lstStyle/>
+          <a:p>
+            <a:pPr algn="ctr"/>
+            <a:endParaRPr lang="en-IN"/>
+          </a:p>
+        </p:txBody>
+      </p:sp>
+      <p:sp>
+        <p:nvSpPr>
+          <p:cNvPr id="16" name="TextBox 15">
+            <a:extLst>
+              <a:ext uri="{FF2B5EF4-FFF2-40B4-BE49-F238E27FC236}">
+                <a16:creationId xmlns:a16="http://schemas.microsoft.com/office/drawing/2014/main" id="{11ED82B7-CB98-9FE1-5C10-85B6265778A1}"/>
+              </a:ext>
+            </a:extLst>
+          </p:cNvPr>
+          <p:cNvSpPr txBox="1"/>
+          <p:nvPr/>
+        </p:nvSpPr>
+        <p:spPr>
+          <a:xfrm>
+            <a:off x="7936992" y="2046296"/>
+            <a:ext cx="3215640" cy="1200329"/>
+          </a:xfrm>
+          <a:prstGeom prst="rect">
+            <a:avLst/>
+          </a:prstGeom>
+          <a:noFill/>
+        </p:spPr>
+        <p:txBody>
+          <a:bodyPr wrap="square">
+            <a:spAutoFit/>
+          </a:bodyPr>
+          <a:lstStyle/>
+          <a:p>
+            <a:r>
+              <a:rPr lang="en-US" sz="2400" dirty="0">
+                <a:solidFill>
+                  <a:schemeClr val="accent4">
+                    <a:lumMod val="60000"/>
+                    <a:lumOff val="40000"/>
+                  </a:schemeClr>
+                </a:solidFill>
+              </a:rPr>
+              <a:t>Books cheapest Delta Airlines flight from New York To Moscow</a:t>
+            </a:r>
+          </a:p>
+        </p:txBody>
+      </p:sp>
+      <p:sp>
+        <p:nvSpPr>
+          <p:cNvPr id="18" name="Arrow: Right 17">
+            <a:extLst>
+              <a:ext uri="{FF2B5EF4-FFF2-40B4-BE49-F238E27FC236}">
+                <a16:creationId xmlns:a16="http://schemas.microsoft.com/office/drawing/2014/main" id="{4E92CEA3-D059-F2A3-287B-CA13B496F244}"/>
+              </a:ext>
+            </a:extLst>
+          </p:cNvPr>
+          <p:cNvSpPr/>
+          <p:nvPr/>
+        </p:nvSpPr>
+        <p:spPr>
+          <a:xfrm>
+            <a:off x="7200900" y="2377440"/>
+            <a:ext cx="411480" cy="420624"/>
+          </a:xfrm>
+          <a:prstGeom prst="rightArrow">
+            <a:avLst/>
+          </a:prstGeom>
+        </p:spPr>
+        <p:style>
+          <a:lnRef idx="2">
+            <a:schemeClr val="accent1">
+              <a:shade val="15000"/>
+            </a:schemeClr>
+          </a:lnRef>
+          <a:fillRef idx="1">
+            <a:schemeClr val="accent1"/>
+          </a:fillRef>
+          <a:effectRef idx="0">
+            <a:schemeClr val="accent1"/>
+          </a:effectRef>
+          <a:fontRef idx="minor">
+            <a:schemeClr val="lt1"/>
+          </a:fontRef>
+        </p:style>
+        <p:txBody>
+          <a:bodyPr rtlCol="0" anchor="ctr"/>
+          <a:lstStyle/>
+          <a:p>
+            <a:pPr algn="ctr"/>
+            <a:endParaRPr lang="en-IN"/>
+          </a:p>
+        </p:txBody>
+      </p:sp>
     </p:spTree>
     <p:extLst>
       <p:ext uri="{BB962C8B-B14F-4D97-AF65-F5344CB8AC3E}">
-        <p14:creationId xmlns:p14="http://schemas.microsoft.com/office/powerpoint/2010/main" val="366625378"/>
+        <p14:creationId xmlns:p14="http://schemas.microsoft.com/office/powerpoint/2010/main" val="1202009547"/>
+      </p:ext>
+    </p:extLst>
+  </p:cSld>
+  <p:clrMapOvr>
+    <a:masterClrMapping/>
+  </p:clrMapOvr>
+</p:sld>
+</file>
+
+<file path=ppt/slides/slide9.xml><?xml version="1.0" encoding="utf-8"?>
+<p:sld xmlns:a="http://schemas.openxmlformats.org/drawingml/2006/main" xmlns:r="http://schemas.openxmlformats.org/officeDocument/2006/relationships" xmlns:p="http://schemas.openxmlformats.org/presentationml/2006/main">
+  <p:cSld>
+    <p:spTree>
+      <p:nvGrpSpPr>
+        <p:cNvPr id="1" name="">
+          <a:extLst>
+            <a:ext uri="{FF2B5EF4-FFF2-40B4-BE49-F238E27FC236}">
+              <a16:creationId xmlns:a16="http://schemas.microsoft.com/office/drawing/2014/main" id="{17A55DC5-7B47-CEE0-33C7-92ED936820D3}"/>
+            </a:ext>
+          </a:extLst>
+        </p:cNvPr>
+        <p:cNvGrpSpPr/>
+        <p:nvPr/>
+      </p:nvGrpSpPr>
+      <p:grpSpPr>
+        <a:xfrm>
+          <a:off x="0" y="0"/>
+          <a:ext cx="0" cy="0"/>
+          <a:chOff x="0" y="0"/>
+          <a:chExt cx="0" cy="0"/>
+        </a:xfrm>
+      </p:grpSpPr>
+      <p:sp>
+        <p:nvSpPr>
+          <p:cNvPr id="3" name="TextBox 2">
+            <a:extLst>
+              <a:ext uri="{FF2B5EF4-FFF2-40B4-BE49-F238E27FC236}">
+                <a16:creationId xmlns:a16="http://schemas.microsoft.com/office/drawing/2014/main" id="{D8FBAEF6-BDD8-6A48-289F-B48137D4B61E}"/>
+              </a:ext>
+            </a:extLst>
+          </p:cNvPr>
+          <p:cNvSpPr txBox="1"/>
+          <p:nvPr/>
+        </p:nvSpPr>
+        <p:spPr>
+          <a:xfrm>
+            <a:off x="228600" y="272290"/>
+            <a:ext cx="11430000" cy="1815882"/>
+          </a:xfrm>
+          <a:prstGeom prst="rect">
+            <a:avLst/>
+          </a:prstGeom>
+          <a:noFill/>
+        </p:spPr>
+        <p:txBody>
+          <a:bodyPr wrap="square">
+            <a:spAutoFit/>
+          </a:bodyPr>
+          <a:lstStyle/>
+          <a:p>
+            <a:pPr>
+              <a:buNone/>
+            </a:pPr>
+            <a:r>
+              <a:rPr lang="en-US" sz="2800" dirty="0">
+                <a:solidFill>
+                  <a:schemeClr val="accent6">
+                    <a:lumMod val="60000"/>
+                    <a:lumOff val="40000"/>
+                  </a:schemeClr>
+                </a:solidFill>
+              </a:rPr>
+              <a:t>AI agent can </a:t>
+            </a:r>
+            <a:r>
+              <a:rPr lang="en-US" sz="2800" b="1" i="1" u="sng" dirty="0">
+                <a:solidFill>
+                  <a:schemeClr val="accent6">
+                    <a:lumMod val="60000"/>
+                    <a:lumOff val="40000"/>
+                  </a:schemeClr>
+                </a:solidFill>
+              </a:rPr>
+              <a:t>act</a:t>
+            </a:r>
+            <a:r>
+              <a:rPr lang="en-US" sz="2800" dirty="0">
+                <a:solidFill>
+                  <a:schemeClr val="accent6">
+                    <a:lumMod val="60000"/>
+                    <a:lumOff val="40000"/>
+                  </a:schemeClr>
+                </a:solidFill>
+              </a:rPr>
+              <a:t>. </a:t>
+            </a:r>
+          </a:p>
+          <a:p>
+            <a:pPr>
+              <a:buNone/>
+            </a:pPr>
+            <a:r>
+              <a:rPr lang="en-US" sz="2800" dirty="0">
+                <a:solidFill>
+                  <a:schemeClr val="accent6">
+                    <a:lumMod val="60000"/>
+                    <a:lumOff val="40000"/>
+                  </a:schemeClr>
+                </a:solidFill>
+              </a:rPr>
+              <a:t>It receives a goal, breaks it into steps, uses </a:t>
+            </a:r>
+            <a:r>
+              <a:rPr lang="en-US" sz="2800" b="1" i="1" dirty="0">
+                <a:solidFill>
+                  <a:schemeClr val="accent6">
+                    <a:lumMod val="60000"/>
+                    <a:lumOff val="40000"/>
+                  </a:schemeClr>
+                </a:solidFill>
+              </a:rPr>
+              <a:t>tools</a:t>
+            </a:r>
+            <a:r>
+              <a:rPr lang="en-US" sz="2800" dirty="0">
+                <a:solidFill>
+                  <a:schemeClr val="accent6">
+                    <a:lumMod val="60000"/>
+                    <a:lumOff val="40000"/>
+                  </a:schemeClr>
+                </a:solidFill>
+              </a:rPr>
+              <a:t> (web search, code execution, APIs), checks its own output, and iterates — all without a human driving every step. </a:t>
+            </a:r>
+          </a:p>
+        </p:txBody>
+      </p:sp>
+      <p:sp>
+        <p:nvSpPr>
+          <p:cNvPr id="4" name="Rectangle: Rounded Corners 3">
+            <a:extLst>
+              <a:ext uri="{FF2B5EF4-FFF2-40B4-BE49-F238E27FC236}">
+                <a16:creationId xmlns:a16="http://schemas.microsoft.com/office/drawing/2014/main" id="{3573C5F2-CF75-13AC-9758-9C3197737211}"/>
+              </a:ext>
+            </a:extLst>
+          </p:cNvPr>
+          <p:cNvSpPr/>
+          <p:nvPr/>
+        </p:nvSpPr>
+        <p:spPr>
+          <a:xfrm>
+            <a:off x="2587752" y="3337560"/>
+            <a:ext cx="3150108" cy="1353312"/>
+          </a:xfrm>
+          <a:prstGeom prst="roundRect">
+            <a:avLst/>
+          </a:prstGeom>
+        </p:spPr>
+        <p:style>
+          <a:lnRef idx="2">
+            <a:schemeClr val="accent1">
+              <a:shade val="15000"/>
+            </a:schemeClr>
+          </a:lnRef>
+          <a:fillRef idx="1">
+            <a:schemeClr val="accent1"/>
+          </a:fillRef>
+          <a:effectRef idx="0">
+            <a:schemeClr val="accent1"/>
+          </a:effectRef>
+          <a:fontRef idx="minor">
+            <a:schemeClr val="lt1"/>
+          </a:fontRef>
+        </p:style>
+        <p:txBody>
+          <a:bodyPr rtlCol="0" anchor="ctr"/>
+          <a:lstStyle/>
+          <a:p>
+            <a:pPr algn="ctr"/>
+            <a:r>
+              <a:rPr lang="en-US" sz="2400" dirty="0"/>
+              <a:t>Agents</a:t>
+            </a:r>
+          </a:p>
+          <a:p>
+            <a:pPr algn="ctr"/>
+            <a:r>
+              <a:rPr lang="en-US" sz="2400" dirty="0"/>
+              <a:t>LLM + Tools + Memory </a:t>
+            </a:r>
+          </a:p>
+        </p:txBody>
+      </p:sp>
+      <p:sp>
+        <p:nvSpPr>
+          <p:cNvPr id="6" name="TextBox 5">
+            <a:extLst>
+              <a:ext uri="{FF2B5EF4-FFF2-40B4-BE49-F238E27FC236}">
+                <a16:creationId xmlns:a16="http://schemas.microsoft.com/office/drawing/2014/main" id="{B65B9301-16F9-0E28-0264-033798AFB8D5}"/>
+              </a:ext>
+            </a:extLst>
+          </p:cNvPr>
+          <p:cNvSpPr txBox="1"/>
+          <p:nvPr/>
+        </p:nvSpPr>
+        <p:spPr>
+          <a:xfrm>
+            <a:off x="228600" y="3629160"/>
+            <a:ext cx="1636776" cy="461665"/>
+          </a:xfrm>
+          <a:prstGeom prst="rect">
+            <a:avLst/>
+          </a:prstGeom>
+          <a:noFill/>
+        </p:spPr>
+        <p:txBody>
+          <a:bodyPr wrap="square">
+            <a:spAutoFit/>
+          </a:bodyPr>
+          <a:lstStyle/>
+          <a:p>
+            <a:r>
+              <a:rPr lang="en-US" sz="2400" dirty="0">
+                <a:solidFill>
+                  <a:schemeClr val="accent4">
+                    <a:lumMod val="60000"/>
+                    <a:lumOff val="40000"/>
+                  </a:schemeClr>
+                </a:solidFill>
+              </a:rPr>
+              <a:t>Goal / Task</a:t>
+            </a:r>
+          </a:p>
+        </p:txBody>
+      </p:sp>
+      <p:sp>
+        <p:nvSpPr>
+          <p:cNvPr id="8" name="TextBox 7">
+            <a:extLst>
+              <a:ext uri="{FF2B5EF4-FFF2-40B4-BE49-F238E27FC236}">
+                <a16:creationId xmlns:a16="http://schemas.microsoft.com/office/drawing/2014/main" id="{B2ACE0F2-8DB3-2B41-6CDB-8272422C3491}"/>
+              </a:ext>
+            </a:extLst>
+          </p:cNvPr>
+          <p:cNvSpPr txBox="1"/>
+          <p:nvPr/>
+        </p:nvSpPr>
+        <p:spPr>
+          <a:xfrm>
+            <a:off x="2433828" y="4769829"/>
+            <a:ext cx="4005072" cy="461665"/>
+          </a:xfrm>
+          <a:prstGeom prst="rect">
+            <a:avLst/>
+          </a:prstGeom>
+          <a:noFill/>
+        </p:spPr>
+        <p:txBody>
+          <a:bodyPr wrap="square">
+            <a:spAutoFit/>
+          </a:bodyPr>
+          <a:lstStyle/>
+          <a:p>
+            <a:r>
+              <a:rPr lang="en-US" sz="2400" dirty="0">
+                <a:solidFill>
+                  <a:schemeClr val="accent4">
+                    <a:lumMod val="60000"/>
+                    <a:lumOff val="40000"/>
+                  </a:schemeClr>
+                </a:solidFill>
+              </a:rPr>
+              <a:t>Breaks task into smaller tasks</a:t>
+            </a:r>
+          </a:p>
+        </p:txBody>
+      </p:sp>
+      <p:sp>
+        <p:nvSpPr>
+          <p:cNvPr id="10" name="Rectangle: Rounded Corners 9">
+            <a:extLst>
+              <a:ext uri="{FF2B5EF4-FFF2-40B4-BE49-F238E27FC236}">
+                <a16:creationId xmlns:a16="http://schemas.microsoft.com/office/drawing/2014/main" id="{DF91DF13-EF5F-E320-06B9-129EFA7C3541}"/>
+              </a:ext>
+            </a:extLst>
+          </p:cNvPr>
+          <p:cNvSpPr/>
+          <p:nvPr/>
+        </p:nvSpPr>
+        <p:spPr>
+          <a:xfrm>
+            <a:off x="2894076" y="2291120"/>
+            <a:ext cx="2679192" cy="523220"/>
+          </a:xfrm>
+          <a:prstGeom prst="roundRect">
+            <a:avLst/>
+          </a:prstGeom>
+        </p:spPr>
+        <p:style>
+          <a:lnRef idx="1">
+            <a:schemeClr val="accent2"/>
+          </a:lnRef>
+          <a:fillRef idx="2">
+            <a:schemeClr val="accent2"/>
+          </a:fillRef>
+          <a:effectRef idx="1">
+            <a:schemeClr val="accent2"/>
+          </a:effectRef>
+          <a:fontRef idx="minor">
+            <a:schemeClr val="dk1"/>
+          </a:fontRef>
+        </p:style>
+        <p:txBody>
+          <a:bodyPr rtlCol="0" anchor="ctr"/>
+          <a:lstStyle/>
+          <a:p>
+            <a:pPr algn="ctr"/>
+            <a:r>
+              <a:rPr lang="en-US" dirty="0"/>
+              <a:t>Web search, Code Execution, API call</a:t>
+            </a:r>
+          </a:p>
+        </p:txBody>
+      </p:sp>
+      <p:sp>
+        <p:nvSpPr>
+          <p:cNvPr id="12" name="Arrow: Up-Down 11">
+            <a:extLst>
+              <a:ext uri="{FF2B5EF4-FFF2-40B4-BE49-F238E27FC236}">
+                <a16:creationId xmlns:a16="http://schemas.microsoft.com/office/drawing/2014/main" id="{53108634-64DD-37B1-6296-D04CE227F2A8}"/>
+              </a:ext>
+            </a:extLst>
+          </p:cNvPr>
+          <p:cNvSpPr/>
+          <p:nvPr/>
+        </p:nvSpPr>
+        <p:spPr>
+          <a:xfrm>
+            <a:off x="3944112" y="2814340"/>
+            <a:ext cx="374904" cy="523220"/>
+          </a:xfrm>
+          <a:prstGeom prst="upDownArrow">
+            <a:avLst/>
+          </a:prstGeom>
+        </p:spPr>
+        <p:style>
+          <a:lnRef idx="2">
+            <a:schemeClr val="accent1">
+              <a:shade val="15000"/>
+            </a:schemeClr>
+          </a:lnRef>
+          <a:fillRef idx="1">
+            <a:schemeClr val="accent1"/>
+          </a:fillRef>
+          <a:effectRef idx="0">
+            <a:schemeClr val="accent1"/>
+          </a:effectRef>
+          <a:fontRef idx="minor">
+            <a:schemeClr val="lt1"/>
+          </a:fontRef>
+        </p:style>
+        <p:txBody>
+          <a:bodyPr rtlCol="0" anchor="ctr"/>
+          <a:lstStyle/>
+          <a:p>
+            <a:pPr algn="ctr"/>
+            <a:endParaRPr lang="en-IN"/>
+          </a:p>
+        </p:txBody>
+      </p:sp>
+      <p:sp>
+        <p:nvSpPr>
+          <p:cNvPr id="16" name="TextBox 15">
+            <a:extLst>
+              <a:ext uri="{FF2B5EF4-FFF2-40B4-BE49-F238E27FC236}">
+                <a16:creationId xmlns:a16="http://schemas.microsoft.com/office/drawing/2014/main" id="{DA34CF6C-C843-7EB7-C0A9-7A1580270165}"/>
+              </a:ext>
+            </a:extLst>
+          </p:cNvPr>
+          <p:cNvSpPr txBox="1"/>
+          <p:nvPr/>
+        </p:nvSpPr>
+        <p:spPr>
+          <a:xfrm>
+            <a:off x="6306312" y="3629160"/>
+            <a:ext cx="1636776" cy="461665"/>
+          </a:xfrm>
+          <a:prstGeom prst="rect">
+            <a:avLst/>
+          </a:prstGeom>
+          <a:noFill/>
+        </p:spPr>
+        <p:txBody>
+          <a:bodyPr wrap="square">
+            <a:spAutoFit/>
+          </a:bodyPr>
+          <a:lstStyle/>
+          <a:p>
+            <a:r>
+              <a:rPr lang="en-US" sz="2400" dirty="0">
+                <a:solidFill>
+                  <a:schemeClr val="accent4">
+                    <a:lumMod val="60000"/>
+                    <a:lumOff val="40000"/>
+                  </a:schemeClr>
+                </a:solidFill>
+              </a:rPr>
+              <a:t>Task done</a:t>
+            </a:r>
+          </a:p>
+        </p:txBody>
+      </p:sp>
+      <p:sp>
+        <p:nvSpPr>
+          <p:cNvPr id="17" name="Arrow: Right 16">
+            <a:extLst>
+              <a:ext uri="{FF2B5EF4-FFF2-40B4-BE49-F238E27FC236}">
+                <a16:creationId xmlns:a16="http://schemas.microsoft.com/office/drawing/2014/main" id="{5852A351-D286-117B-92DB-57672AA04D2A}"/>
+              </a:ext>
+            </a:extLst>
+          </p:cNvPr>
+          <p:cNvSpPr/>
+          <p:nvPr/>
+        </p:nvSpPr>
+        <p:spPr>
+          <a:xfrm>
+            <a:off x="1865376" y="3629160"/>
+            <a:ext cx="568452" cy="461665"/>
+          </a:xfrm>
+          <a:prstGeom prst="rightArrow">
+            <a:avLst/>
+          </a:prstGeom>
+        </p:spPr>
+        <p:style>
+          <a:lnRef idx="2">
+            <a:schemeClr val="accent1">
+              <a:shade val="15000"/>
+            </a:schemeClr>
+          </a:lnRef>
+          <a:fillRef idx="1">
+            <a:schemeClr val="accent1"/>
+          </a:fillRef>
+          <a:effectRef idx="0">
+            <a:schemeClr val="accent1"/>
+          </a:effectRef>
+          <a:fontRef idx="minor">
+            <a:schemeClr val="lt1"/>
+          </a:fontRef>
+        </p:style>
+        <p:txBody>
+          <a:bodyPr rtlCol="0" anchor="ctr"/>
+          <a:lstStyle/>
+          <a:p>
+            <a:pPr algn="ctr"/>
+            <a:endParaRPr lang="en-IN"/>
+          </a:p>
+        </p:txBody>
+      </p:sp>
+      <p:sp>
+        <p:nvSpPr>
+          <p:cNvPr id="19" name="Arrow: Right 18">
+            <a:extLst>
+              <a:ext uri="{FF2B5EF4-FFF2-40B4-BE49-F238E27FC236}">
+                <a16:creationId xmlns:a16="http://schemas.microsoft.com/office/drawing/2014/main" id="{00E04D5F-6F35-4088-C77E-17F290D1E3DA}"/>
+              </a:ext>
+            </a:extLst>
+          </p:cNvPr>
+          <p:cNvSpPr/>
+          <p:nvPr/>
+        </p:nvSpPr>
+        <p:spPr>
+          <a:xfrm>
+            <a:off x="5775960" y="3629160"/>
+            <a:ext cx="568452" cy="461665"/>
+          </a:xfrm>
+          <a:prstGeom prst="rightArrow">
+            <a:avLst/>
+          </a:prstGeom>
+        </p:spPr>
+        <p:style>
+          <a:lnRef idx="2">
+            <a:schemeClr val="accent1">
+              <a:shade val="15000"/>
+            </a:schemeClr>
+          </a:lnRef>
+          <a:fillRef idx="1">
+            <a:schemeClr val="accent1"/>
+          </a:fillRef>
+          <a:effectRef idx="0">
+            <a:schemeClr val="accent1"/>
+          </a:effectRef>
+          <a:fontRef idx="minor">
+            <a:schemeClr val="lt1"/>
+          </a:fontRef>
+        </p:style>
+        <p:txBody>
+          <a:bodyPr rtlCol="0" anchor="ctr"/>
+          <a:lstStyle/>
+          <a:p>
+            <a:pPr algn="ctr"/>
+            <a:endParaRPr lang="en-IN"/>
+          </a:p>
+        </p:txBody>
+      </p:sp>
+    </p:spTree>
+    <p:extLst>
+      <p:ext uri="{BB962C8B-B14F-4D97-AF65-F5344CB8AC3E}">
+        <p14:creationId xmlns:p14="http://schemas.microsoft.com/office/powerpoint/2010/main" val="368663484"/>
       </p:ext>
     </p:extLst>
   </p:cSld>

--- a/AgenticAI/1-Intro-To-AgenticAI/2_Agent_vs_Chatbot_Finance.pptx
+++ b/AgenticAI/1-Intro-To-AgenticAI/2_Agent_vs_Chatbot_Finance.pptx
@@ -5,10 +5,10 @@
     <p:sldMasterId id="2147483648" r:id="rId1"/>
   </p:sldMasterIdLst>
   <p:notesMasterIdLst>
-    <p:notesMasterId r:id="rId13"/>
+    <p:notesMasterId r:id="rId12"/>
   </p:notesMasterIdLst>
   <p:handoutMasterIdLst>
-    <p:handoutMasterId r:id="rId14"/>
+    <p:handoutMasterId r:id="rId13"/>
   </p:handoutMasterIdLst>
   <p:sldIdLst>
     <p:sldId id="257" r:id="rId2"/>
@@ -18,10 +18,9 @@
     <p:sldId id="284" r:id="rId6"/>
     <p:sldId id="279" r:id="rId7"/>
     <p:sldId id="280" r:id="rId8"/>
-    <p:sldId id="283" r:id="rId9"/>
-    <p:sldId id="281" r:id="rId10"/>
-    <p:sldId id="282" r:id="rId11"/>
-    <p:sldId id="275" r:id="rId12"/>
+    <p:sldId id="281" r:id="rId9"/>
+    <p:sldId id="282" r:id="rId10"/>
+    <p:sldId id="275" r:id="rId11"/>
   </p:sldIdLst>
   <p:sldSz cx="12192000" cy="6858000"/>
   <p:notesSz cx="6858000" cy="9144000"/>
@@ -225,7 +224,7 @@
           <a:p>
             <a:fld id="{7BAEECA8-D063-486F-AE31-5020270C1449}" type="datetimeFigureOut">
               <a:rPr lang="en-US" smtClean="0"/>
-              <a:t>9/16/2026</a:t>
+              <a:t>9/17/2026</a:t>
             </a:fld>
             <a:endParaRPr lang="en-US"/>
           </a:p>
@@ -402,7 +401,7 @@
           <a:p>
             <a:fld id="{CB233BD1-3BA8-448D-9D08-7846095EA517}" type="datetimeFigureOut">
               <a:rPr lang="en-US" smtClean="0"/>
-              <a:t>9/16/2026</a:t>
+              <a:t>9/17/2026</a:t>
             </a:fld>
             <a:endParaRPr lang="en-US"/>
           </a:p>
@@ -816,7 +815,7 @@
           <a:p>
             <a:fld id="{6383FAE1-13DE-4511-8C1B-C8AFB720664C}" type="datetimeFigureOut">
               <a:rPr lang="en-US" smtClean="0"/>
-              <a:t>9/16/2026</a:t>
+              <a:t>9/17/2026</a:t>
             </a:fld>
             <a:endParaRPr lang="en-US"/>
           </a:p>
@@ -1014,7 +1013,7 @@
           <a:p>
             <a:fld id="{6383FAE1-13DE-4511-8C1B-C8AFB720664C}" type="datetimeFigureOut">
               <a:rPr lang="en-US" smtClean="0"/>
-              <a:t>9/16/2026</a:t>
+              <a:t>9/17/2026</a:t>
             </a:fld>
             <a:endParaRPr lang="en-US"/>
           </a:p>
@@ -1222,7 +1221,7 @@
           <a:p>
             <a:fld id="{6383FAE1-13DE-4511-8C1B-C8AFB720664C}" type="datetimeFigureOut">
               <a:rPr lang="en-US" smtClean="0"/>
-              <a:t>9/16/2026</a:t>
+              <a:t>9/17/2026</a:t>
             </a:fld>
             <a:endParaRPr lang="en-US"/>
           </a:p>
@@ -1420,7 +1419,7 @@
           <a:p>
             <a:fld id="{6383FAE1-13DE-4511-8C1B-C8AFB720664C}" type="datetimeFigureOut">
               <a:rPr lang="en-US" smtClean="0"/>
-              <a:t>9/16/2026</a:t>
+              <a:t>9/17/2026</a:t>
             </a:fld>
             <a:endParaRPr lang="en-US"/>
           </a:p>
@@ -1695,7 +1694,7 @@
           <a:p>
             <a:fld id="{6383FAE1-13DE-4511-8C1B-C8AFB720664C}" type="datetimeFigureOut">
               <a:rPr lang="en-US" smtClean="0"/>
-              <a:t>9/16/2026</a:t>
+              <a:t>9/17/2026</a:t>
             </a:fld>
             <a:endParaRPr lang="en-US"/>
           </a:p>
@@ -1960,7 +1959,7 @@
           <a:p>
             <a:fld id="{6383FAE1-13DE-4511-8C1B-C8AFB720664C}" type="datetimeFigureOut">
               <a:rPr lang="en-US" smtClean="0"/>
-              <a:t>9/16/2026</a:t>
+              <a:t>9/17/2026</a:t>
             </a:fld>
             <a:endParaRPr lang="en-US"/>
           </a:p>
@@ -2372,7 +2371,7 @@
           <a:p>
             <a:fld id="{6383FAE1-13DE-4511-8C1B-C8AFB720664C}" type="datetimeFigureOut">
               <a:rPr lang="en-US" smtClean="0"/>
-              <a:t>9/16/2026</a:t>
+              <a:t>9/17/2026</a:t>
             </a:fld>
             <a:endParaRPr lang="en-US"/>
           </a:p>
@@ -2513,7 +2512,7 @@
           <a:p>
             <a:fld id="{6383FAE1-13DE-4511-8C1B-C8AFB720664C}" type="datetimeFigureOut">
               <a:rPr lang="en-US" smtClean="0"/>
-              <a:t>9/16/2026</a:t>
+              <a:t>9/17/2026</a:t>
             </a:fld>
             <a:endParaRPr lang="en-US"/>
           </a:p>
@@ -2626,7 +2625,7 @@
           <a:p>
             <a:fld id="{6383FAE1-13DE-4511-8C1B-C8AFB720664C}" type="datetimeFigureOut">
               <a:rPr lang="en-US" smtClean="0"/>
-              <a:t>9/16/2026</a:t>
+              <a:t>9/17/2026</a:t>
             </a:fld>
             <a:endParaRPr lang="en-US"/>
           </a:p>
@@ -2937,7 +2936,7 @@
           <a:p>
             <a:fld id="{6383FAE1-13DE-4511-8C1B-C8AFB720664C}" type="datetimeFigureOut">
               <a:rPr lang="en-US" smtClean="0"/>
-              <a:t>9/16/2026</a:t>
+              <a:t>9/17/2026</a:t>
             </a:fld>
             <a:endParaRPr lang="en-US"/>
           </a:p>
@@ -3228,7 +3227,7 @@
           <a:p>
             <a:fld id="{6383FAE1-13DE-4511-8C1B-C8AFB720664C}" type="datetimeFigureOut">
               <a:rPr lang="en-US" smtClean="0"/>
-              <a:t>9/16/2026</a:t>
+              <a:t>9/17/2026</a:t>
             </a:fld>
             <a:endParaRPr lang="en-US"/>
           </a:p>
@@ -3472,7 +3471,7 @@
           <a:p>
             <a:fld id="{6383FAE1-13DE-4511-8C1B-C8AFB720664C}" type="datetimeFigureOut">
               <a:rPr lang="en-US" smtClean="0"/>
-              <a:t>9/16/2026</a:t>
+              <a:t>9/17/2026</a:t>
             </a:fld>
             <a:endParaRPr lang="en-US"/>
           </a:p>
@@ -4219,225 +4218,6 @@
         <p:cNvPr id="1" name="">
           <a:extLst>
             <a:ext uri="{FF2B5EF4-FFF2-40B4-BE49-F238E27FC236}">
-              <a16:creationId xmlns:a16="http://schemas.microsoft.com/office/drawing/2014/main" id="{728CE86D-EF25-800A-6BF1-CA6EE56C8528}"/>
-            </a:ext>
-          </a:extLst>
-        </p:cNvPr>
-        <p:cNvGrpSpPr/>
-        <p:nvPr/>
-      </p:nvGrpSpPr>
-      <p:grpSpPr>
-        <a:xfrm>
-          <a:off x="0" y="0"/>
-          <a:ext cx="0" cy="0"/>
-          <a:chOff x="0" y="0"/>
-          <a:chExt cx="0" cy="0"/>
-        </a:xfrm>
-      </p:grpSpPr>
-      <p:sp>
-        <p:nvSpPr>
-          <p:cNvPr id="3" name="TextBox 2">
-            <a:extLst>
-              <a:ext uri="{FF2B5EF4-FFF2-40B4-BE49-F238E27FC236}">
-                <a16:creationId xmlns:a16="http://schemas.microsoft.com/office/drawing/2014/main" id="{CA38D18B-AE90-95C0-C949-64200AEC9E22}"/>
-              </a:ext>
-            </a:extLst>
-          </p:cNvPr>
-          <p:cNvSpPr txBox="1"/>
-          <p:nvPr/>
-        </p:nvSpPr>
-        <p:spPr>
-          <a:xfrm>
-            <a:off x="228600" y="1012954"/>
-            <a:ext cx="11018520" cy="4832092"/>
-          </a:xfrm>
-          <a:prstGeom prst="rect">
-            <a:avLst/>
-          </a:prstGeom>
-          <a:noFill/>
-        </p:spPr>
-        <p:txBody>
-          <a:bodyPr wrap="square">
-            <a:spAutoFit/>
-          </a:bodyPr>
-          <a:lstStyle/>
-          <a:p>
-            <a:r>
-              <a:rPr lang="en-US" sz="2800" b="1" dirty="0">
-                <a:solidFill>
-                  <a:schemeClr val="accent6">
-                    <a:lumMod val="60000"/>
-                    <a:lumOff val="40000"/>
-                  </a:schemeClr>
-                </a:solidFill>
-              </a:rPr>
-              <a:t>Discussion Prompt for Class</a:t>
-            </a:r>
-          </a:p>
-          <a:p>
-            <a:endParaRPr lang="en-US" sz="2800" b="1" dirty="0">
-              <a:solidFill>
-                <a:schemeClr val="accent6">
-                  <a:lumMod val="60000"/>
-                  <a:lumOff val="40000"/>
-                </a:schemeClr>
-              </a:solidFill>
-            </a:endParaRPr>
-          </a:p>
-          <a:p>
-            <a:r>
-              <a:rPr lang="en-US" sz="2800" i="1" dirty="0">
-                <a:solidFill>
-                  <a:schemeClr val="accent6">
-                    <a:lumMod val="60000"/>
-                    <a:lumOff val="40000"/>
-                  </a:schemeClr>
-                </a:solidFill>
-              </a:rPr>
-              <a:t>"A bank deploys an autonomous agent that can </a:t>
-            </a:r>
-          </a:p>
-          <a:p>
-            <a:pPr marL="457200" indent="-457200">
-              <a:buFont typeface="Arial" panose="020B0604020202020204" pitchFamily="34" charset="0"/>
-              <a:buChar char="•"/>
-            </a:pPr>
-            <a:r>
-              <a:rPr lang="en-US" sz="2800" i="1" dirty="0">
-                <a:solidFill>
-                  <a:schemeClr val="accent6">
-                    <a:lumMod val="60000"/>
-                    <a:lumOff val="40000"/>
-                  </a:schemeClr>
-                </a:solidFill>
-              </a:rPr>
-              <a:t>access accounts, </a:t>
-            </a:r>
-          </a:p>
-          <a:p>
-            <a:pPr marL="457200" indent="-457200">
-              <a:buFont typeface="Arial" panose="020B0604020202020204" pitchFamily="34" charset="0"/>
-              <a:buChar char="•"/>
-            </a:pPr>
-            <a:r>
-              <a:rPr lang="en-US" sz="2800" i="1" dirty="0">
-                <a:solidFill>
-                  <a:schemeClr val="accent6">
-                    <a:lumMod val="60000"/>
-                    <a:lumOff val="40000"/>
-                  </a:schemeClr>
-                </a:solidFill>
-              </a:rPr>
-              <a:t>move money, and </a:t>
-            </a:r>
-          </a:p>
-          <a:p>
-            <a:pPr marL="457200" indent="-457200">
-              <a:buFont typeface="Arial" panose="020B0604020202020204" pitchFamily="34" charset="0"/>
-              <a:buChar char="•"/>
-            </a:pPr>
-            <a:r>
-              <a:rPr lang="en-US" sz="2800" i="1" dirty="0">
-                <a:solidFill>
-                  <a:schemeClr val="accent6">
-                    <a:lumMod val="60000"/>
-                    <a:lumOff val="40000"/>
-                  </a:schemeClr>
-                </a:solidFill>
-              </a:rPr>
-              <a:t>close disputes </a:t>
-            </a:r>
-          </a:p>
-          <a:p>
-            <a:r>
-              <a:rPr lang="en-US" sz="2800" i="1" dirty="0">
-                <a:solidFill>
-                  <a:schemeClr val="accent6">
-                    <a:lumMod val="60000"/>
-                    <a:lumOff val="40000"/>
-                  </a:schemeClr>
-                </a:solidFill>
-              </a:rPr>
-              <a:t>— all without a human approving each action. </a:t>
-            </a:r>
-          </a:p>
-          <a:p>
-            <a:endParaRPr lang="en-US" sz="2800" i="1" dirty="0">
-              <a:solidFill>
-                <a:schemeClr val="accent6">
-                  <a:lumMod val="60000"/>
-                  <a:lumOff val="40000"/>
-                </a:schemeClr>
-              </a:solidFill>
-            </a:endParaRPr>
-          </a:p>
-          <a:p>
-            <a:r>
-              <a:rPr lang="en-US" sz="2800" i="1" dirty="0">
-                <a:solidFill>
-                  <a:schemeClr val="accent6">
-                    <a:lumMod val="60000"/>
-                    <a:lumOff val="40000"/>
-                  </a:schemeClr>
-                </a:solidFill>
-              </a:rPr>
-              <a:t>What conditions would need to be true for you to trust that system ? </a:t>
-            </a:r>
-          </a:p>
-          <a:p>
-            <a:endParaRPr lang="en-US" sz="2800" i="1" dirty="0">
-              <a:solidFill>
-                <a:schemeClr val="accent6">
-                  <a:lumMod val="60000"/>
-                  <a:lumOff val="40000"/>
-                </a:schemeClr>
-              </a:solidFill>
-            </a:endParaRPr>
-          </a:p>
-          <a:p>
-            <a:r>
-              <a:rPr lang="en-US" sz="2800" i="1" dirty="0">
-                <a:solidFill>
-                  <a:schemeClr val="accent6">
-                    <a:lumMod val="60000"/>
-                    <a:lumOff val="40000"/>
-                  </a:schemeClr>
-                </a:solidFill>
-              </a:rPr>
-              <a:t>What would make you distrust it?"</a:t>
-            </a:r>
-            <a:endParaRPr lang="en-US" sz="2800" dirty="0">
-              <a:solidFill>
-                <a:schemeClr val="accent6">
-                  <a:lumMod val="60000"/>
-                  <a:lumOff val="40000"/>
-                </a:schemeClr>
-              </a:solidFill>
-            </a:endParaRPr>
-          </a:p>
-        </p:txBody>
-      </p:sp>
-    </p:spTree>
-    <p:extLst>
-      <p:ext uri="{BB962C8B-B14F-4D97-AF65-F5344CB8AC3E}">
-        <p14:creationId xmlns:p14="http://schemas.microsoft.com/office/powerpoint/2010/main" val="2206521416"/>
-      </p:ext>
-    </p:extLst>
-  </p:cSld>
-  <p:clrMapOvr>
-    <a:masterClrMapping/>
-  </p:clrMapOvr>
-</p:sld>
-</file>
-
-<file path=ppt/slides/slide11.xml><?xml version="1.0" encoding="utf-8"?>
-<p:sld xmlns:a="http://schemas.openxmlformats.org/drawingml/2006/main" xmlns:r="http://schemas.openxmlformats.org/officeDocument/2006/relationships" xmlns:p="http://schemas.openxmlformats.org/presentationml/2006/main">
-  <p:cSld>
-    <p:spTree>
-      <p:nvGrpSpPr>
-        <p:cNvPr id="1" name="">
-          <a:extLst>
-            <a:ext uri="{FF2B5EF4-FFF2-40B4-BE49-F238E27FC236}">
               <a16:creationId xmlns:a16="http://schemas.microsoft.com/office/drawing/2014/main" id="{DD931D7F-4279-DA2E-FA64-6CF3C441D414}"/>
             </a:ext>
           </a:extLst>
@@ -5207,7 +4987,7 @@
         <p:spPr>
           <a:xfrm>
             <a:off x="64008" y="153198"/>
-            <a:ext cx="6784189" cy="1938992"/>
+            <a:ext cx="11420856" cy="1938992"/>
           </a:xfrm>
           <a:prstGeom prst="rect">
             <a:avLst/>
@@ -5252,7 +5032,42 @@
                   </a:schemeClr>
                 </a:solidFill>
               </a:rPr>
-              <a:t>An LLM chatbot understands language deeply. It can handle "hacked," "compromised," "someone got into my account," "unauthorized access" — all the same. </a:t>
+              <a:t>An LLM chatbot understands language semantics. </a:t>
+            </a:r>
+          </a:p>
+          <a:p>
+            <a:r>
+              <a:rPr lang="en-US" sz="2400" dirty="0">
+                <a:solidFill>
+                  <a:schemeClr val="accent6">
+                    <a:lumMod val="60000"/>
+                    <a:lumOff val="40000"/>
+                  </a:schemeClr>
+                </a:solidFill>
+              </a:rPr>
+              <a:t>It can handle </a:t>
+            </a:r>
+            <a:r>
+              <a:rPr lang="en-US" sz="2400" i="1" dirty="0">
+                <a:solidFill>
+                  <a:schemeClr val="accent6">
+                    <a:lumMod val="60000"/>
+                    <a:lumOff val="40000"/>
+                  </a:schemeClr>
+                </a:solidFill>
+              </a:rPr>
+              <a:t>"hacked," "compromised," "someone got into my account," "unauthorized access"</a:t>
+            </a:r>
+            <a:r>
+              <a:rPr lang="en-US" sz="2400" dirty="0">
+                <a:solidFill>
+                  <a:schemeClr val="accent6">
+                    <a:lumMod val="60000"/>
+                    <a:lumOff val="40000"/>
+                  </a:schemeClr>
+                </a:solidFill>
+              </a:rPr>
+              <a:t> — all the same. </a:t>
             </a:r>
           </a:p>
         </p:txBody>
@@ -5300,7 +5115,7 @@
           <a:p>
             <a:pPr algn="ctr"/>
             <a:r>
-              <a:rPr lang="en-IN" dirty="0"/>
+              <a:rPr lang="en-IN" sz="2400" dirty="0"/>
               <a:t>LLM ChatBot</a:t>
             </a:r>
           </a:p>
@@ -5602,7 +5417,29 @@
                   </a:schemeClr>
                 </a:solidFill>
               </a:rPr>
-              <a:t>I think someone hacked into my account.</a:t>
+              <a:t>I think someone </a:t>
+            </a:r>
+            <a:r>
+              <a:rPr lang="en-US" sz="2400" i="1" dirty="0">
+                <a:solidFill>
+                  <a:schemeClr val="accent4">
+                    <a:lumMod val="60000"/>
+                    <a:lumOff val="40000"/>
+                  </a:schemeClr>
+                </a:solidFill>
+              </a:rPr>
+              <a:t>hacked</a:t>
+            </a:r>
+            <a:r>
+              <a:rPr lang="en-US" sz="2400" dirty="0">
+                <a:solidFill>
+                  <a:schemeClr val="accent4">
+                    <a:lumMod val="60000"/>
+                    <a:lumOff val="40000"/>
+                  </a:schemeClr>
+                </a:solidFill>
+              </a:rPr>
+              <a:t> into my account.</a:t>
             </a:r>
           </a:p>
           <a:p>
@@ -5619,7 +5456,18 @@
                   </a:schemeClr>
                 </a:solidFill>
               </a:rPr>
-              <a:t>My account is compromised</a:t>
+              <a:t>My </a:t>
+            </a:r>
+            <a:r>
+              <a:rPr lang="en-US" sz="2400" i="1" dirty="0">
+                <a:solidFill>
+                  <a:schemeClr val="accent4">
+                    <a:lumMod val="60000"/>
+                    <a:lumOff val="40000"/>
+                  </a:schemeClr>
+                </a:solidFill>
+              </a:rPr>
+              <a:t>account is compromised</a:t>
             </a:r>
           </a:p>
           <a:p>
@@ -5636,7 +5484,29 @@
                   </a:schemeClr>
                 </a:solidFill>
               </a:rPr>
-              <a:t>There is unauthorized access to my account</a:t>
+              <a:t>There is </a:t>
+            </a:r>
+            <a:r>
+              <a:rPr lang="en-US" sz="2400" i="1" dirty="0">
+                <a:solidFill>
+                  <a:schemeClr val="accent4">
+                    <a:lumMod val="60000"/>
+                    <a:lumOff val="40000"/>
+                  </a:schemeClr>
+                </a:solidFill>
+              </a:rPr>
+              <a:t>unauthorized access</a:t>
+            </a:r>
+            <a:r>
+              <a:rPr lang="en-US" sz="2400" dirty="0">
+                <a:solidFill>
+                  <a:schemeClr val="accent4">
+                    <a:lumMod val="60000"/>
+                    <a:lumOff val="40000"/>
+                  </a:schemeClr>
+                </a:solidFill>
+              </a:rPr>
+              <a:t> to my account</a:t>
             </a:r>
           </a:p>
         </p:txBody>
@@ -5888,8 +5758,8 @@
           <a:p>
             <a:pPr algn="ctr"/>
             <a:r>
-              <a:rPr lang="en-US" dirty="0"/>
-              <a:t>Agents</a:t>
+              <a:rPr lang="en-US" sz="3200" dirty="0"/>
+              <a:t>Agent</a:t>
             </a:r>
           </a:p>
           <a:p>
@@ -6237,7 +6107,7 @@
                   </a:schemeClr>
                 </a:solidFill>
               </a:rPr>
-              <a:t>The key shift: the agent's job isn't to </a:t>
+              <a:t>The key shift:  Agent's job isn't to </a:t>
             </a:r>
             <a:r>
               <a:rPr lang="en-US" sz="2400" i="1" dirty="0">
@@ -6259,7 +6129,7 @@
                   </a:schemeClr>
                 </a:solidFill>
               </a:rPr>
-              <a:t> — it's to </a:t>
+              <a:t> — it is to </a:t>
             </a:r>
             <a:r>
               <a:rPr lang="en-US" sz="2400" i="1" dirty="0">
@@ -6337,7 +6207,7 @@
         <p:spPr>
           <a:xfrm>
             <a:off x="292608" y="528288"/>
-            <a:ext cx="11899392" cy="1938992"/>
+            <a:ext cx="9336024" cy="2308324"/>
           </a:xfrm>
           <a:prstGeom prst="rect">
             <a:avLst/>
@@ -6421,20 +6291,33 @@
           </a:p>
           <a:p>
             <a:pPr marL="457200" indent="-457200">
+              <a:buAutoNum type="arabicParenR"/>
+            </a:pPr>
+            <a:r>
+              <a:rPr lang="en-US" sz="2400" dirty="0">
+                <a:solidFill>
+                  <a:schemeClr val="accent6">
+                    <a:lumMod val="60000"/>
+                    <a:lumOff val="40000"/>
+                  </a:schemeClr>
+                </a:solidFill>
+              </a:rPr>
+              <a:t>use tools to achieve a specific goal.</a:t>
+            </a:r>
+          </a:p>
+          <a:p>
+            <a:pPr marL="457200" indent="-457200">
               <a:buFont typeface="+mj-lt"/>
               <a:buAutoNum type="arabicPeriod"/>
             </a:pPr>
-            <a:r>
-              <a:rPr lang="en-US" sz="2400" dirty="0">
-                <a:solidFill>
-                  <a:schemeClr val="accent6">
-                    <a:lumMod val="60000"/>
-                    <a:lumOff val="40000"/>
-                  </a:schemeClr>
-                </a:solidFill>
-              </a:rPr>
-              <a:t>use tools to achieve a specific goal.</a:t>
-            </a:r>
+            <a:endParaRPr lang="en-US" sz="2400" dirty="0">
+              <a:solidFill>
+                <a:schemeClr val="accent6">
+                  <a:lumMod val="60000"/>
+                  <a:lumOff val="40000"/>
+                </a:schemeClr>
+              </a:solidFill>
+            </a:endParaRPr>
           </a:p>
           <a:p>
             <a:pPr>
@@ -6490,7 +6373,7 @@
         </p:nvSpPr>
         <p:spPr>
           <a:xfrm>
-            <a:off x="2935224" y="3429000"/>
+            <a:off x="2935224" y="3904488"/>
             <a:ext cx="5266944" cy="2705424"/>
           </a:xfrm>
           <a:prstGeom prst="rect">
@@ -6519,7 +6402,7 @@
           <a:p>
             <a:pPr algn="ctr"/>
             <a:r>
-              <a:rPr lang="en-US" dirty="0"/>
+              <a:rPr lang="en-US" sz="3600" dirty="0"/>
               <a:t>AI Agent</a:t>
             </a:r>
           </a:p>
@@ -6539,7 +6422,7 @@
         </p:nvSpPr>
         <p:spPr>
           <a:xfrm>
-            <a:off x="3065781" y="4872552"/>
+            <a:off x="3065781" y="5348040"/>
             <a:ext cx="966724" cy="732120"/>
           </a:xfrm>
           <a:prstGeom prst="ellipse">
@@ -6593,7 +6476,7 @@
         </p:nvSpPr>
         <p:spPr>
           <a:xfrm>
-            <a:off x="5954522" y="4695326"/>
+            <a:off x="5954522" y="5170814"/>
             <a:ext cx="2051812" cy="1216452"/>
           </a:xfrm>
           <a:prstGeom prst="ellipse">
@@ -6661,7 +6544,7 @@
         </p:nvSpPr>
         <p:spPr>
           <a:xfrm>
-            <a:off x="4230878" y="4908227"/>
+            <a:off x="4230878" y="5383715"/>
             <a:ext cx="1527810" cy="732120"/>
           </a:xfrm>
           <a:prstGeom prst="ellipse">
@@ -6715,7 +6598,7 @@
         </p:nvSpPr>
         <p:spPr>
           <a:xfrm>
-            <a:off x="77724" y="2899248"/>
+            <a:off x="114300" y="3220177"/>
             <a:ext cx="8563356" cy="461665"/>
           </a:xfrm>
           <a:prstGeom prst="rect">
@@ -7098,8 +6981,8 @@
           <a:p>
             <a:pPr algn="ctr"/>
             <a:r>
-              <a:rPr lang="en-US" sz="2400" dirty="0"/>
-              <a:t>Agents</a:t>
+              <a:rPr lang="en-US" sz="3200" dirty="0"/>
+              <a:t>Agent</a:t>
             </a:r>
           </a:p>
           <a:p>
@@ -7494,274 +7377,6 @@
         <p:cNvPr id="1" name="">
           <a:extLst>
             <a:ext uri="{FF2B5EF4-FFF2-40B4-BE49-F238E27FC236}">
-              <a16:creationId xmlns:a16="http://schemas.microsoft.com/office/drawing/2014/main" id="{721621D8-ABCC-578A-44BA-3942A46FE832}"/>
-            </a:ext>
-          </a:extLst>
-        </p:cNvPr>
-        <p:cNvGrpSpPr/>
-        <p:nvPr/>
-      </p:nvGrpSpPr>
-      <p:grpSpPr>
-        <a:xfrm>
-          <a:off x="0" y="0"/>
-          <a:ext cx="0" cy="0"/>
-          <a:chOff x="0" y="0"/>
-          <a:chExt cx="0" cy="0"/>
-        </a:xfrm>
-      </p:grpSpPr>
-      <p:sp>
-        <p:nvSpPr>
-          <p:cNvPr id="3" name="TextBox 2">
-            <a:extLst>
-              <a:ext uri="{FF2B5EF4-FFF2-40B4-BE49-F238E27FC236}">
-                <a16:creationId xmlns:a16="http://schemas.microsoft.com/office/drawing/2014/main" id="{B755BF49-7848-E936-7898-C65F418F2156}"/>
-              </a:ext>
-            </a:extLst>
-          </p:cNvPr>
-          <p:cNvSpPr txBox="1"/>
-          <p:nvPr/>
-        </p:nvSpPr>
-        <p:spPr>
-          <a:xfrm>
-            <a:off x="60960" y="70902"/>
-            <a:ext cx="11018520" cy="523220"/>
-          </a:xfrm>
-          <a:prstGeom prst="rect">
-            <a:avLst/>
-          </a:prstGeom>
-          <a:noFill/>
-        </p:spPr>
-        <p:txBody>
-          <a:bodyPr wrap="square">
-            <a:spAutoFit/>
-          </a:bodyPr>
-          <a:lstStyle/>
-          <a:p>
-            <a:r>
-              <a:rPr lang="en-US" sz="2800" b="1" dirty="0">
-                <a:solidFill>
-                  <a:schemeClr val="accent6">
-                    <a:lumMod val="60000"/>
-                    <a:lumOff val="40000"/>
-                  </a:schemeClr>
-                </a:solidFill>
-              </a:rPr>
-              <a:t>AI Agent</a:t>
-            </a:r>
-          </a:p>
-        </p:txBody>
-      </p:sp>
-      <p:sp>
-        <p:nvSpPr>
-          <p:cNvPr id="6" name="Rectangle: Rounded Corners 5">
-            <a:extLst>
-              <a:ext uri="{FF2B5EF4-FFF2-40B4-BE49-F238E27FC236}">
-                <a16:creationId xmlns:a16="http://schemas.microsoft.com/office/drawing/2014/main" id="{690977C8-4F10-B478-CBCB-A5E71A027ADF}"/>
-              </a:ext>
-            </a:extLst>
-          </p:cNvPr>
-          <p:cNvSpPr/>
-          <p:nvPr/>
-        </p:nvSpPr>
-        <p:spPr>
-          <a:xfrm>
-            <a:off x="3943350" y="1978561"/>
-            <a:ext cx="3150108" cy="1353312"/>
-          </a:xfrm>
-          <a:prstGeom prst="roundRect">
-            <a:avLst/>
-          </a:prstGeom>
-        </p:spPr>
-        <p:style>
-          <a:lnRef idx="2">
-            <a:schemeClr val="accent1">
-              <a:shade val="15000"/>
-            </a:schemeClr>
-          </a:lnRef>
-          <a:fillRef idx="1">
-            <a:schemeClr val="accent1"/>
-          </a:fillRef>
-          <a:effectRef idx="0">
-            <a:schemeClr val="accent1"/>
-          </a:effectRef>
-          <a:fontRef idx="minor">
-            <a:schemeClr val="lt1"/>
-          </a:fontRef>
-        </p:style>
-        <p:txBody>
-          <a:bodyPr rtlCol="0" anchor="ctr"/>
-          <a:lstStyle/>
-          <a:p>
-            <a:pPr algn="ctr"/>
-            <a:r>
-              <a:rPr lang="en-US" sz="2400" dirty="0"/>
-              <a:t>Agents</a:t>
-            </a:r>
-          </a:p>
-          <a:p>
-            <a:pPr algn="ctr"/>
-            <a:r>
-              <a:rPr lang="en-US" sz="2400" dirty="0"/>
-              <a:t>LLM + Tools + Memory </a:t>
-            </a:r>
-          </a:p>
-        </p:txBody>
-      </p:sp>
-      <p:sp>
-        <p:nvSpPr>
-          <p:cNvPr id="9" name="Arrow: Right 8">
-            <a:extLst>
-              <a:ext uri="{FF2B5EF4-FFF2-40B4-BE49-F238E27FC236}">
-                <a16:creationId xmlns:a16="http://schemas.microsoft.com/office/drawing/2014/main" id="{DD55B4F0-C9E9-E5A6-4B07-5AEBA8D5401A}"/>
-              </a:ext>
-            </a:extLst>
-          </p:cNvPr>
-          <p:cNvSpPr/>
-          <p:nvPr/>
-        </p:nvSpPr>
-        <p:spPr>
-          <a:xfrm>
-            <a:off x="3424428" y="2436148"/>
-            <a:ext cx="411480" cy="420624"/>
-          </a:xfrm>
-          <a:prstGeom prst="rightArrow">
-            <a:avLst/>
-          </a:prstGeom>
-        </p:spPr>
-        <p:style>
-          <a:lnRef idx="2">
-            <a:schemeClr val="accent1">
-              <a:shade val="15000"/>
-            </a:schemeClr>
-          </a:lnRef>
-          <a:fillRef idx="1">
-            <a:schemeClr val="accent1"/>
-          </a:fillRef>
-          <a:effectRef idx="0">
-            <a:schemeClr val="accent1"/>
-          </a:effectRef>
-          <a:fontRef idx="minor">
-            <a:schemeClr val="lt1"/>
-          </a:fontRef>
-        </p:style>
-        <p:txBody>
-          <a:bodyPr rtlCol="0" anchor="ctr"/>
-          <a:lstStyle/>
-          <a:p>
-            <a:pPr algn="ctr"/>
-            <a:endParaRPr lang="en-IN"/>
-          </a:p>
-        </p:txBody>
-      </p:sp>
-      <p:sp>
-        <p:nvSpPr>
-          <p:cNvPr id="16" name="TextBox 15">
-            <a:extLst>
-              <a:ext uri="{FF2B5EF4-FFF2-40B4-BE49-F238E27FC236}">
-                <a16:creationId xmlns:a16="http://schemas.microsoft.com/office/drawing/2014/main" id="{11ED82B7-CB98-9FE1-5C10-85B6265778A1}"/>
-              </a:ext>
-            </a:extLst>
-          </p:cNvPr>
-          <p:cNvSpPr txBox="1"/>
-          <p:nvPr/>
-        </p:nvSpPr>
-        <p:spPr>
-          <a:xfrm>
-            <a:off x="7936992" y="2046296"/>
-            <a:ext cx="3215640" cy="1200329"/>
-          </a:xfrm>
-          <a:prstGeom prst="rect">
-            <a:avLst/>
-          </a:prstGeom>
-          <a:noFill/>
-        </p:spPr>
-        <p:txBody>
-          <a:bodyPr wrap="square">
-            <a:spAutoFit/>
-          </a:bodyPr>
-          <a:lstStyle/>
-          <a:p>
-            <a:r>
-              <a:rPr lang="en-US" sz="2400" dirty="0">
-                <a:solidFill>
-                  <a:schemeClr val="accent4">
-                    <a:lumMod val="60000"/>
-                    <a:lumOff val="40000"/>
-                  </a:schemeClr>
-                </a:solidFill>
-              </a:rPr>
-              <a:t>Books cheapest Delta Airlines flight from New York To Moscow</a:t>
-            </a:r>
-          </a:p>
-        </p:txBody>
-      </p:sp>
-      <p:sp>
-        <p:nvSpPr>
-          <p:cNvPr id="18" name="Arrow: Right 17">
-            <a:extLst>
-              <a:ext uri="{FF2B5EF4-FFF2-40B4-BE49-F238E27FC236}">
-                <a16:creationId xmlns:a16="http://schemas.microsoft.com/office/drawing/2014/main" id="{4E92CEA3-D059-F2A3-287B-CA13B496F244}"/>
-              </a:ext>
-            </a:extLst>
-          </p:cNvPr>
-          <p:cNvSpPr/>
-          <p:nvPr/>
-        </p:nvSpPr>
-        <p:spPr>
-          <a:xfrm>
-            <a:off x="7200900" y="2377440"/>
-            <a:ext cx="411480" cy="420624"/>
-          </a:xfrm>
-          <a:prstGeom prst="rightArrow">
-            <a:avLst/>
-          </a:prstGeom>
-        </p:spPr>
-        <p:style>
-          <a:lnRef idx="2">
-            <a:schemeClr val="accent1">
-              <a:shade val="15000"/>
-            </a:schemeClr>
-          </a:lnRef>
-          <a:fillRef idx="1">
-            <a:schemeClr val="accent1"/>
-          </a:fillRef>
-          <a:effectRef idx="0">
-            <a:schemeClr val="accent1"/>
-          </a:effectRef>
-          <a:fontRef idx="minor">
-            <a:schemeClr val="lt1"/>
-          </a:fontRef>
-        </p:style>
-        <p:txBody>
-          <a:bodyPr rtlCol="0" anchor="ctr"/>
-          <a:lstStyle/>
-          <a:p>
-            <a:pPr algn="ctr"/>
-            <a:endParaRPr lang="en-IN"/>
-          </a:p>
-        </p:txBody>
-      </p:sp>
-    </p:spTree>
-    <p:extLst>
-      <p:ext uri="{BB962C8B-B14F-4D97-AF65-F5344CB8AC3E}">
-        <p14:creationId xmlns:p14="http://schemas.microsoft.com/office/powerpoint/2010/main" val="1202009547"/>
-      </p:ext>
-    </p:extLst>
-  </p:cSld>
-  <p:clrMapOvr>
-    <a:masterClrMapping/>
-  </p:clrMapOvr>
-</p:sld>
-</file>
-
-<file path=ppt/slides/slide9.xml><?xml version="1.0" encoding="utf-8"?>
-<p:sld xmlns:a="http://schemas.openxmlformats.org/drawingml/2006/main" xmlns:r="http://schemas.openxmlformats.org/officeDocument/2006/relationships" xmlns:p="http://schemas.openxmlformats.org/presentationml/2006/main">
-  <p:cSld>
-    <p:spTree>
-      <p:nvGrpSpPr>
-        <p:cNvPr id="1" name="">
-          <a:extLst>
-            <a:ext uri="{FF2B5EF4-FFF2-40B4-BE49-F238E27FC236}">
               <a16:creationId xmlns:a16="http://schemas.microsoft.com/office/drawing/2014/main" id="{17A55DC5-7B47-CEE0-33C7-92ED936820D3}"/>
             </a:ext>
           </a:extLst>
@@ -7925,8 +7540,8 @@
           <a:p>
             <a:pPr algn="ctr"/>
             <a:r>
-              <a:rPr lang="en-US" sz="2400" dirty="0"/>
-              <a:t>Agents</a:t>
+              <a:rPr lang="en-US" sz="3200" dirty="0"/>
+              <a:t>Agent</a:t>
             </a:r>
           </a:p>
           <a:p>
@@ -8253,6 +7868,223 @@
     <p:extLst>
       <p:ext uri="{BB962C8B-B14F-4D97-AF65-F5344CB8AC3E}">
         <p14:creationId xmlns:p14="http://schemas.microsoft.com/office/powerpoint/2010/main" val="368663484"/>
+      </p:ext>
+    </p:extLst>
+  </p:cSld>
+  <p:clrMapOvr>
+    <a:masterClrMapping/>
+  </p:clrMapOvr>
+</p:sld>
+</file>
+
+<file path=ppt/slides/slide9.xml><?xml version="1.0" encoding="utf-8"?>
+<p:sld xmlns:a="http://schemas.openxmlformats.org/drawingml/2006/main" xmlns:r="http://schemas.openxmlformats.org/officeDocument/2006/relationships" xmlns:p="http://schemas.openxmlformats.org/presentationml/2006/main">
+  <p:cSld>
+    <p:spTree>
+      <p:nvGrpSpPr>
+        <p:cNvPr id="1" name="">
+          <a:extLst>
+            <a:ext uri="{FF2B5EF4-FFF2-40B4-BE49-F238E27FC236}">
+              <a16:creationId xmlns:a16="http://schemas.microsoft.com/office/drawing/2014/main" id="{728CE86D-EF25-800A-6BF1-CA6EE56C8528}"/>
+            </a:ext>
+          </a:extLst>
+        </p:cNvPr>
+        <p:cNvGrpSpPr/>
+        <p:nvPr/>
+      </p:nvGrpSpPr>
+      <p:grpSpPr>
+        <a:xfrm>
+          <a:off x="0" y="0"/>
+          <a:ext cx="0" cy="0"/>
+          <a:chOff x="0" y="0"/>
+          <a:chExt cx="0" cy="0"/>
+        </a:xfrm>
+      </p:grpSpPr>
+      <p:sp>
+        <p:nvSpPr>
+          <p:cNvPr id="3" name="TextBox 2">
+            <a:extLst>
+              <a:ext uri="{FF2B5EF4-FFF2-40B4-BE49-F238E27FC236}">
+                <a16:creationId xmlns:a16="http://schemas.microsoft.com/office/drawing/2014/main" id="{CA38D18B-AE90-95C0-C949-64200AEC9E22}"/>
+              </a:ext>
+            </a:extLst>
+          </p:cNvPr>
+          <p:cNvSpPr txBox="1"/>
+          <p:nvPr/>
+        </p:nvSpPr>
+        <p:spPr>
+          <a:xfrm>
+            <a:off x="228600" y="1012954"/>
+            <a:ext cx="11018520" cy="4401205"/>
+          </a:xfrm>
+          <a:prstGeom prst="rect">
+            <a:avLst/>
+          </a:prstGeom>
+          <a:noFill/>
+        </p:spPr>
+        <p:txBody>
+          <a:bodyPr wrap="square">
+            <a:spAutoFit/>
+          </a:bodyPr>
+          <a:lstStyle/>
+          <a:p>
+            <a:r>
+              <a:rPr lang="en-US" sz="2800" b="1" dirty="0">
+                <a:solidFill>
+                  <a:schemeClr val="accent6">
+                    <a:lumMod val="60000"/>
+                    <a:lumOff val="40000"/>
+                  </a:schemeClr>
+                </a:solidFill>
+              </a:rPr>
+              <a:t>Discussion for Class</a:t>
+            </a:r>
+          </a:p>
+          <a:p>
+            <a:endParaRPr lang="en-US" sz="2800" b="1" dirty="0">
+              <a:solidFill>
+                <a:schemeClr val="accent6">
+                  <a:lumMod val="60000"/>
+                  <a:lumOff val="40000"/>
+                </a:schemeClr>
+              </a:solidFill>
+            </a:endParaRPr>
+          </a:p>
+          <a:p>
+            <a:r>
+              <a:rPr lang="en-US" sz="2800" i="1" dirty="0">
+                <a:solidFill>
+                  <a:schemeClr val="accent6">
+                    <a:lumMod val="60000"/>
+                    <a:lumOff val="40000"/>
+                  </a:schemeClr>
+                </a:solidFill>
+              </a:rPr>
+              <a:t>"A bank deploys an autonomous agent that can </a:t>
+            </a:r>
+          </a:p>
+          <a:p>
+            <a:pPr marL="457200" indent="-457200">
+              <a:buFont typeface="Arial" panose="020B0604020202020204" pitchFamily="34" charset="0"/>
+              <a:buChar char="•"/>
+            </a:pPr>
+            <a:r>
+              <a:rPr lang="en-US" sz="2800" i="1" dirty="0">
+                <a:solidFill>
+                  <a:schemeClr val="accent6">
+                    <a:lumMod val="60000"/>
+                    <a:lumOff val="40000"/>
+                  </a:schemeClr>
+                </a:solidFill>
+              </a:rPr>
+              <a:t>access accounts, </a:t>
+            </a:r>
+          </a:p>
+          <a:p>
+            <a:pPr marL="457200" indent="-457200">
+              <a:buFont typeface="Arial" panose="020B0604020202020204" pitchFamily="34" charset="0"/>
+              <a:buChar char="•"/>
+            </a:pPr>
+            <a:r>
+              <a:rPr lang="en-US" sz="2800" i="1" dirty="0">
+                <a:solidFill>
+                  <a:schemeClr val="accent6">
+                    <a:lumMod val="60000"/>
+                    <a:lumOff val="40000"/>
+                  </a:schemeClr>
+                </a:solidFill>
+              </a:rPr>
+              <a:t>move money, and </a:t>
+            </a:r>
+          </a:p>
+          <a:p>
+            <a:pPr marL="457200" indent="-457200">
+              <a:buFont typeface="Arial" panose="020B0604020202020204" pitchFamily="34" charset="0"/>
+              <a:buChar char="•"/>
+            </a:pPr>
+            <a:r>
+              <a:rPr lang="en-US" sz="2800" i="1" dirty="0">
+                <a:solidFill>
+                  <a:schemeClr val="accent6">
+                    <a:lumMod val="60000"/>
+                    <a:lumOff val="40000"/>
+                  </a:schemeClr>
+                </a:solidFill>
+              </a:rPr>
+              <a:t>close disputes </a:t>
+            </a:r>
+          </a:p>
+          <a:p>
+            <a:r>
+              <a:rPr lang="en-US" sz="2800" i="1" dirty="0">
+                <a:solidFill>
+                  <a:schemeClr val="accent6">
+                    <a:lumMod val="60000"/>
+                    <a:lumOff val="40000"/>
+                  </a:schemeClr>
+                </a:solidFill>
+              </a:rPr>
+              <a:t>— all without a human approving each action. </a:t>
+            </a:r>
+          </a:p>
+          <a:p>
+            <a:endParaRPr lang="en-US" sz="2800" i="1" dirty="0">
+              <a:solidFill>
+                <a:schemeClr val="accent6">
+                  <a:lumMod val="60000"/>
+                  <a:lumOff val="40000"/>
+                </a:schemeClr>
+              </a:solidFill>
+            </a:endParaRPr>
+          </a:p>
+          <a:p>
+            <a:pPr marL="514350" indent="-514350">
+              <a:buFont typeface="+mj-lt"/>
+              <a:buAutoNum type="arabicPeriod"/>
+            </a:pPr>
+            <a:r>
+              <a:rPr lang="en-US" sz="2800" i="1" dirty="0">
+                <a:solidFill>
+                  <a:schemeClr val="accent6">
+                    <a:lumMod val="60000"/>
+                    <a:lumOff val="40000"/>
+                  </a:schemeClr>
+                </a:solidFill>
+              </a:rPr>
+              <a:t>What conditions would need to be true for you to trust that system ?</a:t>
+            </a:r>
+          </a:p>
+          <a:p>
+            <a:pPr marL="514350" indent="-514350">
+              <a:buFont typeface="+mj-lt"/>
+              <a:buAutoNum type="arabicPeriod"/>
+            </a:pPr>
+            <a:r>
+              <a:rPr lang="en-US" sz="2800" i="1" dirty="0">
+                <a:solidFill>
+                  <a:schemeClr val="accent6">
+                    <a:lumMod val="60000"/>
+                    <a:lumOff val="40000"/>
+                  </a:schemeClr>
+                </a:solidFill>
+              </a:rPr>
+              <a:t>What would make you distrust it ?"</a:t>
+            </a:r>
+            <a:endParaRPr lang="en-US" sz="2800" dirty="0">
+              <a:solidFill>
+                <a:schemeClr val="accent6">
+                  <a:lumMod val="60000"/>
+                  <a:lumOff val="40000"/>
+                </a:schemeClr>
+              </a:solidFill>
+            </a:endParaRPr>
+          </a:p>
+        </p:txBody>
+      </p:sp>
+    </p:spTree>
+    <p:extLst>
+      <p:ext uri="{BB962C8B-B14F-4D97-AF65-F5344CB8AC3E}">
+        <p14:creationId xmlns:p14="http://schemas.microsoft.com/office/powerpoint/2010/main" val="2206521416"/>
       </p:ext>
     </p:extLst>
   </p:cSld>

--- a/AgenticAI/1-Intro-To-AgenticAI/2_Agent_vs_Chatbot_Finance.pptx
+++ b/AgenticAI/1-Intro-To-AgenticAI/2_Agent_vs_Chatbot_Finance.pptx
@@ -5,22 +5,24 @@
     <p:sldMasterId id="2147483648" r:id="rId1"/>
   </p:sldMasterIdLst>
   <p:notesMasterIdLst>
-    <p:notesMasterId r:id="rId12"/>
+    <p:notesMasterId r:id="rId14"/>
   </p:notesMasterIdLst>
   <p:handoutMasterIdLst>
-    <p:handoutMasterId r:id="rId13"/>
+    <p:handoutMasterId r:id="rId15"/>
   </p:handoutMasterIdLst>
   <p:sldIdLst>
     <p:sldId id="257" r:id="rId2"/>
-    <p:sldId id="276" r:id="rId3"/>
-    <p:sldId id="277" r:id="rId4"/>
-    <p:sldId id="278" r:id="rId5"/>
-    <p:sldId id="284" r:id="rId6"/>
-    <p:sldId id="279" r:id="rId7"/>
-    <p:sldId id="280" r:id="rId8"/>
-    <p:sldId id="281" r:id="rId9"/>
-    <p:sldId id="282" r:id="rId10"/>
-    <p:sldId id="275" r:id="rId11"/>
+    <p:sldId id="286" r:id="rId3"/>
+    <p:sldId id="285" r:id="rId4"/>
+    <p:sldId id="276" r:id="rId5"/>
+    <p:sldId id="277" r:id="rId6"/>
+    <p:sldId id="278" r:id="rId7"/>
+    <p:sldId id="284" r:id="rId8"/>
+    <p:sldId id="279" r:id="rId9"/>
+    <p:sldId id="280" r:id="rId10"/>
+    <p:sldId id="281" r:id="rId11"/>
+    <p:sldId id="282" r:id="rId12"/>
+    <p:sldId id="275" r:id="rId13"/>
   </p:sldIdLst>
   <p:sldSz cx="12192000" cy="6858000"/>
   <p:notesSz cx="6858000" cy="9144000"/>
@@ -224,7 +226,7 @@
           <a:p>
             <a:fld id="{7BAEECA8-D063-486F-AE31-5020270C1449}" type="datetimeFigureOut">
               <a:rPr lang="en-US" smtClean="0"/>
-              <a:t>9/17/2026</a:t>
+              <a:t>9/24/2026</a:t>
             </a:fld>
             <a:endParaRPr lang="en-US"/>
           </a:p>
@@ -317,6 +319,62 @@
   </p:cSld>
   <p:clrMap bg1="lt1" tx1="dk1" bg2="lt2" tx2="dk2" accent1="accent1" accent2="accent2" accent3="accent3" accent4="accent4" accent5="accent5" accent6="accent6" hlink="hlink" folHlink="folHlink"/>
 </p:handoutMaster>
+</file>
+
+<file path=ppt/ink/ink1.xml><?xml version="1.0" encoding="utf-8"?>
+<inkml:ink xmlns:inkml="http://www.w3.org/2003/InkML">
+  <inkml:definitions>
+    <inkml:context xml:id="ctx0">
+      <inkml:inkSource xml:id="inkSrc0">
+        <inkml:traceFormat>
+          <inkml:channel name="X" type="integer" min="-2.14748E9" max="2.14748E9" units="cm"/>
+          <inkml:channel name="Y" type="integer" min="-2.14748E9" max="2.14748E9" units="cm"/>
+          <inkml:channel name="F" type="integer" max="32767" units="dev"/>
+        </inkml:traceFormat>
+        <inkml:channelProperties>
+          <inkml:channelProperty channel="X" name="resolution" value="1000" units="1/cm"/>
+          <inkml:channelProperty channel="Y" name="resolution" value="1000" units="1/cm"/>
+          <inkml:channelProperty channel="F" name="resolution" value="0" units="1/dev"/>
+        </inkml:channelProperties>
+      </inkml:inkSource>
+      <inkml:timestamp xml:id="ts0" timeString="2026-09-24T02:08:22.421"/>
+    </inkml:context>
+    <inkml:brush xml:id="br0">
+      <inkml:brushProperty name="width" value="0.1" units="cm"/>
+      <inkml:brushProperty name="height" value="0.1" units="cm"/>
+      <inkml:brushProperty name="color" value="#FFC114"/>
+    </inkml:brush>
+  </inkml:definitions>
+  <inkml:trace contextRef="#ctx0" brushRef="#br0">24 253 24575,'-1'17'0,"-1"-1"0,-7 32 0,6-38 0,1 0 0,-1 0 0,2 1 0,0-1 0,0 1 0,1-1 0,0 1 0,1-1 0,2 15 0,-2-22 0,0-1 0,-1 0 0,1 0 0,0 1 0,1-1 0,-1 0 0,0 0 0,0 0 0,1 0 0,0 0 0,-1-1 0,1 1 0,0 0 0,0-1 0,0 1 0,0-1 0,0 0 0,0 1 0,0-1 0,0 0 0,0 0 0,1-1 0,-1 1 0,0 0 0,1-1 0,-1 1 0,1-1 0,-1 0 0,0 0 0,1 0 0,-1 0 0,1 0 0,-1 0 0,1-1 0,-1 1 0,0-1 0,1 0 0,-1 0 0,3-1 0,9-3 0,0-1 0,0-1 0,-1 0 0,24-17 0,89-74 0,-84 62 0,2 2 0,73-43 0,-16 25-28,113-68-1309,-182 98-5489</inkml:trace>
+</inkml:ink>
+</file>
+
+<file path=ppt/ink/ink2.xml><?xml version="1.0" encoding="utf-8"?>
+<inkml:ink xmlns:inkml="http://www.w3.org/2003/InkML">
+  <inkml:definitions>
+    <inkml:context xml:id="ctx0">
+      <inkml:inkSource xml:id="inkSrc0">
+        <inkml:traceFormat>
+          <inkml:channel name="X" type="integer" min="-2.14748E9" max="2.14748E9" units="cm"/>
+          <inkml:channel name="Y" type="integer" min="-2.14748E9" max="2.14748E9" units="cm"/>
+          <inkml:channel name="F" type="integer" max="32767" units="dev"/>
+        </inkml:traceFormat>
+        <inkml:channelProperties>
+          <inkml:channelProperty channel="X" name="resolution" value="1000" units="1/cm"/>
+          <inkml:channelProperty channel="Y" name="resolution" value="1000" units="1/cm"/>
+          <inkml:channelProperty channel="F" name="resolution" value="0" units="1/dev"/>
+        </inkml:channelProperties>
+      </inkml:inkSource>
+      <inkml:timestamp xml:id="ts0" timeString="2026-09-24T02:08:32.538"/>
+    </inkml:context>
+    <inkml:brush xml:id="br0">
+      <inkml:brushProperty name="width" value="0.1" units="cm"/>
+      <inkml:brushProperty name="height" value="0.1" units="cm"/>
+      <inkml:brushProperty name="color" value="#FFC114"/>
+    </inkml:brush>
+  </inkml:definitions>
+  <inkml:trace contextRef="#ctx0" brushRef="#br0">1 79 24575,'0'-2'0,"0"0"0,0 0 0,1 0 0,-1 0 0,1-1 0,-1 1 0,1 0 0,0 0 0,0 0 0,0 0 0,0 0 0,0 0 0,0 1 0,0-1 0,1 0 0,-1 1 0,1-1 0,-1 0 0,3 0 0,1-2 0,0 1 0,0 0 0,0 0 0,0 0 0,1 1 0,11-3 0,2 0 0,0 1 0,1 1 0,25 0 0,424 1 0,-219 5 0,1731-3-1365,-1959 0-5461</inkml:trace>
+</inkml:ink>
 </file>
 
 <file path=ppt/notesMasters/notesMaster1.xml><?xml version="1.0" encoding="utf-8"?>
@@ -401,7 +459,7 @@
           <a:p>
             <a:fld id="{CB233BD1-3BA8-448D-9D08-7846095EA517}" type="datetimeFigureOut">
               <a:rPr lang="en-US" smtClean="0"/>
-              <a:t>9/17/2026</a:t>
+              <a:t>9/24/2026</a:t>
             </a:fld>
             <a:endParaRPr lang="en-US"/>
           </a:p>
@@ -815,7 +873,7 @@
           <a:p>
             <a:fld id="{6383FAE1-13DE-4511-8C1B-C8AFB720664C}" type="datetimeFigureOut">
               <a:rPr lang="en-US" smtClean="0"/>
-              <a:t>9/17/2026</a:t>
+              <a:t>9/24/2026</a:t>
             </a:fld>
             <a:endParaRPr lang="en-US"/>
           </a:p>
@@ -1013,7 +1071,7 @@
           <a:p>
             <a:fld id="{6383FAE1-13DE-4511-8C1B-C8AFB720664C}" type="datetimeFigureOut">
               <a:rPr lang="en-US" smtClean="0"/>
-              <a:t>9/17/2026</a:t>
+              <a:t>9/24/2026</a:t>
             </a:fld>
             <a:endParaRPr lang="en-US"/>
           </a:p>
@@ -1221,7 +1279,7 @@
           <a:p>
             <a:fld id="{6383FAE1-13DE-4511-8C1B-C8AFB720664C}" type="datetimeFigureOut">
               <a:rPr lang="en-US" smtClean="0"/>
-              <a:t>9/17/2026</a:t>
+              <a:t>9/24/2026</a:t>
             </a:fld>
             <a:endParaRPr lang="en-US"/>
           </a:p>
@@ -1419,7 +1477,7 @@
           <a:p>
             <a:fld id="{6383FAE1-13DE-4511-8C1B-C8AFB720664C}" type="datetimeFigureOut">
               <a:rPr lang="en-US" smtClean="0"/>
-              <a:t>9/17/2026</a:t>
+              <a:t>9/24/2026</a:t>
             </a:fld>
             <a:endParaRPr lang="en-US"/>
           </a:p>
@@ -1694,7 +1752,7 @@
           <a:p>
             <a:fld id="{6383FAE1-13DE-4511-8C1B-C8AFB720664C}" type="datetimeFigureOut">
               <a:rPr lang="en-US" smtClean="0"/>
-              <a:t>9/17/2026</a:t>
+              <a:t>9/24/2026</a:t>
             </a:fld>
             <a:endParaRPr lang="en-US"/>
           </a:p>
@@ -1959,7 +2017,7 @@
           <a:p>
             <a:fld id="{6383FAE1-13DE-4511-8C1B-C8AFB720664C}" type="datetimeFigureOut">
               <a:rPr lang="en-US" smtClean="0"/>
-              <a:t>9/17/2026</a:t>
+              <a:t>9/24/2026</a:t>
             </a:fld>
             <a:endParaRPr lang="en-US"/>
           </a:p>
@@ -2371,7 +2429,7 @@
           <a:p>
             <a:fld id="{6383FAE1-13DE-4511-8C1B-C8AFB720664C}" type="datetimeFigureOut">
               <a:rPr lang="en-US" smtClean="0"/>
-              <a:t>9/17/2026</a:t>
+              <a:t>9/24/2026</a:t>
             </a:fld>
             <a:endParaRPr lang="en-US"/>
           </a:p>
@@ -2512,7 +2570,7 @@
           <a:p>
             <a:fld id="{6383FAE1-13DE-4511-8C1B-C8AFB720664C}" type="datetimeFigureOut">
               <a:rPr lang="en-US" smtClean="0"/>
-              <a:t>9/17/2026</a:t>
+              <a:t>9/24/2026</a:t>
             </a:fld>
             <a:endParaRPr lang="en-US"/>
           </a:p>
@@ -2625,7 +2683,7 @@
           <a:p>
             <a:fld id="{6383FAE1-13DE-4511-8C1B-C8AFB720664C}" type="datetimeFigureOut">
               <a:rPr lang="en-US" smtClean="0"/>
-              <a:t>9/17/2026</a:t>
+              <a:t>9/24/2026</a:t>
             </a:fld>
             <a:endParaRPr lang="en-US"/>
           </a:p>
@@ -2936,7 +2994,7 @@
           <a:p>
             <a:fld id="{6383FAE1-13DE-4511-8C1B-C8AFB720664C}" type="datetimeFigureOut">
               <a:rPr lang="en-US" smtClean="0"/>
-              <a:t>9/17/2026</a:t>
+              <a:t>9/24/2026</a:t>
             </a:fld>
             <a:endParaRPr lang="en-US"/>
           </a:p>
@@ -3227,7 +3285,7 @@
           <a:p>
             <a:fld id="{6383FAE1-13DE-4511-8C1B-C8AFB720664C}" type="datetimeFigureOut">
               <a:rPr lang="en-US" smtClean="0"/>
-              <a:t>9/17/2026</a:t>
+              <a:t>9/24/2026</a:t>
             </a:fld>
             <a:endParaRPr lang="en-US"/>
           </a:p>
@@ -3471,7 +3529,7 @@
           <a:p>
             <a:fld id="{6383FAE1-13DE-4511-8C1B-C8AFB720664C}" type="datetimeFigureOut">
               <a:rPr lang="en-US" smtClean="0"/>
-              <a:t>9/17/2026</a:t>
+              <a:t>9/24/2026</a:t>
             </a:fld>
             <a:endParaRPr lang="en-US"/>
           </a:p>
@@ -4030,173 +4088,6 @@
           <a:chExt cx="0" cy="0"/>
         </a:xfrm>
       </p:grpSpPr>
-      <p:sp>
-        <p:nvSpPr>
-          <p:cNvPr id="9" name="TextBox 8">
-            <a:extLst>
-              <a:ext uri="{FF2B5EF4-FFF2-40B4-BE49-F238E27FC236}">
-                <a16:creationId xmlns:a16="http://schemas.microsoft.com/office/drawing/2014/main" id="{68EEAE26-EEC1-43C8-1E10-2F8BA9771177}"/>
-              </a:ext>
-            </a:extLst>
-          </p:cNvPr>
-          <p:cNvSpPr txBox="1"/>
-          <p:nvPr/>
-        </p:nvSpPr>
-        <p:spPr>
-          <a:xfrm>
-            <a:off x="477520" y="1003776"/>
-            <a:ext cx="10292080" cy="3046988"/>
-          </a:xfrm>
-          <a:prstGeom prst="rect">
-            <a:avLst/>
-          </a:prstGeom>
-          <a:noFill/>
-        </p:spPr>
-        <p:txBody>
-          <a:bodyPr wrap="square">
-            <a:spAutoFit/>
-          </a:bodyPr>
-          <a:lstStyle/>
-          <a:p>
-            <a:pPr>
-              <a:buNone/>
-            </a:pPr>
-            <a:r>
-              <a:rPr lang="en-US" sz="2400" dirty="0">
-                <a:solidFill>
-                  <a:schemeClr val="accent6">
-                    <a:lumMod val="60000"/>
-                    <a:lumOff val="40000"/>
-                  </a:schemeClr>
-                </a:solidFill>
-              </a:rPr>
-              <a:t>The Three Generations: </a:t>
-            </a:r>
-          </a:p>
-          <a:p>
-            <a:pPr>
-              <a:buNone/>
-            </a:pPr>
-            <a:endParaRPr lang="en-US" sz="2400" dirty="0">
-              <a:solidFill>
-                <a:schemeClr val="accent6">
-                  <a:lumMod val="60000"/>
-                  <a:lumOff val="40000"/>
-                </a:schemeClr>
-              </a:solidFill>
-            </a:endParaRPr>
-          </a:p>
-          <a:p>
-            <a:pPr>
-              <a:buNone/>
-            </a:pPr>
-            <a:r>
-              <a:rPr lang="en-US" sz="2400" dirty="0">
-                <a:solidFill>
-                  <a:schemeClr val="accent6">
-                    <a:lumMod val="60000"/>
-                    <a:lumOff val="40000"/>
-                  </a:schemeClr>
-                </a:solidFill>
-              </a:rPr>
-              <a:t>Rule-Based Bot → LLM Chatbot → Autonomous Agent</a:t>
-            </a:r>
-            <a:endParaRPr lang="en-US" sz="2400" i="1" dirty="0">
-              <a:solidFill>
-                <a:schemeClr val="accent6">
-                  <a:lumMod val="60000"/>
-                  <a:lumOff val="40000"/>
-                </a:schemeClr>
-              </a:solidFill>
-            </a:endParaRPr>
-          </a:p>
-          <a:p>
-            <a:pPr>
-              <a:buNone/>
-            </a:pPr>
-            <a:endParaRPr lang="en-US" sz="2400" i="1" dirty="0">
-              <a:solidFill>
-                <a:schemeClr val="accent6">
-                  <a:lumMod val="60000"/>
-                  <a:lumOff val="40000"/>
-                </a:schemeClr>
-              </a:solidFill>
-            </a:endParaRPr>
-          </a:p>
-          <a:p>
-            <a:pPr>
-              <a:buNone/>
-            </a:pPr>
-            <a:endParaRPr lang="en-US" sz="2400" i="1" dirty="0">
-              <a:solidFill>
-                <a:schemeClr val="accent6">
-                  <a:lumMod val="60000"/>
-                  <a:lumOff val="40000"/>
-                </a:schemeClr>
-              </a:solidFill>
-            </a:endParaRPr>
-          </a:p>
-          <a:p>
-            <a:pPr>
-              <a:buNone/>
-            </a:pPr>
-            <a:r>
-              <a:rPr lang="en-US" sz="2400" i="1" dirty="0">
-                <a:solidFill>
-                  <a:schemeClr val="accent6">
-                    <a:lumMod val="60000"/>
-                    <a:lumOff val="40000"/>
-                  </a:schemeClr>
-                </a:solidFill>
-              </a:rPr>
-              <a:t>"When a customer says </a:t>
-            </a:r>
-          </a:p>
-          <a:p>
-            <a:pPr>
-              <a:buNone/>
-            </a:pPr>
-            <a:r>
-              <a:rPr lang="en-US" sz="2400" i="1" dirty="0">
-                <a:solidFill>
-                  <a:schemeClr val="accent6">
-                    <a:lumMod val="60000"/>
-                    <a:lumOff val="40000"/>
-                  </a:schemeClr>
-                </a:solidFill>
-              </a:rPr>
-              <a:t>'I think someone hacked my account’ </a:t>
-            </a:r>
-          </a:p>
-          <a:p>
-            <a:pPr>
-              <a:buNone/>
-            </a:pPr>
-            <a:r>
-              <a:rPr lang="en-US" sz="2400" i="1" dirty="0">
-                <a:solidFill>
-                  <a:schemeClr val="accent6">
-                    <a:lumMod val="60000"/>
-                    <a:lumOff val="40000"/>
-                  </a:schemeClr>
-                </a:solidFill>
-              </a:rPr>
-              <a:t>— what does each system actually do?"</a:t>
-            </a:r>
-            <a:r>
-              <a:rPr lang="en-US" sz="2400" dirty="0">
-                <a:solidFill>
-                  <a:schemeClr val="accent6">
-                    <a:lumMod val="60000"/>
-                    <a:lumOff val="40000"/>
-                  </a:schemeClr>
-                </a:solidFill>
-              </a:rPr>
-              <a:t> </a:t>
-            </a:r>
-          </a:p>
-        </p:txBody>
-      </p:sp>
     </p:spTree>
     <p:extLst>
       <p:ext uri="{BB962C8B-B14F-4D97-AF65-F5344CB8AC3E}">
@@ -4211,6 +4102,731 @@
 </file>
 
 <file path=ppt/slides/slide10.xml><?xml version="1.0" encoding="utf-8"?>
+<p:sld xmlns:a="http://schemas.openxmlformats.org/drawingml/2006/main" xmlns:r="http://schemas.openxmlformats.org/officeDocument/2006/relationships" xmlns:p="http://schemas.openxmlformats.org/presentationml/2006/main">
+  <p:cSld>
+    <p:spTree>
+      <p:nvGrpSpPr>
+        <p:cNvPr id="1" name="">
+          <a:extLst>
+            <a:ext uri="{FF2B5EF4-FFF2-40B4-BE49-F238E27FC236}">
+              <a16:creationId xmlns:a16="http://schemas.microsoft.com/office/drawing/2014/main" id="{17A55DC5-7B47-CEE0-33C7-92ED936820D3}"/>
+            </a:ext>
+          </a:extLst>
+        </p:cNvPr>
+        <p:cNvGrpSpPr/>
+        <p:nvPr/>
+      </p:nvGrpSpPr>
+      <p:grpSpPr>
+        <a:xfrm>
+          <a:off x="0" y="0"/>
+          <a:ext cx="0" cy="0"/>
+          <a:chOff x="0" y="0"/>
+          <a:chExt cx="0" cy="0"/>
+        </a:xfrm>
+      </p:grpSpPr>
+      <p:sp>
+        <p:nvSpPr>
+          <p:cNvPr id="3" name="TextBox 2">
+            <a:extLst>
+              <a:ext uri="{FF2B5EF4-FFF2-40B4-BE49-F238E27FC236}">
+                <a16:creationId xmlns:a16="http://schemas.microsoft.com/office/drawing/2014/main" id="{D8FBAEF6-BDD8-6A48-289F-B48137D4B61E}"/>
+              </a:ext>
+            </a:extLst>
+          </p:cNvPr>
+          <p:cNvSpPr txBox="1"/>
+          <p:nvPr/>
+        </p:nvSpPr>
+        <p:spPr>
+          <a:xfrm>
+            <a:off x="228600" y="272290"/>
+            <a:ext cx="11430000" cy="1815882"/>
+          </a:xfrm>
+          <a:prstGeom prst="rect">
+            <a:avLst/>
+          </a:prstGeom>
+          <a:noFill/>
+        </p:spPr>
+        <p:txBody>
+          <a:bodyPr wrap="square">
+            <a:spAutoFit/>
+          </a:bodyPr>
+          <a:lstStyle/>
+          <a:p>
+            <a:pPr>
+              <a:buNone/>
+            </a:pPr>
+            <a:r>
+              <a:rPr lang="en-US" sz="2800" dirty="0">
+                <a:solidFill>
+                  <a:schemeClr val="accent6">
+                    <a:lumMod val="60000"/>
+                    <a:lumOff val="40000"/>
+                  </a:schemeClr>
+                </a:solidFill>
+              </a:rPr>
+              <a:t>AI agent can </a:t>
+            </a:r>
+            <a:r>
+              <a:rPr lang="en-US" sz="2800" b="1" i="1" u="sng" dirty="0">
+                <a:solidFill>
+                  <a:schemeClr val="accent6">
+                    <a:lumMod val="60000"/>
+                    <a:lumOff val="40000"/>
+                  </a:schemeClr>
+                </a:solidFill>
+              </a:rPr>
+              <a:t>act</a:t>
+            </a:r>
+            <a:r>
+              <a:rPr lang="en-US" sz="2800" dirty="0">
+                <a:solidFill>
+                  <a:schemeClr val="accent6">
+                    <a:lumMod val="60000"/>
+                    <a:lumOff val="40000"/>
+                  </a:schemeClr>
+                </a:solidFill>
+              </a:rPr>
+              <a:t>. </a:t>
+            </a:r>
+          </a:p>
+          <a:p>
+            <a:pPr>
+              <a:buNone/>
+            </a:pPr>
+            <a:r>
+              <a:rPr lang="en-US" sz="2800" dirty="0">
+                <a:solidFill>
+                  <a:schemeClr val="accent6">
+                    <a:lumMod val="60000"/>
+                    <a:lumOff val="40000"/>
+                  </a:schemeClr>
+                </a:solidFill>
+              </a:rPr>
+              <a:t>It receives a goal, breaks it into steps, uses </a:t>
+            </a:r>
+            <a:r>
+              <a:rPr lang="en-US" sz="2800" b="1" i="1" dirty="0">
+                <a:solidFill>
+                  <a:schemeClr val="accent6">
+                    <a:lumMod val="60000"/>
+                    <a:lumOff val="40000"/>
+                  </a:schemeClr>
+                </a:solidFill>
+              </a:rPr>
+              <a:t>tools</a:t>
+            </a:r>
+            <a:r>
+              <a:rPr lang="en-US" sz="2800" dirty="0">
+                <a:solidFill>
+                  <a:schemeClr val="accent6">
+                    <a:lumMod val="60000"/>
+                    <a:lumOff val="40000"/>
+                  </a:schemeClr>
+                </a:solidFill>
+              </a:rPr>
+              <a:t> (web search, code execution, APIs), checks its own output, and iterates — all without a human driving every step. </a:t>
+            </a:r>
+          </a:p>
+        </p:txBody>
+      </p:sp>
+      <p:sp>
+        <p:nvSpPr>
+          <p:cNvPr id="4" name="Rectangle: Rounded Corners 3">
+            <a:extLst>
+              <a:ext uri="{FF2B5EF4-FFF2-40B4-BE49-F238E27FC236}">
+                <a16:creationId xmlns:a16="http://schemas.microsoft.com/office/drawing/2014/main" id="{3573C5F2-CF75-13AC-9758-9C3197737211}"/>
+              </a:ext>
+            </a:extLst>
+          </p:cNvPr>
+          <p:cNvSpPr/>
+          <p:nvPr/>
+        </p:nvSpPr>
+        <p:spPr>
+          <a:xfrm>
+            <a:off x="2587752" y="3337560"/>
+            <a:ext cx="3150108" cy="1353312"/>
+          </a:xfrm>
+          <a:prstGeom prst="roundRect">
+            <a:avLst/>
+          </a:prstGeom>
+        </p:spPr>
+        <p:style>
+          <a:lnRef idx="2">
+            <a:schemeClr val="accent1">
+              <a:shade val="15000"/>
+            </a:schemeClr>
+          </a:lnRef>
+          <a:fillRef idx="1">
+            <a:schemeClr val="accent1"/>
+          </a:fillRef>
+          <a:effectRef idx="0">
+            <a:schemeClr val="accent1"/>
+          </a:effectRef>
+          <a:fontRef idx="minor">
+            <a:schemeClr val="lt1"/>
+          </a:fontRef>
+        </p:style>
+        <p:txBody>
+          <a:bodyPr rtlCol="0" anchor="ctr"/>
+          <a:lstStyle/>
+          <a:p>
+            <a:pPr algn="ctr"/>
+            <a:r>
+              <a:rPr lang="en-US" sz="3200" dirty="0"/>
+              <a:t>Agent</a:t>
+            </a:r>
+          </a:p>
+          <a:p>
+            <a:pPr algn="ctr"/>
+            <a:r>
+              <a:rPr lang="en-US" sz="2400" dirty="0"/>
+              <a:t>LLM + Tools + Memory </a:t>
+            </a:r>
+          </a:p>
+        </p:txBody>
+      </p:sp>
+      <p:sp>
+        <p:nvSpPr>
+          <p:cNvPr id="6" name="TextBox 5">
+            <a:extLst>
+              <a:ext uri="{FF2B5EF4-FFF2-40B4-BE49-F238E27FC236}">
+                <a16:creationId xmlns:a16="http://schemas.microsoft.com/office/drawing/2014/main" id="{B65B9301-16F9-0E28-0264-033798AFB8D5}"/>
+              </a:ext>
+            </a:extLst>
+          </p:cNvPr>
+          <p:cNvSpPr txBox="1"/>
+          <p:nvPr/>
+        </p:nvSpPr>
+        <p:spPr>
+          <a:xfrm>
+            <a:off x="228600" y="3629160"/>
+            <a:ext cx="1636776" cy="461665"/>
+          </a:xfrm>
+          <a:prstGeom prst="rect">
+            <a:avLst/>
+          </a:prstGeom>
+          <a:noFill/>
+        </p:spPr>
+        <p:txBody>
+          <a:bodyPr wrap="square">
+            <a:spAutoFit/>
+          </a:bodyPr>
+          <a:lstStyle/>
+          <a:p>
+            <a:r>
+              <a:rPr lang="en-US" sz="2400" dirty="0">
+                <a:solidFill>
+                  <a:schemeClr val="accent4">
+                    <a:lumMod val="60000"/>
+                    <a:lumOff val="40000"/>
+                  </a:schemeClr>
+                </a:solidFill>
+              </a:rPr>
+              <a:t>Goal / Task</a:t>
+            </a:r>
+          </a:p>
+        </p:txBody>
+      </p:sp>
+      <p:sp>
+        <p:nvSpPr>
+          <p:cNvPr id="8" name="TextBox 7">
+            <a:extLst>
+              <a:ext uri="{FF2B5EF4-FFF2-40B4-BE49-F238E27FC236}">
+                <a16:creationId xmlns:a16="http://schemas.microsoft.com/office/drawing/2014/main" id="{B2ACE0F2-8DB3-2B41-6CDB-8272422C3491}"/>
+              </a:ext>
+            </a:extLst>
+          </p:cNvPr>
+          <p:cNvSpPr txBox="1"/>
+          <p:nvPr/>
+        </p:nvSpPr>
+        <p:spPr>
+          <a:xfrm>
+            <a:off x="2433828" y="4769829"/>
+            <a:ext cx="4005072" cy="461665"/>
+          </a:xfrm>
+          <a:prstGeom prst="rect">
+            <a:avLst/>
+          </a:prstGeom>
+          <a:noFill/>
+        </p:spPr>
+        <p:txBody>
+          <a:bodyPr wrap="square">
+            <a:spAutoFit/>
+          </a:bodyPr>
+          <a:lstStyle/>
+          <a:p>
+            <a:r>
+              <a:rPr lang="en-US" sz="2400" dirty="0">
+                <a:solidFill>
+                  <a:schemeClr val="accent4">
+                    <a:lumMod val="60000"/>
+                    <a:lumOff val="40000"/>
+                  </a:schemeClr>
+                </a:solidFill>
+              </a:rPr>
+              <a:t>Breaks task into smaller tasks</a:t>
+            </a:r>
+          </a:p>
+        </p:txBody>
+      </p:sp>
+      <p:sp>
+        <p:nvSpPr>
+          <p:cNvPr id="10" name="Rectangle: Rounded Corners 9">
+            <a:extLst>
+              <a:ext uri="{FF2B5EF4-FFF2-40B4-BE49-F238E27FC236}">
+                <a16:creationId xmlns:a16="http://schemas.microsoft.com/office/drawing/2014/main" id="{DF91DF13-EF5F-E320-06B9-129EFA7C3541}"/>
+              </a:ext>
+            </a:extLst>
+          </p:cNvPr>
+          <p:cNvSpPr/>
+          <p:nvPr/>
+        </p:nvSpPr>
+        <p:spPr>
+          <a:xfrm>
+            <a:off x="2894076" y="2291120"/>
+            <a:ext cx="2679192" cy="523220"/>
+          </a:xfrm>
+          <a:prstGeom prst="roundRect">
+            <a:avLst/>
+          </a:prstGeom>
+        </p:spPr>
+        <p:style>
+          <a:lnRef idx="1">
+            <a:schemeClr val="accent2"/>
+          </a:lnRef>
+          <a:fillRef idx="2">
+            <a:schemeClr val="accent2"/>
+          </a:fillRef>
+          <a:effectRef idx="1">
+            <a:schemeClr val="accent2"/>
+          </a:effectRef>
+          <a:fontRef idx="minor">
+            <a:schemeClr val="dk1"/>
+          </a:fontRef>
+        </p:style>
+        <p:txBody>
+          <a:bodyPr rtlCol="0" anchor="ctr"/>
+          <a:lstStyle/>
+          <a:p>
+            <a:pPr algn="ctr"/>
+            <a:r>
+              <a:rPr lang="en-US" dirty="0"/>
+              <a:t>Web search, Code Execution, API call</a:t>
+            </a:r>
+          </a:p>
+        </p:txBody>
+      </p:sp>
+      <p:sp>
+        <p:nvSpPr>
+          <p:cNvPr id="12" name="Arrow: Up-Down 11">
+            <a:extLst>
+              <a:ext uri="{FF2B5EF4-FFF2-40B4-BE49-F238E27FC236}">
+                <a16:creationId xmlns:a16="http://schemas.microsoft.com/office/drawing/2014/main" id="{53108634-64DD-37B1-6296-D04CE227F2A8}"/>
+              </a:ext>
+            </a:extLst>
+          </p:cNvPr>
+          <p:cNvSpPr/>
+          <p:nvPr/>
+        </p:nvSpPr>
+        <p:spPr>
+          <a:xfrm>
+            <a:off x="3944112" y="2814340"/>
+            <a:ext cx="374904" cy="523220"/>
+          </a:xfrm>
+          <a:prstGeom prst="upDownArrow">
+            <a:avLst/>
+          </a:prstGeom>
+        </p:spPr>
+        <p:style>
+          <a:lnRef idx="2">
+            <a:schemeClr val="accent1">
+              <a:shade val="15000"/>
+            </a:schemeClr>
+          </a:lnRef>
+          <a:fillRef idx="1">
+            <a:schemeClr val="accent1"/>
+          </a:fillRef>
+          <a:effectRef idx="0">
+            <a:schemeClr val="accent1"/>
+          </a:effectRef>
+          <a:fontRef idx="minor">
+            <a:schemeClr val="lt1"/>
+          </a:fontRef>
+        </p:style>
+        <p:txBody>
+          <a:bodyPr rtlCol="0" anchor="ctr"/>
+          <a:lstStyle/>
+          <a:p>
+            <a:pPr algn="ctr"/>
+            <a:endParaRPr lang="en-IN"/>
+          </a:p>
+        </p:txBody>
+      </p:sp>
+      <p:sp>
+        <p:nvSpPr>
+          <p:cNvPr id="16" name="TextBox 15">
+            <a:extLst>
+              <a:ext uri="{FF2B5EF4-FFF2-40B4-BE49-F238E27FC236}">
+                <a16:creationId xmlns:a16="http://schemas.microsoft.com/office/drawing/2014/main" id="{DA34CF6C-C843-7EB7-C0A9-7A1580270165}"/>
+              </a:ext>
+            </a:extLst>
+          </p:cNvPr>
+          <p:cNvSpPr txBox="1"/>
+          <p:nvPr/>
+        </p:nvSpPr>
+        <p:spPr>
+          <a:xfrm>
+            <a:off x="6306312" y="3629160"/>
+            <a:ext cx="1636776" cy="461665"/>
+          </a:xfrm>
+          <a:prstGeom prst="rect">
+            <a:avLst/>
+          </a:prstGeom>
+          <a:noFill/>
+        </p:spPr>
+        <p:txBody>
+          <a:bodyPr wrap="square">
+            <a:spAutoFit/>
+          </a:bodyPr>
+          <a:lstStyle/>
+          <a:p>
+            <a:r>
+              <a:rPr lang="en-US" sz="2400" dirty="0">
+                <a:solidFill>
+                  <a:schemeClr val="accent4">
+                    <a:lumMod val="60000"/>
+                    <a:lumOff val="40000"/>
+                  </a:schemeClr>
+                </a:solidFill>
+              </a:rPr>
+              <a:t>Task done</a:t>
+            </a:r>
+          </a:p>
+        </p:txBody>
+      </p:sp>
+      <p:sp>
+        <p:nvSpPr>
+          <p:cNvPr id="17" name="Arrow: Right 16">
+            <a:extLst>
+              <a:ext uri="{FF2B5EF4-FFF2-40B4-BE49-F238E27FC236}">
+                <a16:creationId xmlns:a16="http://schemas.microsoft.com/office/drawing/2014/main" id="{5852A351-D286-117B-92DB-57672AA04D2A}"/>
+              </a:ext>
+            </a:extLst>
+          </p:cNvPr>
+          <p:cNvSpPr/>
+          <p:nvPr/>
+        </p:nvSpPr>
+        <p:spPr>
+          <a:xfrm>
+            <a:off x="1865376" y="3629160"/>
+            <a:ext cx="568452" cy="461665"/>
+          </a:xfrm>
+          <a:prstGeom prst="rightArrow">
+            <a:avLst/>
+          </a:prstGeom>
+        </p:spPr>
+        <p:style>
+          <a:lnRef idx="2">
+            <a:schemeClr val="accent1">
+              <a:shade val="15000"/>
+            </a:schemeClr>
+          </a:lnRef>
+          <a:fillRef idx="1">
+            <a:schemeClr val="accent1"/>
+          </a:fillRef>
+          <a:effectRef idx="0">
+            <a:schemeClr val="accent1"/>
+          </a:effectRef>
+          <a:fontRef idx="minor">
+            <a:schemeClr val="lt1"/>
+          </a:fontRef>
+        </p:style>
+        <p:txBody>
+          <a:bodyPr rtlCol="0" anchor="ctr"/>
+          <a:lstStyle/>
+          <a:p>
+            <a:pPr algn="ctr"/>
+            <a:endParaRPr lang="en-IN"/>
+          </a:p>
+        </p:txBody>
+      </p:sp>
+      <p:sp>
+        <p:nvSpPr>
+          <p:cNvPr id="19" name="Arrow: Right 18">
+            <a:extLst>
+              <a:ext uri="{FF2B5EF4-FFF2-40B4-BE49-F238E27FC236}">
+                <a16:creationId xmlns:a16="http://schemas.microsoft.com/office/drawing/2014/main" id="{00E04D5F-6F35-4088-C77E-17F290D1E3DA}"/>
+              </a:ext>
+            </a:extLst>
+          </p:cNvPr>
+          <p:cNvSpPr/>
+          <p:nvPr/>
+        </p:nvSpPr>
+        <p:spPr>
+          <a:xfrm>
+            <a:off x="5775960" y="3629160"/>
+            <a:ext cx="568452" cy="461665"/>
+          </a:xfrm>
+          <a:prstGeom prst="rightArrow">
+            <a:avLst/>
+          </a:prstGeom>
+        </p:spPr>
+        <p:style>
+          <a:lnRef idx="2">
+            <a:schemeClr val="accent1">
+              <a:shade val="15000"/>
+            </a:schemeClr>
+          </a:lnRef>
+          <a:fillRef idx="1">
+            <a:schemeClr val="accent1"/>
+          </a:fillRef>
+          <a:effectRef idx="0">
+            <a:schemeClr val="accent1"/>
+          </a:effectRef>
+          <a:fontRef idx="minor">
+            <a:schemeClr val="lt1"/>
+          </a:fontRef>
+        </p:style>
+        <p:txBody>
+          <a:bodyPr rtlCol="0" anchor="ctr"/>
+          <a:lstStyle/>
+          <a:p>
+            <a:pPr algn="ctr"/>
+            <a:endParaRPr lang="en-IN"/>
+          </a:p>
+        </p:txBody>
+      </p:sp>
+    </p:spTree>
+    <p:extLst>
+      <p:ext uri="{BB962C8B-B14F-4D97-AF65-F5344CB8AC3E}">
+        <p14:creationId xmlns:p14="http://schemas.microsoft.com/office/powerpoint/2010/main" val="368663484"/>
+      </p:ext>
+    </p:extLst>
+  </p:cSld>
+  <p:clrMapOvr>
+    <a:masterClrMapping/>
+  </p:clrMapOvr>
+</p:sld>
+</file>
+
+<file path=ppt/slides/slide11.xml><?xml version="1.0" encoding="utf-8"?>
+<p:sld xmlns:a="http://schemas.openxmlformats.org/drawingml/2006/main" xmlns:r="http://schemas.openxmlformats.org/officeDocument/2006/relationships" xmlns:p="http://schemas.openxmlformats.org/presentationml/2006/main">
+  <p:cSld>
+    <p:spTree>
+      <p:nvGrpSpPr>
+        <p:cNvPr id="1" name="">
+          <a:extLst>
+            <a:ext uri="{FF2B5EF4-FFF2-40B4-BE49-F238E27FC236}">
+              <a16:creationId xmlns:a16="http://schemas.microsoft.com/office/drawing/2014/main" id="{728CE86D-EF25-800A-6BF1-CA6EE56C8528}"/>
+            </a:ext>
+          </a:extLst>
+        </p:cNvPr>
+        <p:cNvGrpSpPr/>
+        <p:nvPr/>
+      </p:nvGrpSpPr>
+      <p:grpSpPr>
+        <a:xfrm>
+          <a:off x="0" y="0"/>
+          <a:ext cx="0" cy="0"/>
+          <a:chOff x="0" y="0"/>
+          <a:chExt cx="0" cy="0"/>
+        </a:xfrm>
+      </p:grpSpPr>
+      <p:sp>
+        <p:nvSpPr>
+          <p:cNvPr id="3" name="TextBox 2">
+            <a:extLst>
+              <a:ext uri="{FF2B5EF4-FFF2-40B4-BE49-F238E27FC236}">
+                <a16:creationId xmlns:a16="http://schemas.microsoft.com/office/drawing/2014/main" id="{CA38D18B-AE90-95C0-C949-64200AEC9E22}"/>
+              </a:ext>
+            </a:extLst>
+          </p:cNvPr>
+          <p:cNvSpPr txBox="1"/>
+          <p:nvPr/>
+        </p:nvSpPr>
+        <p:spPr>
+          <a:xfrm>
+            <a:off x="228600" y="1012954"/>
+            <a:ext cx="11018520" cy="4401205"/>
+          </a:xfrm>
+          <a:prstGeom prst="rect">
+            <a:avLst/>
+          </a:prstGeom>
+          <a:noFill/>
+        </p:spPr>
+        <p:txBody>
+          <a:bodyPr wrap="square">
+            <a:spAutoFit/>
+          </a:bodyPr>
+          <a:lstStyle/>
+          <a:p>
+            <a:r>
+              <a:rPr lang="en-US" sz="2800" b="1" dirty="0">
+                <a:solidFill>
+                  <a:schemeClr val="accent6">
+                    <a:lumMod val="60000"/>
+                    <a:lumOff val="40000"/>
+                  </a:schemeClr>
+                </a:solidFill>
+              </a:rPr>
+              <a:t>Discussion for Class</a:t>
+            </a:r>
+          </a:p>
+          <a:p>
+            <a:endParaRPr lang="en-US" sz="2800" b="1" dirty="0">
+              <a:solidFill>
+                <a:schemeClr val="accent6">
+                  <a:lumMod val="60000"/>
+                  <a:lumOff val="40000"/>
+                </a:schemeClr>
+              </a:solidFill>
+            </a:endParaRPr>
+          </a:p>
+          <a:p>
+            <a:r>
+              <a:rPr lang="en-US" sz="2800" i="1" dirty="0">
+                <a:solidFill>
+                  <a:schemeClr val="accent6">
+                    <a:lumMod val="60000"/>
+                    <a:lumOff val="40000"/>
+                  </a:schemeClr>
+                </a:solidFill>
+              </a:rPr>
+              <a:t>"A bank deploys an autonomous agent that can </a:t>
+            </a:r>
+          </a:p>
+          <a:p>
+            <a:pPr marL="457200" indent="-457200">
+              <a:buFont typeface="Arial" panose="020B0604020202020204" pitchFamily="34" charset="0"/>
+              <a:buChar char="•"/>
+            </a:pPr>
+            <a:r>
+              <a:rPr lang="en-US" sz="2800" i="1" dirty="0">
+                <a:solidFill>
+                  <a:schemeClr val="accent6">
+                    <a:lumMod val="60000"/>
+                    <a:lumOff val="40000"/>
+                  </a:schemeClr>
+                </a:solidFill>
+              </a:rPr>
+              <a:t>access accounts, </a:t>
+            </a:r>
+          </a:p>
+          <a:p>
+            <a:pPr marL="457200" indent="-457200">
+              <a:buFont typeface="Arial" panose="020B0604020202020204" pitchFamily="34" charset="0"/>
+              <a:buChar char="•"/>
+            </a:pPr>
+            <a:r>
+              <a:rPr lang="en-US" sz="2800" i="1" dirty="0">
+                <a:solidFill>
+                  <a:schemeClr val="accent6">
+                    <a:lumMod val="60000"/>
+                    <a:lumOff val="40000"/>
+                  </a:schemeClr>
+                </a:solidFill>
+              </a:rPr>
+              <a:t>move money, and </a:t>
+            </a:r>
+          </a:p>
+          <a:p>
+            <a:pPr marL="457200" indent="-457200">
+              <a:buFont typeface="Arial" panose="020B0604020202020204" pitchFamily="34" charset="0"/>
+              <a:buChar char="•"/>
+            </a:pPr>
+            <a:r>
+              <a:rPr lang="en-US" sz="2800" i="1" dirty="0">
+                <a:solidFill>
+                  <a:schemeClr val="accent6">
+                    <a:lumMod val="60000"/>
+                    <a:lumOff val="40000"/>
+                  </a:schemeClr>
+                </a:solidFill>
+              </a:rPr>
+              <a:t>close disputes </a:t>
+            </a:r>
+          </a:p>
+          <a:p>
+            <a:r>
+              <a:rPr lang="en-US" sz="2800" i="1" dirty="0">
+                <a:solidFill>
+                  <a:schemeClr val="accent6">
+                    <a:lumMod val="60000"/>
+                    <a:lumOff val="40000"/>
+                  </a:schemeClr>
+                </a:solidFill>
+              </a:rPr>
+              <a:t>— all without a human approving each action. </a:t>
+            </a:r>
+          </a:p>
+          <a:p>
+            <a:endParaRPr lang="en-US" sz="2800" i="1" dirty="0">
+              <a:solidFill>
+                <a:schemeClr val="accent6">
+                  <a:lumMod val="60000"/>
+                  <a:lumOff val="40000"/>
+                </a:schemeClr>
+              </a:solidFill>
+            </a:endParaRPr>
+          </a:p>
+          <a:p>
+            <a:pPr marL="514350" indent="-514350">
+              <a:buFont typeface="+mj-lt"/>
+              <a:buAutoNum type="arabicPeriod"/>
+            </a:pPr>
+            <a:r>
+              <a:rPr lang="en-US" sz="2800" i="1" dirty="0">
+                <a:solidFill>
+                  <a:schemeClr val="accent6">
+                    <a:lumMod val="60000"/>
+                    <a:lumOff val="40000"/>
+                  </a:schemeClr>
+                </a:solidFill>
+              </a:rPr>
+              <a:t>What conditions would need to be true for you to trust that system ?</a:t>
+            </a:r>
+          </a:p>
+          <a:p>
+            <a:pPr marL="514350" indent="-514350">
+              <a:buFont typeface="+mj-lt"/>
+              <a:buAutoNum type="arabicPeriod"/>
+            </a:pPr>
+            <a:r>
+              <a:rPr lang="en-US" sz="2800" i="1" dirty="0">
+                <a:solidFill>
+                  <a:schemeClr val="accent6">
+                    <a:lumMod val="60000"/>
+                    <a:lumOff val="40000"/>
+                  </a:schemeClr>
+                </a:solidFill>
+              </a:rPr>
+              <a:t>What would make you distrust it ?"</a:t>
+            </a:r>
+            <a:endParaRPr lang="en-US" sz="2800" dirty="0">
+              <a:solidFill>
+                <a:schemeClr val="accent6">
+                  <a:lumMod val="60000"/>
+                  <a:lumOff val="40000"/>
+                </a:schemeClr>
+              </a:solidFill>
+            </a:endParaRPr>
+          </a:p>
+        </p:txBody>
+      </p:sp>
+    </p:spTree>
+    <p:extLst>
+      <p:ext uri="{BB962C8B-B14F-4D97-AF65-F5344CB8AC3E}">
+        <p14:creationId xmlns:p14="http://schemas.microsoft.com/office/powerpoint/2010/main" val="2206521416"/>
+      </p:ext>
+    </p:extLst>
+  </p:cSld>
+  <p:clrMapOvr>
+    <a:masterClrMapping/>
+  </p:clrMapOvr>
+</p:sld>
+</file>
+
+<file path=ppt/slides/slide12.xml><?xml version="1.0" encoding="utf-8"?>
 <p:sld xmlns:a="http://schemas.openxmlformats.org/drawingml/2006/main" xmlns:r="http://schemas.openxmlformats.org/officeDocument/2006/relationships" xmlns:p="http://schemas.openxmlformats.org/presentationml/2006/main">
   <p:cSld>
     <p:spTree>
@@ -4254,6 +4870,553 @@
         <p:cNvPr id="1" name="">
           <a:extLst>
             <a:ext uri="{FF2B5EF4-FFF2-40B4-BE49-F238E27FC236}">
+              <a16:creationId xmlns:a16="http://schemas.microsoft.com/office/drawing/2014/main" id="{3175ED23-1B0B-5BBF-99DE-E50DD306717D}"/>
+            </a:ext>
+          </a:extLst>
+        </p:cNvPr>
+        <p:cNvGrpSpPr/>
+        <p:nvPr/>
+      </p:nvGrpSpPr>
+      <p:grpSpPr>
+        <a:xfrm>
+          <a:off x="0" y="0"/>
+          <a:ext cx="0" cy="0"/>
+          <a:chOff x="0" y="0"/>
+          <a:chExt cx="0" cy="0"/>
+        </a:xfrm>
+      </p:grpSpPr>
+      <p:sp>
+        <p:nvSpPr>
+          <p:cNvPr id="2" name="TextBox 1">
+            <a:extLst>
+              <a:ext uri="{FF2B5EF4-FFF2-40B4-BE49-F238E27FC236}">
+                <a16:creationId xmlns:a16="http://schemas.microsoft.com/office/drawing/2014/main" id="{4A321DA7-B6A8-988D-D4AC-32BF34C96E94}"/>
+              </a:ext>
+            </a:extLst>
+          </p:cNvPr>
+          <p:cNvSpPr txBox="1"/>
+          <p:nvPr/>
+        </p:nvSpPr>
+        <p:spPr>
+          <a:xfrm>
+            <a:off x="217584" y="334400"/>
+            <a:ext cx="5123437" cy="707886"/>
+          </a:xfrm>
+          <a:prstGeom prst="rect">
+            <a:avLst/>
+          </a:prstGeom>
+          <a:noFill/>
+        </p:spPr>
+        <p:txBody>
+          <a:bodyPr wrap="square" rtlCol="0">
+            <a:spAutoFit/>
+          </a:bodyPr>
+          <a:lstStyle/>
+          <a:p>
+            <a:r>
+              <a:rPr lang="en-US" sz="2000" b="1" dirty="0">
+                <a:solidFill>
+                  <a:schemeClr val="accent6">
+                    <a:lumMod val="60000"/>
+                    <a:lumOff val="40000"/>
+                  </a:schemeClr>
+                </a:solidFill>
+              </a:rPr>
+              <a:t>An example of AI Automation Agent from real life experience</a:t>
+            </a:r>
+            <a:endParaRPr lang="en-IN" sz="2000" b="1" dirty="0">
+              <a:solidFill>
+                <a:schemeClr val="accent6">
+                  <a:lumMod val="60000"/>
+                  <a:lumOff val="40000"/>
+                </a:schemeClr>
+              </a:solidFill>
+            </a:endParaRPr>
+          </a:p>
+        </p:txBody>
+      </p:sp>
+      <p:pic>
+        <p:nvPicPr>
+          <p:cNvPr id="4" name="Picture 3">
+            <a:extLst>
+              <a:ext uri="{FF2B5EF4-FFF2-40B4-BE49-F238E27FC236}">
+                <a16:creationId xmlns:a16="http://schemas.microsoft.com/office/drawing/2014/main" id="{59FE592C-B16B-3B23-8A5C-B4EFF4B2F970}"/>
+              </a:ext>
+            </a:extLst>
+          </p:cNvPr>
+          <p:cNvPicPr>
+            <a:picLocks noChangeAspect="1"/>
+          </p:cNvPicPr>
+          <p:nvPr/>
+        </p:nvPicPr>
+        <p:blipFill>
+          <a:blip r:embed="rId2"/>
+          <a:stretch>
+            <a:fillRect/>
+          </a:stretch>
+        </p:blipFill>
+        <p:spPr>
+          <a:xfrm>
+            <a:off x="423131" y="1232405"/>
+            <a:ext cx="4917890" cy="5291195"/>
+          </a:xfrm>
+          <a:prstGeom prst="rect">
+            <a:avLst/>
+          </a:prstGeom>
+        </p:spPr>
+      </p:pic>
+      <p:pic>
+        <p:nvPicPr>
+          <p:cNvPr id="7" name="Picture 6">
+            <a:extLst>
+              <a:ext uri="{FF2B5EF4-FFF2-40B4-BE49-F238E27FC236}">
+                <a16:creationId xmlns:a16="http://schemas.microsoft.com/office/drawing/2014/main" id="{BEB9279A-2CE9-A0E4-EC7F-BEB2663B5369}"/>
+              </a:ext>
+            </a:extLst>
+          </p:cNvPr>
+          <p:cNvPicPr>
+            <a:picLocks noChangeAspect="1"/>
+          </p:cNvPicPr>
+          <p:nvPr/>
+        </p:nvPicPr>
+        <p:blipFill>
+          <a:blip r:embed="rId3"/>
+          <a:stretch>
+            <a:fillRect/>
+          </a:stretch>
+        </p:blipFill>
+        <p:spPr>
+          <a:xfrm>
+            <a:off x="6887909" y="1627632"/>
+            <a:ext cx="5221795" cy="4895968"/>
+          </a:xfrm>
+          <a:prstGeom prst="rect">
+            <a:avLst/>
+          </a:prstGeom>
+        </p:spPr>
+      </p:pic>
+      <p:sp>
+        <p:nvSpPr>
+          <p:cNvPr id="8" name="Arrow: Right 7">
+            <a:extLst>
+              <a:ext uri="{FF2B5EF4-FFF2-40B4-BE49-F238E27FC236}">
+                <a16:creationId xmlns:a16="http://schemas.microsoft.com/office/drawing/2014/main" id="{2B7FCA7A-32A4-D0D7-582B-1B71C6751120}"/>
+              </a:ext>
+            </a:extLst>
+          </p:cNvPr>
+          <p:cNvSpPr/>
+          <p:nvPr/>
+        </p:nvSpPr>
+        <p:spPr>
+          <a:xfrm>
+            <a:off x="5695826" y="3191256"/>
+            <a:ext cx="867757" cy="475488"/>
+          </a:xfrm>
+          <a:prstGeom prst="rightArrow">
+            <a:avLst/>
+          </a:prstGeom>
+        </p:spPr>
+        <p:style>
+          <a:lnRef idx="2">
+            <a:schemeClr val="accent1">
+              <a:shade val="15000"/>
+            </a:schemeClr>
+          </a:lnRef>
+          <a:fillRef idx="1">
+            <a:schemeClr val="accent1"/>
+          </a:fillRef>
+          <a:effectRef idx="0">
+            <a:schemeClr val="accent1"/>
+          </a:effectRef>
+          <a:fontRef idx="minor">
+            <a:schemeClr val="lt1"/>
+          </a:fontRef>
+        </p:style>
+        <p:txBody>
+          <a:bodyPr rtlCol="0" anchor="ctr"/>
+          <a:lstStyle/>
+          <a:p>
+            <a:pPr algn="ctr"/>
+            <a:endParaRPr lang="en-IN"/>
+          </a:p>
+        </p:txBody>
+      </p:sp>
+      <p:sp>
+        <p:nvSpPr>
+          <p:cNvPr id="5" name="TextBox 4">
+            <a:extLst>
+              <a:ext uri="{FF2B5EF4-FFF2-40B4-BE49-F238E27FC236}">
+                <a16:creationId xmlns:a16="http://schemas.microsoft.com/office/drawing/2014/main" id="{892399D7-59D1-0281-0E85-6AF97B36C2A4}"/>
+              </a:ext>
+            </a:extLst>
+          </p:cNvPr>
+          <p:cNvSpPr txBox="1"/>
+          <p:nvPr/>
+        </p:nvSpPr>
+        <p:spPr>
+          <a:xfrm>
+            <a:off x="6243366" y="398550"/>
+            <a:ext cx="5129033" cy="646331"/>
+          </a:xfrm>
+          <a:prstGeom prst="rect">
+            <a:avLst/>
+          </a:prstGeom>
+          <a:noFill/>
+        </p:spPr>
+        <p:txBody>
+          <a:bodyPr wrap="none" rtlCol="0">
+            <a:spAutoFit/>
+          </a:bodyPr>
+          <a:lstStyle/>
+          <a:p>
+            <a:r>
+              <a:rPr lang="en-US" dirty="0">
+                <a:solidFill>
+                  <a:schemeClr val="accent6">
+                    <a:lumMod val="60000"/>
+                    <a:lumOff val="40000"/>
+                  </a:schemeClr>
+                </a:solidFill>
+              </a:rPr>
+              <a:t>Based on type of email, Agent forwards the</a:t>
+            </a:r>
+          </a:p>
+          <a:p>
+            <a:r>
+              <a:rPr lang="en-US" dirty="0">
+                <a:solidFill>
+                  <a:schemeClr val="accent6">
+                    <a:lumMod val="60000"/>
+                    <a:lumOff val="40000"/>
+                  </a:schemeClr>
+                </a:solidFill>
+              </a:rPr>
+              <a:t>Email to Support, Refund, Accounts, etc. department</a:t>
+            </a:r>
+            <a:endParaRPr lang="en-IN" dirty="0">
+              <a:solidFill>
+                <a:schemeClr val="accent6">
+                  <a:lumMod val="60000"/>
+                  <a:lumOff val="40000"/>
+                </a:schemeClr>
+              </a:solidFill>
+            </a:endParaRPr>
+          </a:p>
+        </p:txBody>
+      </p:sp>
+      <mc:AlternateContent xmlns:mc="http://schemas.openxmlformats.org/markup-compatibility/2006">
+        <mc:Choice xmlns:p14="http://schemas.microsoft.com/office/powerpoint/2010/main" Requires="p14">
+          <p:contentPart p14:bwMode="auto" r:id="rId4">
+            <p14:nvContentPartPr>
+              <p14:cNvPr id="3" name="Ink 2">
+                <a:extLst>
+                  <a:ext uri="{FF2B5EF4-FFF2-40B4-BE49-F238E27FC236}">
+                    <a16:creationId xmlns:a16="http://schemas.microsoft.com/office/drawing/2014/main" id="{3237AF2F-A6E5-6A7F-A5F4-737A78DBE211}"/>
+                  </a:ext>
+                </a:extLst>
+              </p14:cNvPr>
+              <p14:cNvContentPartPr/>
+              <p14:nvPr/>
+            </p14:nvContentPartPr>
+            <p14:xfrm>
+              <a:off x="8184384" y="2825856"/>
+              <a:ext cx="307440" cy="178200"/>
+            </p14:xfrm>
+          </p:contentPart>
+        </mc:Choice>
+        <mc:Fallback>
+          <p:pic>
+            <p:nvPicPr>
+              <p:cNvPr id="3" name="Ink 2">
+                <a:extLst>
+                  <a:ext uri="{FF2B5EF4-FFF2-40B4-BE49-F238E27FC236}">
+                    <a16:creationId xmlns:a16="http://schemas.microsoft.com/office/drawing/2014/main" id="{3237AF2F-A6E5-6A7F-A5F4-737A78DBE211}"/>
+                  </a:ext>
+                </a:extLst>
+              </p:cNvPr>
+              <p:cNvPicPr/>
+              <p:nvPr/>
+            </p:nvPicPr>
+            <p:blipFill>
+              <a:blip r:embed="rId5"/>
+              <a:stretch>
+                <a:fillRect/>
+              </a:stretch>
+            </p:blipFill>
+            <p:spPr>
+              <a:xfrm>
+                <a:off x="8166744" y="2807856"/>
+                <a:ext cx="343080" cy="213840"/>
+              </a:xfrm>
+              <a:prstGeom prst="rect">
+                <a:avLst/>
+              </a:prstGeom>
+            </p:spPr>
+          </p:pic>
+        </mc:Fallback>
+      </mc:AlternateContent>
+      <mc:AlternateContent xmlns:mc="http://schemas.openxmlformats.org/markup-compatibility/2006">
+        <mc:Choice xmlns:p14="http://schemas.microsoft.com/office/powerpoint/2010/main" Requires="p14">
+          <p:contentPart p14:bwMode="auto" r:id="rId6">
+            <p14:nvContentPartPr>
+              <p14:cNvPr id="6" name="Ink 5">
+                <a:extLst>
+                  <a:ext uri="{FF2B5EF4-FFF2-40B4-BE49-F238E27FC236}">
+                    <a16:creationId xmlns:a16="http://schemas.microsoft.com/office/drawing/2014/main" id="{9356BB75-4E83-EF60-82DB-1FB5BF41DB46}"/>
+                  </a:ext>
+                </a:extLst>
+              </p14:cNvPr>
+              <p14:cNvContentPartPr/>
+              <p14:nvPr/>
+            </p14:nvContentPartPr>
+            <p14:xfrm>
+              <a:off x="7250904" y="6463656"/>
+              <a:ext cx="1041840" cy="28800"/>
+            </p14:xfrm>
+          </p:contentPart>
+        </mc:Choice>
+        <mc:Fallback>
+          <p:pic>
+            <p:nvPicPr>
+              <p:cNvPr id="6" name="Ink 5">
+                <a:extLst>
+                  <a:ext uri="{FF2B5EF4-FFF2-40B4-BE49-F238E27FC236}">
+                    <a16:creationId xmlns:a16="http://schemas.microsoft.com/office/drawing/2014/main" id="{9356BB75-4E83-EF60-82DB-1FB5BF41DB46}"/>
+                  </a:ext>
+                </a:extLst>
+              </p:cNvPr>
+              <p:cNvPicPr/>
+              <p:nvPr/>
+            </p:nvPicPr>
+            <p:blipFill>
+              <a:blip r:embed="rId7"/>
+              <a:stretch>
+                <a:fillRect/>
+              </a:stretch>
+            </p:blipFill>
+            <p:spPr>
+              <a:xfrm>
+                <a:off x="7233264" y="6445656"/>
+                <a:ext cx="1077480" cy="64440"/>
+              </a:xfrm>
+              <a:prstGeom prst="rect">
+                <a:avLst/>
+              </a:prstGeom>
+            </p:spPr>
+          </p:pic>
+        </mc:Fallback>
+      </mc:AlternateContent>
+    </p:spTree>
+    <p:extLst>
+      <p:ext uri="{BB962C8B-B14F-4D97-AF65-F5344CB8AC3E}">
+        <p14:creationId xmlns:p14="http://schemas.microsoft.com/office/powerpoint/2010/main" val="2201931908"/>
+      </p:ext>
+    </p:extLst>
+  </p:cSld>
+  <p:clrMapOvr>
+    <a:masterClrMapping/>
+  </p:clrMapOvr>
+</p:sld>
+</file>
+
+<file path=ppt/slides/slide3.xml><?xml version="1.0" encoding="utf-8"?>
+<p:sld xmlns:a="http://schemas.openxmlformats.org/drawingml/2006/main" xmlns:r="http://schemas.openxmlformats.org/officeDocument/2006/relationships" xmlns:p="http://schemas.openxmlformats.org/presentationml/2006/main">
+  <p:cSld>
+    <p:spTree>
+      <p:nvGrpSpPr>
+        <p:cNvPr id="1" name="">
+          <a:extLst>
+            <a:ext uri="{FF2B5EF4-FFF2-40B4-BE49-F238E27FC236}">
+              <a16:creationId xmlns:a16="http://schemas.microsoft.com/office/drawing/2014/main" id="{02C5C1E8-1F0D-8CBA-0F5D-F6B04CC5990D}"/>
+            </a:ext>
+          </a:extLst>
+        </p:cNvPr>
+        <p:cNvGrpSpPr/>
+        <p:nvPr/>
+      </p:nvGrpSpPr>
+      <p:grpSpPr>
+        <a:xfrm>
+          <a:off x="0" y="0"/>
+          <a:ext cx="0" cy="0"/>
+          <a:chOff x="0" y="0"/>
+          <a:chExt cx="0" cy="0"/>
+        </a:xfrm>
+      </p:grpSpPr>
+      <p:sp>
+        <p:nvSpPr>
+          <p:cNvPr id="9" name="TextBox 8">
+            <a:extLst>
+              <a:ext uri="{FF2B5EF4-FFF2-40B4-BE49-F238E27FC236}">
+                <a16:creationId xmlns:a16="http://schemas.microsoft.com/office/drawing/2014/main" id="{D8D71729-8AE9-EE1E-5945-AC4BED4B5289}"/>
+              </a:ext>
+            </a:extLst>
+          </p:cNvPr>
+          <p:cNvSpPr txBox="1"/>
+          <p:nvPr/>
+        </p:nvSpPr>
+        <p:spPr>
+          <a:xfrm>
+            <a:off x="477520" y="1003776"/>
+            <a:ext cx="10292080" cy="1200329"/>
+          </a:xfrm>
+          <a:prstGeom prst="rect">
+            <a:avLst/>
+          </a:prstGeom>
+          <a:noFill/>
+        </p:spPr>
+        <p:txBody>
+          <a:bodyPr wrap="square">
+            <a:spAutoFit/>
+          </a:bodyPr>
+          <a:lstStyle/>
+          <a:p>
+            <a:pPr>
+              <a:buNone/>
+            </a:pPr>
+            <a:r>
+              <a:rPr lang="en-US" sz="2400" b="1" i="1" dirty="0">
+                <a:solidFill>
+                  <a:schemeClr val="accent6">
+                    <a:lumMod val="60000"/>
+                    <a:lumOff val="40000"/>
+                  </a:schemeClr>
+                </a:solidFill>
+              </a:rPr>
+              <a:t>The Three Generations: </a:t>
+            </a:r>
+          </a:p>
+          <a:p>
+            <a:pPr>
+              <a:buNone/>
+            </a:pPr>
+            <a:endParaRPr lang="en-US" sz="2400" dirty="0">
+              <a:solidFill>
+                <a:schemeClr val="accent6">
+                  <a:lumMod val="60000"/>
+                  <a:lumOff val="40000"/>
+                </a:schemeClr>
+              </a:solidFill>
+            </a:endParaRPr>
+          </a:p>
+          <a:p>
+            <a:pPr>
+              <a:buNone/>
+            </a:pPr>
+            <a:r>
+              <a:rPr lang="en-US" sz="2400" dirty="0">
+                <a:solidFill>
+                  <a:schemeClr val="accent6">
+                    <a:lumMod val="60000"/>
+                    <a:lumOff val="40000"/>
+                  </a:schemeClr>
+                </a:solidFill>
+              </a:rPr>
+              <a:t>Rule-Based Bot → LLM Chatbot → Autonomous Agent</a:t>
+            </a:r>
+            <a:endParaRPr lang="en-US" sz="2400" i="1" dirty="0">
+              <a:solidFill>
+                <a:schemeClr val="accent6">
+                  <a:lumMod val="60000"/>
+                  <a:lumOff val="40000"/>
+                </a:schemeClr>
+              </a:solidFill>
+            </a:endParaRPr>
+          </a:p>
+        </p:txBody>
+      </p:sp>
+      <p:sp>
+        <p:nvSpPr>
+          <p:cNvPr id="3" name="TextBox 2">
+            <a:extLst>
+              <a:ext uri="{FF2B5EF4-FFF2-40B4-BE49-F238E27FC236}">
+                <a16:creationId xmlns:a16="http://schemas.microsoft.com/office/drawing/2014/main" id="{F67891A8-414D-14C5-38AF-022D469DA94C}"/>
+              </a:ext>
+            </a:extLst>
+          </p:cNvPr>
+          <p:cNvSpPr txBox="1"/>
+          <p:nvPr/>
+        </p:nvSpPr>
+        <p:spPr>
+          <a:xfrm>
+            <a:off x="246888" y="2459504"/>
+            <a:ext cx="11945112" cy="830997"/>
+          </a:xfrm>
+          <a:prstGeom prst="rect">
+            <a:avLst/>
+          </a:prstGeom>
+          <a:noFill/>
+        </p:spPr>
+        <p:txBody>
+          <a:bodyPr wrap="square">
+            <a:spAutoFit/>
+          </a:bodyPr>
+          <a:lstStyle/>
+          <a:p>
+            <a:pPr>
+              <a:buNone/>
+            </a:pPr>
+            <a:r>
+              <a:rPr lang="en-US" sz="2400" i="1" dirty="0">
+                <a:solidFill>
+                  <a:schemeClr val="accent6">
+                    <a:lumMod val="60000"/>
+                    <a:lumOff val="40000"/>
+                  </a:schemeClr>
+                </a:solidFill>
+              </a:rPr>
+              <a:t>"When a customer says  'I think someone hacked my account’ </a:t>
+            </a:r>
+          </a:p>
+          <a:p>
+            <a:pPr>
+              <a:buNone/>
+            </a:pPr>
+            <a:r>
+              <a:rPr lang="en-US" sz="2400" i="1" dirty="0">
+                <a:solidFill>
+                  <a:schemeClr val="accent6">
+                    <a:lumMod val="60000"/>
+                    <a:lumOff val="40000"/>
+                  </a:schemeClr>
+                </a:solidFill>
+              </a:rPr>
+              <a:t>— what does each system actually do?"</a:t>
+            </a:r>
+            <a:r>
+              <a:rPr lang="en-US" sz="2400" dirty="0">
+                <a:solidFill>
+                  <a:schemeClr val="accent6">
+                    <a:lumMod val="60000"/>
+                    <a:lumOff val="40000"/>
+                  </a:schemeClr>
+                </a:solidFill>
+              </a:rPr>
+              <a:t> </a:t>
+            </a:r>
+          </a:p>
+        </p:txBody>
+      </p:sp>
+    </p:spTree>
+    <p:extLst>
+      <p:ext uri="{BB962C8B-B14F-4D97-AF65-F5344CB8AC3E}">
+        <p14:creationId xmlns:p14="http://schemas.microsoft.com/office/powerpoint/2010/main" val="4280699446"/>
+      </p:ext>
+    </p:extLst>
+  </p:cSld>
+  <p:clrMapOvr>
+    <a:masterClrMapping/>
+  </p:clrMapOvr>
+</p:sld>
+</file>
+
+<file path=ppt/slides/slide4.xml><?xml version="1.0" encoding="utf-8"?>
+<p:sld xmlns:a="http://schemas.openxmlformats.org/drawingml/2006/main" xmlns:r="http://schemas.openxmlformats.org/officeDocument/2006/relationships" xmlns:p="http://schemas.openxmlformats.org/presentationml/2006/main">
+  <p:cSld>
+    <p:spTree>
+      <p:nvGrpSpPr>
+        <p:cNvPr id="1" name="">
+          <a:extLst>
+            <a:ext uri="{FF2B5EF4-FFF2-40B4-BE49-F238E27FC236}">
               <a16:creationId xmlns:a16="http://schemas.microsoft.com/office/drawing/2014/main" id="{529EBDA7-B44E-B824-B04A-1C6D1FB40ED7}"/>
             </a:ext>
           </a:extLst>
@@ -4564,15 +5727,16 @@
             <a:r>
               <a:rPr lang="en-US" dirty="0">
                 <a:solidFill>
-                  <a:schemeClr val="accent6">
-                    <a:lumMod val="60000"/>
-                    <a:lumOff val="40000"/>
-                  </a:schemeClr>
+                  <a:schemeClr val="bg1"/>
                 </a:solidFill>
               </a:rPr>
               <a:t>I think someone hacked my account,..</a:t>
             </a:r>
-            <a:endParaRPr lang="en-IN" dirty="0"/>
+            <a:endParaRPr lang="en-IN" dirty="0">
+              <a:solidFill>
+                <a:schemeClr val="bg1"/>
+              </a:solidFill>
+            </a:endParaRPr>
           </a:p>
         </p:txBody>
       </p:sp>
@@ -4623,10 +5787,7 @@
             <a:r>
               <a:rPr lang="en-US" i="1" dirty="0">
                 <a:solidFill>
-                  <a:schemeClr val="accent6">
-                    <a:lumMod val="60000"/>
-                    <a:lumOff val="40000"/>
-                  </a:schemeClr>
+                  <a:schemeClr val="bg1"/>
                 </a:solidFill>
               </a:rPr>
               <a:t>For account security, </a:t>
@@ -4640,10 +5801,7 @@
             <a:r>
               <a:rPr lang="en-US" i="1" dirty="0">
                 <a:solidFill>
-                  <a:schemeClr val="accent6">
-                    <a:lumMod val="60000"/>
-                    <a:lumOff val="40000"/>
-                  </a:schemeClr>
+                  <a:schemeClr val="bg1"/>
                 </a:solidFill>
               </a:rPr>
               <a:t>press 1 for password reset, </a:t>
@@ -4657,10 +5815,7 @@
             <a:r>
               <a:rPr lang="en-US" i="1" dirty="0">
                 <a:solidFill>
-                  <a:schemeClr val="accent6">
-                    <a:lumMod val="60000"/>
-                    <a:lumOff val="40000"/>
-                  </a:schemeClr>
+                  <a:schemeClr val="bg1"/>
                 </a:solidFill>
               </a:rPr>
               <a:t>press 2 to speak to an agent.</a:t>
@@ -4715,10 +5870,7 @@
             <a:r>
               <a:rPr lang="en-US" i="1" dirty="0">
                 <a:solidFill>
-                  <a:schemeClr val="accent6">
-                    <a:lumMod val="60000"/>
-                    <a:lumOff val="40000"/>
-                  </a:schemeClr>
+                  <a:schemeClr val="bg1"/>
                 </a:solidFill>
               </a:rPr>
               <a:t>For refund, </a:t>
@@ -4732,10 +5884,7 @@
             <a:r>
               <a:rPr lang="en-US" i="1" dirty="0">
                 <a:solidFill>
-                  <a:schemeClr val="accent6">
-                    <a:lumMod val="60000"/>
-                    <a:lumOff val="40000"/>
-                  </a:schemeClr>
+                  <a:schemeClr val="bg1"/>
                 </a:solidFill>
               </a:rPr>
               <a:t>press 1 for returning an  item, </a:t>
@@ -4749,13 +5898,21 @@
             <a:r>
               <a:rPr lang="en-US" i="1" dirty="0">
                 <a:solidFill>
+                  <a:schemeClr val="bg1"/>
+                </a:solidFill>
+              </a:rPr>
+              <a:t>press 2 to speak to someone</a:t>
+            </a:r>
+            <a:r>
+              <a:rPr lang="en-US" i="1" dirty="0">
+                <a:solidFill>
                   <a:schemeClr val="accent6">
                     <a:lumMod val="60000"/>
                     <a:lumOff val="40000"/>
                   </a:schemeClr>
                 </a:solidFill>
               </a:rPr>
-              <a:t>press 2 to speak to someone.</a:t>
+              <a:t>.</a:t>
             </a:r>
           </a:p>
         </p:txBody>
@@ -4949,7 +6106,7 @@
 </p:sld>
 </file>
 
-<file path=ppt/slides/slide3.xml><?xml version="1.0" encoding="utf-8"?>
+<file path=ppt/slides/slide5.xml><?xml version="1.0" encoding="utf-8"?>
 <p:sld xmlns:a="http://schemas.openxmlformats.org/drawingml/2006/main" xmlns:r="http://schemas.openxmlformats.org/officeDocument/2006/relationships" xmlns:p="http://schemas.openxmlformats.org/presentationml/2006/main">
   <p:cSld>
     <p:spTree>
@@ -5616,7 +6773,7 @@
 </p:sld>
 </file>
 
-<file path=ppt/slides/slide4.xml><?xml version="1.0" encoding="utf-8"?>
+<file path=ppt/slides/slide6.xml><?xml version="1.0" encoding="utf-8"?>
 <p:sld xmlns:a="http://schemas.openxmlformats.org/drawingml/2006/main" xmlns:r="http://schemas.openxmlformats.org/officeDocument/2006/relationships" xmlns:p="http://schemas.openxmlformats.org/presentationml/2006/main">
   <p:cSld>
     <p:spTree>
@@ -6169,7 +7326,7 @@
 </p:sld>
 </file>
 
-<file path=ppt/slides/slide5.xml><?xml version="1.0" encoding="utf-8"?>
+<file path=ppt/slides/slide7.xml><?xml version="1.0" encoding="utf-8"?>
 <p:sld xmlns:a="http://schemas.openxmlformats.org/drawingml/2006/main" xmlns:r="http://schemas.openxmlformats.org/officeDocument/2006/relationships" xmlns:p="http://schemas.openxmlformats.org/presentationml/2006/main">
   <p:cSld>
     <p:spTree>
@@ -6642,7 +7799,7 @@
 </p:sld>
 </file>
 
-<file path=ppt/slides/slide6.xml><?xml version="1.0" encoding="utf-8"?>
+<file path=ppt/slides/slide8.xml><?xml version="1.0" encoding="utf-8"?>
 <p:sld xmlns:a="http://schemas.openxmlformats.org/drawingml/2006/main" xmlns:r="http://schemas.openxmlformats.org/officeDocument/2006/relationships" xmlns:p="http://schemas.openxmlformats.org/presentationml/2006/main">
   <p:cSld>
     <p:spTree>
@@ -6831,7 +7988,7 @@
 </p:sld>
 </file>
 
-<file path=ppt/slides/slide7.xml><?xml version="1.0" encoding="utf-8"?>
+<file path=ppt/slides/slide9.xml><?xml version="1.0" encoding="utf-8"?>
 <p:sld xmlns:a="http://schemas.openxmlformats.org/drawingml/2006/main" xmlns:r="http://schemas.openxmlformats.org/officeDocument/2006/relationships" xmlns:p="http://schemas.openxmlformats.org/presentationml/2006/main">
   <p:cSld>
     <p:spTree>
@@ -7360,731 +8517,6 @@
     <p:extLst>
       <p:ext uri="{BB962C8B-B14F-4D97-AF65-F5344CB8AC3E}">
         <p14:creationId xmlns:p14="http://schemas.microsoft.com/office/powerpoint/2010/main" val="2060208253"/>
-      </p:ext>
-    </p:extLst>
-  </p:cSld>
-  <p:clrMapOvr>
-    <a:masterClrMapping/>
-  </p:clrMapOvr>
-</p:sld>
-</file>
-
-<file path=ppt/slides/slide8.xml><?xml version="1.0" encoding="utf-8"?>
-<p:sld xmlns:a="http://schemas.openxmlformats.org/drawingml/2006/main" xmlns:r="http://schemas.openxmlformats.org/officeDocument/2006/relationships" xmlns:p="http://schemas.openxmlformats.org/presentationml/2006/main">
-  <p:cSld>
-    <p:spTree>
-      <p:nvGrpSpPr>
-        <p:cNvPr id="1" name="">
-          <a:extLst>
-            <a:ext uri="{FF2B5EF4-FFF2-40B4-BE49-F238E27FC236}">
-              <a16:creationId xmlns:a16="http://schemas.microsoft.com/office/drawing/2014/main" id="{17A55DC5-7B47-CEE0-33C7-92ED936820D3}"/>
-            </a:ext>
-          </a:extLst>
-        </p:cNvPr>
-        <p:cNvGrpSpPr/>
-        <p:nvPr/>
-      </p:nvGrpSpPr>
-      <p:grpSpPr>
-        <a:xfrm>
-          <a:off x="0" y="0"/>
-          <a:ext cx="0" cy="0"/>
-          <a:chOff x="0" y="0"/>
-          <a:chExt cx="0" cy="0"/>
-        </a:xfrm>
-      </p:grpSpPr>
-      <p:sp>
-        <p:nvSpPr>
-          <p:cNvPr id="3" name="TextBox 2">
-            <a:extLst>
-              <a:ext uri="{FF2B5EF4-FFF2-40B4-BE49-F238E27FC236}">
-                <a16:creationId xmlns:a16="http://schemas.microsoft.com/office/drawing/2014/main" id="{D8FBAEF6-BDD8-6A48-289F-B48137D4B61E}"/>
-              </a:ext>
-            </a:extLst>
-          </p:cNvPr>
-          <p:cNvSpPr txBox="1"/>
-          <p:nvPr/>
-        </p:nvSpPr>
-        <p:spPr>
-          <a:xfrm>
-            <a:off x="228600" y="272290"/>
-            <a:ext cx="11430000" cy="1815882"/>
-          </a:xfrm>
-          <a:prstGeom prst="rect">
-            <a:avLst/>
-          </a:prstGeom>
-          <a:noFill/>
-        </p:spPr>
-        <p:txBody>
-          <a:bodyPr wrap="square">
-            <a:spAutoFit/>
-          </a:bodyPr>
-          <a:lstStyle/>
-          <a:p>
-            <a:pPr>
-              <a:buNone/>
-            </a:pPr>
-            <a:r>
-              <a:rPr lang="en-US" sz="2800" dirty="0">
-                <a:solidFill>
-                  <a:schemeClr val="accent6">
-                    <a:lumMod val="60000"/>
-                    <a:lumOff val="40000"/>
-                  </a:schemeClr>
-                </a:solidFill>
-              </a:rPr>
-              <a:t>AI agent can </a:t>
-            </a:r>
-            <a:r>
-              <a:rPr lang="en-US" sz="2800" b="1" i="1" u="sng" dirty="0">
-                <a:solidFill>
-                  <a:schemeClr val="accent6">
-                    <a:lumMod val="60000"/>
-                    <a:lumOff val="40000"/>
-                  </a:schemeClr>
-                </a:solidFill>
-              </a:rPr>
-              <a:t>act</a:t>
-            </a:r>
-            <a:r>
-              <a:rPr lang="en-US" sz="2800" dirty="0">
-                <a:solidFill>
-                  <a:schemeClr val="accent6">
-                    <a:lumMod val="60000"/>
-                    <a:lumOff val="40000"/>
-                  </a:schemeClr>
-                </a:solidFill>
-              </a:rPr>
-              <a:t>. </a:t>
-            </a:r>
-          </a:p>
-          <a:p>
-            <a:pPr>
-              <a:buNone/>
-            </a:pPr>
-            <a:r>
-              <a:rPr lang="en-US" sz="2800" dirty="0">
-                <a:solidFill>
-                  <a:schemeClr val="accent6">
-                    <a:lumMod val="60000"/>
-                    <a:lumOff val="40000"/>
-                  </a:schemeClr>
-                </a:solidFill>
-              </a:rPr>
-              <a:t>It receives a goal, breaks it into steps, uses </a:t>
-            </a:r>
-            <a:r>
-              <a:rPr lang="en-US" sz="2800" b="1" i="1" dirty="0">
-                <a:solidFill>
-                  <a:schemeClr val="accent6">
-                    <a:lumMod val="60000"/>
-                    <a:lumOff val="40000"/>
-                  </a:schemeClr>
-                </a:solidFill>
-              </a:rPr>
-              <a:t>tools</a:t>
-            </a:r>
-            <a:r>
-              <a:rPr lang="en-US" sz="2800" dirty="0">
-                <a:solidFill>
-                  <a:schemeClr val="accent6">
-                    <a:lumMod val="60000"/>
-                    <a:lumOff val="40000"/>
-                  </a:schemeClr>
-                </a:solidFill>
-              </a:rPr>
-              <a:t> (web search, code execution, APIs), checks its own output, and iterates — all without a human driving every step. </a:t>
-            </a:r>
-          </a:p>
-        </p:txBody>
-      </p:sp>
-      <p:sp>
-        <p:nvSpPr>
-          <p:cNvPr id="4" name="Rectangle: Rounded Corners 3">
-            <a:extLst>
-              <a:ext uri="{FF2B5EF4-FFF2-40B4-BE49-F238E27FC236}">
-                <a16:creationId xmlns:a16="http://schemas.microsoft.com/office/drawing/2014/main" id="{3573C5F2-CF75-13AC-9758-9C3197737211}"/>
-              </a:ext>
-            </a:extLst>
-          </p:cNvPr>
-          <p:cNvSpPr/>
-          <p:nvPr/>
-        </p:nvSpPr>
-        <p:spPr>
-          <a:xfrm>
-            <a:off x="2587752" y="3337560"/>
-            <a:ext cx="3150108" cy="1353312"/>
-          </a:xfrm>
-          <a:prstGeom prst="roundRect">
-            <a:avLst/>
-          </a:prstGeom>
-        </p:spPr>
-        <p:style>
-          <a:lnRef idx="2">
-            <a:schemeClr val="accent1">
-              <a:shade val="15000"/>
-            </a:schemeClr>
-          </a:lnRef>
-          <a:fillRef idx="1">
-            <a:schemeClr val="accent1"/>
-          </a:fillRef>
-          <a:effectRef idx="0">
-            <a:schemeClr val="accent1"/>
-          </a:effectRef>
-          <a:fontRef idx="minor">
-            <a:schemeClr val="lt1"/>
-          </a:fontRef>
-        </p:style>
-        <p:txBody>
-          <a:bodyPr rtlCol="0" anchor="ctr"/>
-          <a:lstStyle/>
-          <a:p>
-            <a:pPr algn="ctr"/>
-            <a:r>
-              <a:rPr lang="en-US" sz="3200" dirty="0"/>
-              <a:t>Agent</a:t>
-            </a:r>
-          </a:p>
-          <a:p>
-            <a:pPr algn="ctr"/>
-            <a:r>
-              <a:rPr lang="en-US" sz="2400" dirty="0"/>
-              <a:t>LLM + Tools + Memory </a:t>
-            </a:r>
-          </a:p>
-        </p:txBody>
-      </p:sp>
-      <p:sp>
-        <p:nvSpPr>
-          <p:cNvPr id="6" name="TextBox 5">
-            <a:extLst>
-              <a:ext uri="{FF2B5EF4-FFF2-40B4-BE49-F238E27FC236}">
-                <a16:creationId xmlns:a16="http://schemas.microsoft.com/office/drawing/2014/main" id="{B65B9301-16F9-0E28-0264-033798AFB8D5}"/>
-              </a:ext>
-            </a:extLst>
-          </p:cNvPr>
-          <p:cNvSpPr txBox="1"/>
-          <p:nvPr/>
-        </p:nvSpPr>
-        <p:spPr>
-          <a:xfrm>
-            <a:off x="228600" y="3629160"/>
-            <a:ext cx="1636776" cy="461665"/>
-          </a:xfrm>
-          <a:prstGeom prst="rect">
-            <a:avLst/>
-          </a:prstGeom>
-          <a:noFill/>
-        </p:spPr>
-        <p:txBody>
-          <a:bodyPr wrap="square">
-            <a:spAutoFit/>
-          </a:bodyPr>
-          <a:lstStyle/>
-          <a:p>
-            <a:r>
-              <a:rPr lang="en-US" sz="2400" dirty="0">
-                <a:solidFill>
-                  <a:schemeClr val="accent4">
-                    <a:lumMod val="60000"/>
-                    <a:lumOff val="40000"/>
-                  </a:schemeClr>
-                </a:solidFill>
-              </a:rPr>
-              <a:t>Goal / Task</a:t>
-            </a:r>
-          </a:p>
-        </p:txBody>
-      </p:sp>
-      <p:sp>
-        <p:nvSpPr>
-          <p:cNvPr id="8" name="TextBox 7">
-            <a:extLst>
-              <a:ext uri="{FF2B5EF4-FFF2-40B4-BE49-F238E27FC236}">
-                <a16:creationId xmlns:a16="http://schemas.microsoft.com/office/drawing/2014/main" id="{B2ACE0F2-8DB3-2B41-6CDB-8272422C3491}"/>
-              </a:ext>
-            </a:extLst>
-          </p:cNvPr>
-          <p:cNvSpPr txBox="1"/>
-          <p:nvPr/>
-        </p:nvSpPr>
-        <p:spPr>
-          <a:xfrm>
-            <a:off x="2433828" y="4769829"/>
-            <a:ext cx="4005072" cy="461665"/>
-          </a:xfrm>
-          <a:prstGeom prst="rect">
-            <a:avLst/>
-          </a:prstGeom>
-          <a:noFill/>
-        </p:spPr>
-        <p:txBody>
-          <a:bodyPr wrap="square">
-            <a:spAutoFit/>
-          </a:bodyPr>
-          <a:lstStyle/>
-          <a:p>
-            <a:r>
-              <a:rPr lang="en-US" sz="2400" dirty="0">
-                <a:solidFill>
-                  <a:schemeClr val="accent4">
-                    <a:lumMod val="60000"/>
-                    <a:lumOff val="40000"/>
-                  </a:schemeClr>
-                </a:solidFill>
-              </a:rPr>
-              <a:t>Breaks task into smaller tasks</a:t>
-            </a:r>
-          </a:p>
-        </p:txBody>
-      </p:sp>
-      <p:sp>
-        <p:nvSpPr>
-          <p:cNvPr id="10" name="Rectangle: Rounded Corners 9">
-            <a:extLst>
-              <a:ext uri="{FF2B5EF4-FFF2-40B4-BE49-F238E27FC236}">
-                <a16:creationId xmlns:a16="http://schemas.microsoft.com/office/drawing/2014/main" id="{DF91DF13-EF5F-E320-06B9-129EFA7C3541}"/>
-              </a:ext>
-            </a:extLst>
-          </p:cNvPr>
-          <p:cNvSpPr/>
-          <p:nvPr/>
-        </p:nvSpPr>
-        <p:spPr>
-          <a:xfrm>
-            <a:off x="2894076" y="2291120"/>
-            <a:ext cx="2679192" cy="523220"/>
-          </a:xfrm>
-          <a:prstGeom prst="roundRect">
-            <a:avLst/>
-          </a:prstGeom>
-        </p:spPr>
-        <p:style>
-          <a:lnRef idx="1">
-            <a:schemeClr val="accent2"/>
-          </a:lnRef>
-          <a:fillRef idx="2">
-            <a:schemeClr val="accent2"/>
-          </a:fillRef>
-          <a:effectRef idx="1">
-            <a:schemeClr val="accent2"/>
-          </a:effectRef>
-          <a:fontRef idx="minor">
-            <a:schemeClr val="dk1"/>
-          </a:fontRef>
-        </p:style>
-        <p:txBody>
-          <a:bodyPr rtlCol="0" anchor="ctr"/>
-          <a:lstStyle/>
-          <a:p>
-            <a:pPr algn="ctr"/>
-            <a:r>
-              <a:rPr lang="en-US" dirty="0"/>
-              <a:t>Web search, Code Execution, API call</a:t>
-            </a:r>
-          </a:p>
-        </p:txBody>
-      </p:sp>
-      <p:sp>
-        <p:nvSpPr>
-          <p:cNvPr id="12" name="Arrow: Up-Down 11">
-            <a:extLst>
-              <a:ext uri="{FF2B5EF4-FFF2-40B4-BE49-F238E27FC236}">
-                <a16:creationId xmlns:a16="http://schemas.microsoft.com/office/drawing/2014/main" id="{53108634-64DD-37B1-6296-D04CE227F2A8}"/>
-              </a:ext>
-            </a:extLst>
-          </p:cNvPr>
-          <p:cNvSpPr/>
-          <p:nvPr/>
-        </p:nvSpPr>
-        <p:spPr>
-          <a:xfrm>
-            <a:off x="3944112" y="2814340"/>
-            <a:ext cx="374904" cy="523220"/>
-          </a:xfrm>
-          <a:prstGeom prst="upDownArrow">
-            <a:avLst/>
-          </a:prstGeom>
-        </p:spPr>
-        <p:style>
-          <a:lnRef idx="2">
-            <a:schemeClr val="accent1">
-              <a:shade val="15000"/>
-            </a:schemeClr>
-          </a:lnRef>
-          <a:fillRef idx="1">
-            <a:schemeClr val="accent1"/>
-          </a:fillRef>
-          <a:effectRef idx="0">
-            <a:schemeClr val="accent1"/>
-          </a:effectRef>
-          <a:fontRef idx="minor">
-            <a:schemeClr val="lt1"/>
-          </a:fontRef>
-        </p:style>
-        <p:txBody>
-          <a:bodyPr rtlCol="0" anchor="ctr"/>
-          <a:lstStyle/>
-          <a:p>
-            <a:pPr algn="ctr"/>
-            <a:endParaRPr lang="en-IN"/>
-          </a:p>
-        </p:txBody>
-      </p:sp>
-      <p:sp>
-        <p:nvSpPr>
-          <p:cNvPr id="16" name="TextBox 15">
-            <a:extLst>
-              <a:ext uri="{FF2B5EF4-FFF2-40B4-BE49-F238E27FC236}">
-                <a16:creationId xmlns:a16="http://schemas.microsoft.com/office/drawing/2014/main" id="{DA34CF6C-C843-7EB7-C0A9-7A1580270165}"/>
-              </a:ext>
-            </a:extLst>
-          </p:cNvPr>
-          <p:cNvSpPr txBox="1"/>
-          <p:nvPr/>
-        </p:nvSpPr>
-        <p:spPr>
-          <a:xfrm>
-            <a:off x="6306312" y="3629160"/>
-            <a:ext cx="1636776" cy="461665"/>
-          </a:xfrm>
-          <a:prstGeom prst="rect">
-            <a:avLst/>
-          </a:prstGeom>
-          <a:noFill/>
-        </p:spPr>
-        <p:txBody>
-          <a:bodyPr wrap="square">
-            <a:spAutoFit/>
-          </a:bodyPr>
-          <a:lstStyle/>
-          <a:p>
-            <a:r>
-              <a:rPr lang="en-US" sz="2400" dirty="0">
-                <a:solidFill>
-                  <a:schemeClr val="accent4">
-                    <a:lumMod val="60000"/>
-                    <a:lumOff val="40000"/>
-                  </a:schemeClr>
-                </a:solidFill>
-              </a:rPr>
-              <a:t>Task done</a:t>
-            </a:r>
-          </a:p>
-        </p:txBody>
-      </p:sp>
-      <p:sp>
-        <p:nvSpPr>
-          <p:cNvPr id="17" name="Arrow: Right 16">
-            <a:extLst>
-              <a:ext uri="{FF2B5EF4-FFF2-40B4-BE49-F238E27FC236}">
-                <a16:creationId xmlns:a16="http://schemas.microsoft.com/office/drawing/2014/main" id="{5852A351-D286-117B-92DB-57672AA04D2A}"/>
-              </a:ext>
-            </a:extLst>
-          </p:cNvPr>
-          <p:cNvSpPr/>
-          <p:nvPr/>
-        </p:nvSpPr>
-        <p:spPr>
-          <a:xfrm>
-            <a:off x="1865376" y="3629160"/>
-            <a:ext cx="568452" cy="461665"/>
-          </a:xfrm>
-          <a:prstGeom prst="rightArrow">
-            <a:avLst/>
-          </a:prstGeom>
-        </p:spPr>
-        <p:style>
-          <a:lnRef idx="2">
-            <a:schemeClr val="accent1">
-              <a:shade val="15000"/>
-            </a:schemeClr>
-          </a:lnRef>
-          <a:fillRef idx="1">
-            <a:schemeClr val="accent1"/>
-          </a:fillRef>
-          <a:effectRef idx="0">
-            <a:schemeClr val="accent1"/>
-          </a:effectRef>
-          <a:fontRef idx="minor">
-            <a:schemeClr val="lt1"/>
-          </a:fontRef>
-        </p:style>
-        <p:txBody>
-          <a:bodyPr rtlCol="0" anchor="ctr"/>
-          <a:lstStyle/>
-          <a:p>
-            <a:pPr algn="ctr"/>
-            <a:endParaRPr lang="en-IN"/>
-          </a:p>
-        </p:txBody>
-      </p:sp>
-      <p:sp>
-        <p:nvSpPr>
-          <p:cNvPr id="19" name="Arrow: Right 18">
-            <a:extLst>
-              <a:ext uri="{FF2B5EF4-FFF2-40B4-BE49-F238E27FC236}">
-                <a16:creationId xmlns:a16="http://schemas.microsoft.com/office/drawing/2014/main" id="{00E04D5F-6F35-4088-C77E-17F290D1E3DA}"/>
-              </a:ext>
-            </a:extLst>
-          </p:cNvPr>
-          <p:cNvSpPr/>
-          <p:nvPr/>
-        </p:nvSpPr>
-        <p:spPr>
-          <a:xfrm>
-            <a:off x="5775960" y="3629160"/>
-            <a:ext cx="568452" cy="461665"/>
-          </a:xfrm>
-          <a:prstGeom prst="rightArrow">
-            <a:avLst/>
-          </a:prstGeom>
-        </p:spPr>
-        <p:style>
-          <a:lnRef idx="2">
-            <a:schemeClr val="accent1">
-              <a:shade val="15000"/>
-            </a:schemeClr>
-          </a:lnRef>
-          <a:fillRef idx="1">
-            <a:schemeClr val="accent1"/>
-          </a:fillRef>
-          <a:effectRef idx="0">
-            <a:schemeClr val="accent1"/>
-          </a:effectRef>
-          <a:fontRef idx="minor">
-            <a:schemeClr val="lt1"/>
-          </a:fontRef>
-        </p:style>
-        <p:txBody>
-          <a:bodyPr rtlCol="0" anchor="ctr"/>
-          <a:lstStyle/>
-          <a:p>
-            <a:pPr algn="ctr"/>
-            <a:endParaRPr lang="en-IN"/>
-          </a:p>
-        </p:txBody>
-      </p:sp>
-    </p:spTree>
-    <p:extLst>
-      <p:ext uri="{BB962C8B-B14F-4D97-AF65-F5344CB8AC3E}">
-        <p14:creationId xmlns:p14="http://schemas.microsoft.com/office/powerpoint/2010/main" val="368663484"/>
-      </p:ext>
-    </p:extLst>
-  </p:cSld>
-  <p:clrMapOvr>
-    <a:masterClrMapping/>
-  </p:clrMapOvr>
-</p:sld>
-</file>
-
-<file path=ppt/slides/slide9.xml><?xml version="1.0" encoding="utf-8"?>
-<p:sld xmlns:a="http://schemas.openxmlformats.org/drawingml/2006/main" xmlns:r="http://schemas.openxmlformats.org/officeDocument/2006/relationships" xmlns:p="http://schemas.openxmlformats.org/presentationml/2006/main">
-  <p:cSld>
-    <p:spTree>
-      <p:nvGrpSpPr>
-        <p:cNvPr id="1" name="">
-          <a:extLst>
-            <a:ext uri="{FF2B5EF4-FFF2-40B4-BE49-F238E27FC236}">
-              <a16:creationId xmlns:a16="http://schemas.microsoft.com/office/drawing/2014/main" id="{728CE86D-EF25-800A-6BF1-CA6EE56C8528}"/>
-            </a:ext>
-          </a:extLst>
-        </p:cNvPr>
-        <p:cNvGrpSpPr/>
-        <p:nvPr/>
-      </p:nvGrpSpPr>
-      <p:grpSpPr>
-        <a:xfrm>
-          <a:off x="0" y="0"/>
-          <a:ext cx="0" cy="0"/>
-          <a:chOff x="0" y="0"/>
-          <a:chExt cx="0" cy="0"/>
-        </a:xfrm>
-      </p:grpSpPr>
-      <p:sp>
-        <p:nvSpPr>
-          <p:cNvPr id="3" name="TextBox 2">
-            <a:extLst>
-              <a:ext uri="{FF2B5EF4-FFF2-40B4-BE49-F238E27FC236}">
-                <a16:creationId xmlns:a16="http://schemas.microsoft.com/office/drawing/2014/main" id="{CA38D18B-AE90-95C0-C949-64200AEC9E22}"/>
-              </a:ext>
-            </a:extLst>
-          </p:cNvPr>
-          <p:cNvSpPr txBox="1"/>
-          <p:nvPr/>
-        </p:nvSpPr>
-        <p:spPr>
-          <a:xfrm>
-            <a:off x="228600" y="1012954"/>
-            <a:ext cx="11018520" cy="4401205"/>
-          </a:xfrm>
-          <a:prstGeom prst="rect">
-            <a:avLst/>
-          </a:prstGeom>
-          <a:noFill/>
-        </p:spPr>
-        <p:txBody>
-          <a:bodyPr wrap="square">
-            <a:spAutoFit/>
-          </a:bodyPr>
-          <a:lstStyle/>
-          <a:p>
-            <a:r>
-              <a:rPr lang="en-US" sz="2800" b="1" dirty="0">
-                <a:solidFill>
-                  <a:schemeClr val="accent6">
-                    <a:lumMod val="60000"/>
-                    <a:lumOff val="40000"/>
-                  </a:schemeClr>
-                </a:solidFill>
-              </a:rPr>
-              <a:t>Discussion for Class</a:t>
-            </a:r>
-          </a:p>
-          <a:p>
-            <a:endParaRPr lang="en-US" sz="2800" b="1" dirty="0">
-              <a:solidFill>
-                <a:schemeClr val="accent6">
-                  <a:lumMod val="60000"/>
-                  <a:lumOff val="40000"/>
-                </a:schemeClr>
-              </a:solidFill>
-            </a:endParaRPr>
-          </a:p>
-          <a:p>
-            <a:r>
-              <a:rPr lang="en-US" sz="2800" i="1" dirty="0">
-                <a:solidFill>
-                  <a:schemeClr val="accent6">
-                    <a:lumMod val="60000"/>
-                    <a:lumOff val="40000"/>
-                  </a:schemeClr>
-                </a:solidFill>
-              </a:rPr>
-              <a:t>"A bank deploys an autonomous agent that can </a:t>
-            </a:r>
-          </a:p>
-          <a:p>
-            <a:pPr marL="457200" indent="-457200">
-              <a:buFont typeface="Arial" panose="020B0604020202020204" pitchFamily="34" charset="0"/>
-              <a:buChar char="•"/>
-            </a:pPr>
-            <a:r>
-              <a:rPr lang="en-US" sz="2800" i="1" dirty="0">
-                <a:solidFill>
-                  <a:schemeClr val="accent6">
-                    <a:lumMod val="60000"/>
-                    <a:lumOff val="40000"/>
-                  </a:schemeClr>
-                </a:solidFill>
-              </a:rPr>
-              <a:t>access accounts, </a:t>
-            </a:r>
-          </a:p>
-          <a:p>
-            <a:pPr marL="457200" indent="-457200">
-              <a:buFont typeface="Arial" panose="020B0604020202020204" pitchFamily="34" charset="0"/>
-              <a:buChar char="•"/>
-            </a:pPr>
-            <a:r>
-              <a:rPr lang="en-US" sz="2800" i="1" dirty="0">
-                <a:solidFill>
-                  <a:schemeClr val="accent6">
-                    <a:lumMod val="60000"/>
-                    <a:lumOff val="40000"/>
-                  </a:schemeClr>
-                </a:solidFill>
-              </a:rPr>
-              <a:t>move money, and </a:t>
-            </a:r>
-          </a:p>
-          <a:p>
-            <a:pPr marL="457200" indent="-457200">
-              <a:buFont typeface="Arial" panose="020B0604020202020204" pitchFamily="34" charset="0"/>
-              <a:buChar char="•"/>
-            </a:pPr>
-            <a:r>
-              <a:rPr lang="en-US" sz="2800" i="1" dirty="0">
-                <a:solidFill>
-                  <a:schemeClr val="accent6">
-                    <a:lumMod val="60000"/>
-                    <a:lumOff val="40000"/>
-                  </a:schemeClr>
-                </a:solidFill>
-              </a:rPr>
-              <a:t>close disputes </a:t>
-            </a:r>
-          </a:p>
-          <a:p>
-            <a:r>
-              <a:rPr lang="en-US" sz="2800" i="1" dirty="0">
-                <a:solidFill>
-                  <a:schemeClr val="accent6">
-                    <a:lumMod val="60000"/>
-                    <a:lumOff val="40000"/>
-                  </a:schemeClr>
-                </a:solidFill>
-              </a:rPr>
-              <a:t>— all without a human approving each action. </a:t>
-            </a:r>
-          </a:p>
-          <a:p>
-            <a:endParaRPr lang="en-US" sz="2800" i="1" dirty="0">
-              <a:solidFill>
-                <a:schemeClr val="accent6">
-                  <a:lumMod val="60000"/>
-                  <a:lumOff val="40000"/>
-                </a:schemeClr>
-              </a:solidFill>
-            </a:endParaRPr>
-          </a:p>
-          <a:p>
-            <a:pPr marL="514350" indent="-514350">
-              <a:buFont typeface="+mj-lt"/>
-              <a:buAutoNum type="arabicPeriod"/>
-            </a:pPr>
-            <a:r>
-              <a:rPr lang="en-US" sz="2800" i="1" dirty="0">
-                <a:solidFill>
-                  <a:schemeClr val="accent6">
-                    <a:lumMod val="60000"/>
-                    <a:lumOff val="40000"/>
-                  </a:schemeClr>
-                </a:solidFill>
-              </a:rPr>
-              <a:t>What conditions would need to be true for you to trust that system ?</a:t>
-            </a:r>
-          </a:p>
-          <a:p>
-            <a:pPr marL="514350" indent="-514350">
-              <a:buFont typeface="+mj-lt"/>
-              <a:buAutoNum type="arabicPeriod"/>
-            </a:pPr>
-            <a:r>
-              <a:rPr lang="en-US" sz="2800" i="1" dirty="0">
-                <a:solidFill>
-                  <a:schemeClr val="accent6">
-                    <a:lumMod val="60000"/>
-                    <a:lumOff val="40000"/>
-                  </a:schemeClr>
-                </a:solidFill>
-              </a:rPr>
-              <a:t>What would make you distrust it ?"</a:t>
-            </a:r>
-            <a:endParaRPr lang="en-US" sz="2800" dirty="0">
-              <a:solidFill>
-                <a:schemeClr val="accent6">
-                  <a:lumMod val="60000"/>
-                  <a:lumOff val="40000"/>
-                </a:schemeClr>
-              </a:solidFill>
-            </a:endParaRPr>
-          </a:p>
-        </p:txBody>
-      </p:sp>
-    </p:spTree>
-    <p:extLst>
-      <p:ext uri="{BB962C8B-B14F-4D97-AF65-F5344CB8AC3E}">
-        <p14:creationId xmlns:p14="http://schemas.microsoft.com/office/powerpoint/2010/main" val="2206521416"/>
       </p:ext>
     </p:extLst>
   </p:cSld>
